--- a/PRD_Design_System_and_Content_Guidelines.pptx
+++ b/PRD_Design_System_and_Content_Guidelines.pptx
@@ -1678,7 +1678,7 @@
         <p:spPr>
           <a:xfrm>
             <a:off x="0" y="0"/>
-            <a:ext cx="9144000" cy="5143500"/>
+            <a:ext cx="12188952" cy="6858000"/>
           </a:xfrm>
           <a:prstGeom prst="rect">
             <a:avLst/>
@@ -1698,7 +1698,7 @@
         <p:spPr>
           <a:xfrm>
             <a:off x="0" y="0"/>
-            <a:ext cx="137160" cy="5143500"/>
+            <a:ext cx="137160" cy="6858000"/>
           </a:xfrm>
           <a:prstGeom prst="rect">
             <a:avLst/>
@@ -1717,8 +1717,8 @@
         </p:nvSpPr>
         <p:spPr>
           <a:xfrm>
-            <a:off x="914400" y="1828800"/>
-            <a:ext cx="10058400" cy="365760"/>
+            <a:off x="731520" y="1371600"/>
+            <a:ext cx="10058400" cy="274320"/>
           </a:xfrm>
           <a:prstGeom prst="rect">
             <a:avLst/>
@@ -1734,7 +1734,7 @@
               <a:buNone/>
             </a:pPr>
             <a:r>
-              <a:rPr lang="en-US" sz="1400" b="1" dirty="0">
+              <a:rPr lang="en-US" sz="1300" b="1" dirty="0">
                 <a:solidFill>
                   <a:srgbClr val="39FF14"/>
                 </a:solidFill>
@@ -1744,7 +1744,7 @@
               </a:rPr>
               <a:t>CLASH OF UNXPADTED</a:t>
             </a:r>
-            <a:endParaRPr lang="en-US" sz="1400" dirty="0"/>
+            <a:endParaRPr lang="en-US" sz="1300" dirty="0"/>
           </a:p>
         </p:txBody>
       </p:sp>
@@ -1756,8 +1756,8 @@
         </p:nvSpPr>
         <p:spPr>
           <a:xfrm>
-            <a:off x="914400" y="2286000"/>
-            <a:ext cx="10058400" cy="914400"/>
+            <a:off x="731520" y="1737360"/>
+            <a:ext cx="10058400" cy="731520"/>
           </a:xfrm>
           <a:prstGeom prst="rect">
             <a:avLst/>
@@ -1773,7 +1773,7 @@
               <a:buNone/>
             </a:pPr>
             <a:r>
-              <a:rPr lang="en-US" sz="3800" b="1" dirty="0">
+              <a:rPr lang="en-US" sz="3600" b="1" dirty="0">
                 <a:solidFill>
                   <a:srgbClr val="FFFFFF"/>
                 </a:solidFill>
@@ -1783,7 +1783,7 @@
               </a:rPr>
               <a:t>Design System &amp; Content PRD</a:t>
             </a:r>
-            <a:endParaRPr lang="en-US" sz="3800" dirty="0"/>
+            <a:endParaRPr lang="en-US" sz="3600" dirty="0"/>
           </a:p>
         </p:txBody>
       </p:sp>
@@ -1795,8 +1795,8 @@
         </p:nvSpPr>
         <p:spPr>
           <a:xfrm>
-            <a:off x="914400" y="3291840"/>
-            <a:ext cx="9144000" cy="457200"/>
+            <a:off x="731520" y="2560320"/>
+            <a:ext cx="10058400" cy="365760"/>
           </a:xfrm>
           <a:prstGeom prst="rect">
             <a:avLst/>
@@ -1812,7 +1812,7 @@
               <a:buNone/>
             </a:pPr>
             <a:r>
-              <a:rPr lang="en-US" sz="1600" dirty="0">
+              <a:rPr lang="en-US" sz="1500" dirty="0">
                 <a:solidFill>
                   <a:srgbClr val="A3A3A3"/>
                 </a:solidFill>
@@ -1822,7 +1822,7 @@
               </a:rPr>
               <a:t>Technical &amp; Visual Requirements for Graphic Designers and Game Content Writers</a:t>
             </a:r>
-            <a:endParaRPr lang="en-US" sz="1600" dirty="0"/>
+            <a:endParaRPr lang="en-US" sz="1500" dirty="0"/>
           </a:p>
         </p:txBody>
       </p:sp>
@@ -1834,18 +1834,18 @@
         </p:nvSpPr>
         <p:spPr>
           <a:xfrm>
-            <a:off x="914400" y="4206240"/>
-            <a:ext cx="10332720" cy="1645920"/>
+            <a:off x="731520" y="3291840"/>
+            <a:ext cx="10698480" cy="2743200"/>
           </a:xfrm>
           <a:prstGeom prst="rect">
             <a:avLst/>
           </a:prstGeom>
           <a:solidFill>
-            <a:srgbClr val="121212"/>
+            <a:srgbClr val="181818"/>
           </a:solidFill>
           <a:ln w="12700">
             <a:solidFill>
-              <a:srgbClr val="282828"/>
+              <a:srgbClr val="2A2A2A"/>
             </a:solidFill>
             <a:prstDash val="solid"/>
           </a:ln>
@@ -1859,8 +1859,8 @@
         </p:nvSpPr>
         <p:spPr>
           <a:xfrm>
-            <a:off x="1188720" y="4389120"/>
-            <a:ext cx="3657600" cy="274320"/>
+            <a:off x="1005840" y="3566160"/>
+            <a:ext cx="10058400" cy="274320"/>
           </a:xfrm>
           <a:prstGeom prst="rect">
             <a:avLst/>
@@ -1884,7 +1884,7 @@
                 <a:ea typeface="Arial" pitchFamily="34" charset="-122"/>
                 <a:cs typeface="Arial" pitchFamily="34" charset="-120"/>
               </a:rPr>
-              <a:t>Platform Specification:</a:t>
+              <a:t>PLATFORM &amp; HARDWARE SPECIFICATIONS</a:t>
             </a:r>
             <a:endParaRPr lang="en-US" sz="1200" dirty="0"/>
           </a:p>
@@ -1898,8 +1898,8 @@
         </p:nvSpPr>
         <p:spPr>
           <a:xfrm>
-            <a:off x="1188720" y="4754880"/>
-            <a:ext cx="9601200" cy="914400"/>
+            <a:off x="1005840" y="4023360"/>
+            <a:ext cx="10149840" cy="1828800"/>
           </a:xfrm>
           <a:prstGeom prst="rect">
             <a:avLst/>
@@ -1918,17 +1918,17 @@
               <a:buNone/>
             </a:pPr>
             <a:r>
-              <a:rPr lang="en-US" sz="1200" dirty="0">
-                <a:solidFill>
-                  <a:srgbClr val="FFFFFF"/>
-                </a:solidFill>
-                <a:latin typeface="Helvetica" pitchFamily="34" charset="0"/>
-                <a:ea typeface="Helvetica" pitchFamily="34" charset="-122"/>
-                <a:cs typeface="Helvetica" pitchFamily="34" charset="-120"/>
-              </a:rPr>
-              <a:t>• Hardware Focus: Infinix XPAD 30 Pro (11" 2K Display, 90Hz Refresh)</a:t>
-            </a:r>
-            <a:endParaRPr lang="en-US" sz="1200" dirty="0"/>
+              <a:rPr lang="en-US" sz="1100" dirty="0">
+                <a:solidFill>
+                  <a:srgbClr val="FFFFFF"/>
+                </a:solidFill>
+                <a:latin typeface="Helvetica" pitchFamily="34" charset="0"/>
+                <a:ea typeface="Helvetica" pitchFamily="34" charset="-122"/>
+                <a:cs typeface="Helvetica" pitchFamily="34" charset="-120"/>
+              </a:rPr>
+              <a:t>• Hardware Focus: Infinix XPAD 30 Pro (11" 2K Display, 90Hz Refresh Rate, Dual Speakers)</a:t>
+            </a:r>
+            <a:endParaRPr lang="en-US" sz="1100" dirty="0"/>
           </a:p>
           <a:p>
             <a:pPr indent="0" marL="0">
@@ -1938,17 +1938,17 @@
               <a:buNone/>
             </a:pPr>
             <a:r>
-              <a:rPr lang="en-US" sz="1200" dirty="0">
-                <a:solidFill>
-                  <a:srgbClr val="FFFFFF"/>
-                </a:solidFill>
-                <a:latin typeface="Helvetica" pitchFamily="34" charset="0"/>
-                <a:ea typeface="Helvetica" pitchFamily="34" charset="-122"/>
-                <a:cs typeface="Helvetica" pitchFamily="34" charset="-120"/>
-              </a:rPr>
-              <a:t>• Target Audience: Slash Gen Students (18–25) — Academics x Esports Esports Hybrid</a:t>
-            </a:r>
-            <a:endParaRPr lang="en-US" sz="1200" dirty="0"/>
+              <a:rPr lang="en-US" sz="1100" dirty="0">
+                <a:solidFill>
+                  <a:srgbClr val="FFFFFF"/>
+                </a:solidFill>
+                <a:latin typeface="Helvetica" pitchFamily="34" charset="0"/>
+                <a:ea typeface="Helvetica" pitchFamily="34" charset="-122"/>
+                <a:cs typeface="Helvetica" pitchFamily="34" charset="-120"/>
+              </a:rPr>
+              <a:t>• Target Audience: "Slash Gen" Students (18–25) — Hybrid Competition (Academic x Esports)</a:t>
+            </a:r>
+            <a:endParaRPr lang="en-US" sz="1100" dirty="0"/>
           </a:p>
           <a:p>
             <a:pPr indent="0" marL="0">
@@ -1958,17 +1958,37 @@
               <a:buNone/>
             </a:pPr>
             <a:r>
-              <a:rPr lang="en-US" sz="1200" dirty="0">
-                <a:solidFill>
-                  <a:srgbClr val="FFFFFF"/>
-                </a:solidFill>
-                <a:latin typeface="Helvetica" pitchFamily="34" charset="0"/>
-                <a:ea typeface="Helvetica" pitchFamily="34" charset="-122"/>
-                <a:cs typeface="Helvetica" pitchFamily="34" charset="-120"/>
-              </a:rPr>
-              <a:t>• Delivery Format: PptxGenJS Documented PRD for Graphic Assets &amp; Content Templates</a:t>
-            </a:r>
-            <a:endParaRPr lang="en-US" sz="1200" dirty="0"/>
+              <a:rPr lang="en-US" sz="1100" dirty="0">
+                <a:solidFill>
+                  <a:srgbClr val="FFFFFF"/>
+                </a:solidFill>
+                <a:latin typeface="Helvetica" pitchFamily="34" charset="0"/>
+                <a:ea typeface="Helvetica" pitchFamily="34" charset="-122"/>
+                <a:cs typeface="Helvetica" pitchFamily="34" charset="-120"/>
+              </a:rPr>
+              <a:t>• Design Philosophy: Dark Mode Neon High-Contrast UI optimized for outdoor esports arena lighting</a:t>
+            </a:r>
+            <a:endParaRPr lang="en-US" sz="1100" dirty="0"/>
+          </a:p>
+          <a:p>
+            <a:pPr indent="0" marL="0">
+              <a:lnSpc>
+                <a:spcPts val="1800"/>
+              </a:lnSpc>
+              <a:buNone/>
+            </a:pPr>
+            <a:r>
+              <a:rPr lang="en-US" sz="1100" dirty="0">
+                <a:solidFill>
+                  <a:srgbClr val="FFFFFF"/>
+                </a:solidFill>
+                <a:latin typeface="Helvetica" pitchFamily="34" charset="0"/>
+                <a:ea typeface="Helvetica" pitchFamily="34" charset="-122"/>
+                <a:cs typeface="Helvetica" pitchFamily="34" charset="-120"/>
+              </a:rPr>
+              <a:t>• Content Standard: Universal CSV data structures with live WebSockets sync across all devices</a:t>
+            </a:r>
+            <a:endParaRPr lang="en-US" sz="1100" dirty="0"/>
           </a:p>
         </p:txBody>
       </p:sp>
@@ -2006,7 +2026,7 @@
         <p:spPr>
           <a:xfrm>
             <a:off x="0" y="0"/>
-            <a:ext cx="9144000" cy="5143500"/>
+            <a:ext cx="12188952" cy="6858000"/>
           </a:xfrm>
           <a:prstGeom prst="rect">
             <a:avLst/>
@@ -2026,7 +2046,7 @@
         <p:spPr>
           <a:xfrm>
             <a:off x="0" y="0"/>
-            <a:ext cx="9144000" cy="73152"/>
+            <a:ext cx="12188952" cy="73152"/>
           </a:xfrm>
           <a:prstGeom prst="rect">
             <a:avLst/>
@@ -2045,8 +2065,8 @@
         </p:nvSpPr>
         <p:spPr>
           <a:xfrm>
-            <a:off x="731520" y="365760"/>
-            <a:ext cx="7315200" cy="274320"/>
+            <a:off x="548640" y="320040"/>
+            <a:ext cx="7315200" cy="228600"/>
           </a:xfrm>
           <a:prstGeom prst="rect">
             <a:avLst/>
@@ -2062,7 +2082,7 @@
               <a:buNone/>
             </a:pPr>
             <a:r>
-              <a:rPr lang="en-US" sz="1000" b="1" dirty="0">
+              <a:rPr lang="en-US" sz="900" b="1" dirty="0">
                 <a:solidFill>
                   <a:srgbClr val="39FF14"/>
                 </a:solidFill>
@@ -2072,7 +2092,7 @@
               </a:rPr>
               <a:t>TEAM WORKFLOW</a:t>
             </a:r>
-            <a:endParaRPr lang="en-US" sz="1000" dirty="0"/>
+            <a:endParaRPr lang="en-US" sz="900" dirty="0"/>
           </a:p>
         </p:txBody>
       </p:sp>
@@ -2084,8 +2104,8 @@
         </p:nvSpPr>
         <p:spPr>
           <a:xfrm>
-            <a:off x="731520" y="640080"/>
-            <a:ext cx="10058400" cy="548640"/>
+            <a:off x="548640" y="548640"/>
+            <a:ext cx="11064240" cy="457200"/>
           </a:xfrm>
           <a:prstGeom prst="rect">
             <a:avLst/>
@@ -2101,7 +2121,7 @@
               <a:buNone/>
             </a:pPr>
             <a:r>
-              <a:rPr lang="en-US" sz="2400" b="1" dirty="0">
+              <a:rPr lang="en-US" sz="2200" b="1" dirty="0">
                 <a:solidFill>
                   <a:srgbClr val="FFFFFF"/>
                 </a:solidFill>
@@ -2111,20 +2131,40 @@
               </a:rPr>
               <a:t>Handoff &amp; Delivery Workflow</a:t>
             </a:r>
-            <a:endParaRPr lang="en-US" sz="2400" dirty="0"/>
-          </a:p>
-        </p:txBody>
-      </p:sp>
-      <p:sp>
-        <p:nvSpPr>
-          <p:cNvPr id="6" name="Text 4"/>
-          <p:cNvSpPr/>
-          <p:nvPr/>
-        </p:nvSpPr>
-        <p:spPr>
-          <a:xfrm>
-            <a:off x="731520" y="6492240"/>
-            <a:ext cx="9144000" cy="274320"/>
+            <a:endParaRPr lang="en-US" sz="2200" dirty="0"/>
+          </a:p>
+        </p:txBody>
+      </p:sp>
+      <p:sp>
+        <p:nvSpPr>
+          <p:cNvPr id="6" name="Shape 4"/>
+          <p:cNvSpPr/>
+          <p:nvPr/>
+        </p:nvSpPr>
+        <p:spPr>
+          <a:xfrm>
+            <a:off x="548640" y="6217920"/>
+            <a:ext cx="11091672" cy="18288"/>
+          </a:xfrm>
+          <a:prstGeom prst="rect">
+            <a:avLst/>
+          </a:prstGeom>
+          <a:solidFill>
+            <a:srgbClr val="2A2A2A"/>
+          </a:solidFill>
+          <a:ln/>
+        </p:spPr>
+      </p:sp>
+      <p:sp>
+        <p:nvSpPr>
+          <p:cNvPr id="7" name="Text 5"/>
+          <p:cNvSpPr/>
+          <p:nvPr/>
+        </p:nvSpPr>
+        <p:spPr>
+          <a:xfrm>
+            <a:off x="548640" y="6309360"/>
+            <a:ext cx="11091672" cy="274320"/>
           </a:xfrm>
           <a:prstGeom prst="rect">
             <a:avLst/>
@@ -2148,7 +2188,7 @@
                 <a:ea typeface="Helvetica" pitchFamily="34" charset="-122"/>
                 <a:cs typeface="Helvetica" pitchFamily="34" charset="-120"/>
               </a:rPr>
-              <a:t>Infinix XPAD 30 Pro x Ruangguru  |  Clash of Unxpadted</a:t>
+              <a:t>Infinix XPAD 30 Pro × Ruangguru  |  Clash of Unxpadted Design System PRD</a:t>
             </a:r>
             <a:endParaRPr lang="en-US" sz="900" dirty="0"/>
           </a:p>
@@ -2156,24 +2196,24 @@
       </p:sp>
       <p:sp>
         <p:nvSpPr>
-          <p:cNvPr id="7" name="Shape 5"/>
-          <p:cNvSpPr/>
-          <p:nvPr/>
-        </p:nvSpPr>
-        <p:spPr>
-          <a:xfrm>
-            <a:off x="731520" y="1371600"/>
-            <a:ext cx="10515600" cy="4754880"/>
+          <p:cNvPr id="8" name="Shape 6"/>
+          <p:cNvSpPr/>
+          <p:nvPr/>
+        </p:nvSpPr>
+        <p:spPr>
+          <a:xfrm>
+            <a:off x="548640" y="1188720"/>
+            <a:ext cx="5394960" cy="4846320"/>
           </a:xfrm>
           <a:prstGeom prst="rect">
             <a:avLst/>
           </a:prstGeom>
           <a:solidFill>
-            <a:srgbClr val="1A1A1A"/>
+            <a:srgbClr val="181818"/>
           </a:solidFill>
           <a:ln w="12700">
             <a:solidFill>
-              <a:srgbClr val="282828"/>
+              <a:srgbClr val="2A2A2A"/>
             </a:solidFill>
             <a:prstDash val="solid"/>
           </a:ln>
@@ -2181,14 +2221,14 @@
       </p:sp>
       <p:sp>
         <p:nvSpPr>
-          <p:cNvPr id="8" name="Text 6"/>
-          <p:cNvSpPr/>
-          <p:nvPr/>
-        </p:nvSpPr>
-        <p:spPr>
-          <a:xfrm>
-            <a:off x="1005840" y="1645920"/>
-            <a:ext cx="9144000" cy="365760"/>
+          <p:cNvPr id="9" name="Text 7"/>
+          <p:cNvSpPr/>
+          <p:nvPr/>
+        </p:nvSpPr>
+        <p:spPr>
+          <a:xfrm>
+            <a:off x="822960" y="1371600"/>
+            <a:ext cx="4846320" cy="365760"/>
           </a:xfrm>
           <a:prstGeom prst="rect">
             <a:avLst/>
@@ -2204,7 +2244,7 @@
               <a:buNone/>
             </a:pPr>
             <a:r>
-              <a:rPr lang="en-US" sz="1600" b="1" dirty="0">
+              <a:rPr lang="en-US" sz="1500" b="1" dirty="0">
                 <a:solidFill>
                   <a:srgbClr val="39FF14"/>
                 </a:solidFill>
@@ -2212,22 +2252,22 @@
                 <a:ea typeface="Arial" pitchFamily="34" charset="-122"/>
                 <a:cs typeface="Arial" pitchFamily="34" charset="-120"/>
               </a:rPr>
-              <a:t>🔄 Collaborative Handoff Pipeline</a:t>
-            </a:r>
-            <a:endParaRPr lang="en-US" sz="1600" dirty="0"/>
-          </a:p>
-        </p:txBody>
-      </p:sp>
-      <p:sp>
-        <p:nvSpPr>
-          <p:cNvPr id="9" name="Text 7"/>
-          <p:cNvSpPr/>
-          <p:nvPr/>
-        </p:nvSpPr>
-        <p:spPr>
-          <a:xfrm>
-            <a:off x="1005840" y="2103120"/>
-            <a:ext cx="9875520" cy="3840480"/>
+              <a:t>📁 Designer &amp; Writer Deliverables</a:t>
+            </a:r>
+            <a:endParaRPr lang="en-US" sz="1500" dirty="0"/>
+          </a:p>
+        </p:txBody>
+      </p:sp>
+      <p:sp>
+        <p:nvSpPr>
+          <p:cNvPr id="10" name="Text 8"/>
+          <p:cNvSpPr/>
+          <p:nvPr/>
+        </p:nvSpPr>
+        <p:spPr>
+          <a:xfrm>
+            <a:off x="822960" y="1828800"/>
+            <a:ext cx="4846320" cy="4023360"/>
           </a:xfrm>
           <a:prstGeom prst="rect">
             <a:avLst/>
@@ -2241,12 +2281,12 @@
           <a:p>
             <a:pPr indent="0" marL="0">
               <a:lnSpc>
-                <a:spcPts val="2200"/>
-              </a:lnSpc>
-              <a:buNone/>
-            </a:pPr>
-            <a:r>
-              <a:rPr lang="en-US" sz="1200" dirty="0">
+                <a:spcPts val="1600"/>
+              </a:lnSpc>
+              <a:buNone/>
+            </a:pPr>
+            <a:r>
+              <a:rPr lang="en-US" sz="1050" dirty="0">
                 <a:solidFill>
                   <a:srgbClr val="FFFFFF"/>
                 </a:solidFill>
@@ -2256,17 +2296,17 @@
               </a:rPr>
               <a:t>1. Graphic Designer Deliverables:</a:t>
             </a:r>
-            <a:endParaRPr lang="en-US" sz="1200" dirty="0"/>
-          </a:p>
-          <a:p>
-            <a:pPr indent="0" marL="0">
-              <a:lnSpc>
-                <a:spcPts val="2200"/>
-              </a:lnSpc>
-              <a:buNone/>
-            </a:pPr>
-            <a:r>
-              <a:rPr lang="en-US" sz="1200" dirty="0">
+            <a:endParaRPr lang="en-US" sz="1050" dirty="0"/>
+          </a:p>
+          <a:p>
+            <a:pPr indent="0" marL="0">
+              <a:lnSpc>
+                <a:spcPts val="1600"/>
+              </a:lnSpc>
+              <a:buNone/>
+            </a:pPr>
+            <a:r>
+              <a:rPr lang="en-US" sz="1050" dirty="0">
                 <a:solidFill>
                   <a:srgbClr val="FFFFFF"/>
                 </a:solidFill>
@@ -2276,17 +2316,17 @@
               </a:rPr>
               <a:t>   • Export SVG vectors to `public/assets/ui/` (icons, badges, bezel frames).</a:t>
             </a:r>
-            <a:endParaRPr lang="en-US" sz="1200" dirty="0"/>
-          </a:p>
-          <a:p>
-            <a:pPr indent="0" marL="0">
-              <a:lnSpc>
-                <a:spcPts val="2200"/>
-              </a:lnSpc>
-              <a:buNone/>
-            </a:pPr>
-            <a:r>
-              <a:rPr lang="en-US" sz="1200" dirty="0">
+            <a:endParaRPr lang="en-US" sz="1050" dirty="0"/>
+          </a:p>
+          <a:p>
+            <a:pPr indent="0" marL="0">
+              <a:lnSpc>
+                <a:spcPts val="1600"/>
+              </a:lnSpc>
+              <a:buNone/>
+            </a:pPr>
+            <a:r>
+              <a:rPr lang="en-US" sz="1050" dirty="0">
                 <a:solidFill>
                   <a:srgbClr val="FFFFFF"/>
                 </a:solidFill>
@@ -2296,26 +2336,26 @@
               </a:rPr>
               <a:t>   • Verify key button active states match high contrast neon dark mode.</a:t>
             </a:r>
-            <a:endParaRPr lang="en-US" sz="1200" dirty="0"/>
-          </a:p>
-          <a:p>
-            <a:pPr indent="0" marL="0">
-              <a:lnSpc>
-                <a:spcPts val="2200"/>
-              </a:lnSpc>
-              <a:buNone/>
-            </a:pPr>
-            <a:endParaRPr lang="en-US" sz="1200" dirty="0"/>
-          </a:p>
-          <a:p>
-            <a:pPr indent="0" marL="0">
-              <a:lnSpc>
-                <a:spcPts val="2200"/>
-              </a:lnSpc>
-              <a:buNone/>
-            </a:pPr>
-            <a:r>
-              <a:rPr lang="en-US" sz="1200" dirty="0">
+            <a:endParaRPr lang="en-US" sz="1050" dirty="0"/>
+          </a:p>
+          <a:p>
+            <a:pPr indent="0" marL="0">
+              <a:lnSpc>
+                <a:spcPts val="1600"/>
+              </a:lnSpc>
+              <a:buNone/>
+            </a:pPr>
+            <a:endParaRPr lang="en-US" sz="1050" dirty="0"/>
+          </a:p>
+          <a:p>
+            <a:pPr indent="0" marL="0">
+              <a:lnSpc>
+                <a:spcPts val="1600"/>
+              </a:lnSpc>
+              <a:buNone/>
+            </a:pPr>
+            <a:r>
+              <a:rPr lang="en-US" sz="1050" dirty="0">
                 <a:solidFill>
                   <a:srgbClr val="FFFFFF"/>
                 </a:solidFill>
@@ -2325,17 +2365,17 @@
               </a:rPr>
               <a:t>2. Game Content Writer Deliverables:</a:t>
             </a:r>
-            <a:endParaRPr lang="en-US" sz="1200" dirty="0"/>
-          </a:p>
-          <a:p>
-            <a:pPr indent="0" marL="0">
-              <a:lnSpc>
-                <a:spcPts val="2200"/>
-              </a:lnSpc>
-              <a:buNone/>
-            </a:pPr>
-            <a:r>
-              <a:rPr lang="en-US" sz="1200" dirty="0">
+            <a:endParaRPr lang="en-US" sz="1050" dirty="0"/>
+          </a:p>
+          <a:p>
+            <a:pPr indent="0" marL="0">
+              <a:lnSpc>
+                <a:spcPts val="1600"/>
+              </a:lnSpc>
+              <a:buNone/>
+            </a:pPr>
+            <a:r>
+              <a:rPr lang="en-US" sz="1050" dirty="0">
                 <a:solidFill>
                   <a:srgbClr val="FFFFFF"/>
                 </a:solidFill>
@@ -2345,17 +2385,17 @@
               </a:rPr>
               <a:t>   • Save formatted question files in `sample_question/` directory.</a:t>
             </a:r>
-            <a:endParaRPr lang="en-US" sz="1200" dirty="0"/>
-          </a:p>
-          <a:p>
-            <a:pPr indent="0" marL="0">
-              <a:lnSpc>
-                <a:spcPts val="2200"/>
-              </a:lnSpc>
-              <a:buNone/>
-            </a:pPr>
-            <a:r>
-              <a:rPr lang="en-US" sz="1200" dirty="0">
+            <a:endParaRPr lang="en-US" sz="1050" dirty="0"/>
+          </a:p>
+          <a:p>
+            <a:pPr indent="0" marL="0">
+              <a:lnSpc>
+                <a:spcPts val="1600"/>
+              </a:lnSpc>
+              <a:buNone/>
+            </a:pPr>
+            <a:r>
+              <a:rPr lang="en-US" sz="1050" dirty="0">
                 <a:solidFill>
                   <a:srgbClr val="FFFFFF"/>
                 </a:solidFill>
@@ -2365,56 +2405,231 @@
               </a:rPr>
               <a:t>   • Test CSV import directly via Gamemaster Control Panel (`/gm.html`).</a:t>
             </a:r>
-            <a:endParaRPr lang="en-US" sz="1200" dirty="0"/>
-          </a:p>
-          <a:p>
-            <a:pPr indent="0" marL="0">
-              <a:lnSpc>
-                <a:spcPts val="2200"/>
-              </a:lnSpc>
-              <a:buNone/>
-            </a:pPr>
-            <a:endParaRPr lang="en-US" sz="1200" dirty="0"/>
-          </a:p>
-          <a:p>
-            <a:pPr indent="0" marL="0">
-              <a:lnSpc>
-                <a:spcPts val="2200"/>
-              </a:lnSpc>
-              <a:buNone/>
-            </a:pPr>
-            <a:r>
-              <a:rPr lang="en-US" sz="1200" dirty="0">
-                <a:solidFill>
-                  <a:srgbClr val="FFFFFF"/>
-                </a:solidFill>
-                <a:latin typeface="Helvetica" pitchFamily="34" charset="0"/>
-                <a:ea typeface="Helvetica" pitchFamily="34" charset="-122"/>
-                <a:cs typeface="Helvetica" pitchFamily="34" charset="-120"/>
-              </a:rPr>
-              <a:t>3. Live Event Test Protocol:</a:t>
-            </a:r>
-            <a:endParaRPr lang="en-US" sz="1200" dirty="0"/>
-          </a:p>
-          <a:p>
-            <a:pPr indent="0" marL="0">
-              <a:lnSpc>
-                <a:spcPts val="2200"/>
-              </a:lnSpc>
-              <a:buNone/>
-            </a:pPr>
-            <a:r>
-              <a:rPr lang="en-US" sz="1200" dirty="0">
-                <a:solidFill>
-                  <a:srgbClr val="FFFFFF"/>
-                </a:solidFill>
-                <a:latin typeface="Helvetica" pitchFamily="34" charset="0"/>
-                <a:ea typeface="Helvetica" pitchFamily="34" charset="-122"/>
-                <a:cs typeface="Helvetica" pitchFamily="34" charset="-120"/>
-              </a:rPr>
-              <a:t>   • Use Multiview (`/multiview.html`) to verify all 4 screens update simultaneously in real time.</a:t>
-            </a:r>
-            <a:endParaRPr lang="en-US" sz="1200" dirty="0"/>
+            <a:endParaRPr lang="en-US" sz="1050" dirty="0"/>
+          </a:p>
+        </p:txBody>
+      </p:sp>
+      <p:sp>
+        <p:nvSpPr>
+          <p:cNvPr id="11" name="Shape 9"/>
+          <p:cNvSpPr/>
+          <p:nvPr/>
+        </p:nvSpPr>
+        <p:spPr>
+          <a:xfrm>
+            <a:off x="6217920" y="1188720"/>
+            <a:ext cx="5394960" cy="4846320"/>
+          </a:xfrm>
+          <a:prstGeom prst="rect">
+            <a:avLst/>
+          </a:prstGeom>
+          <a:solidFill>
+            <a:srgbClr val="181818"/>
+          </a:solidFill>
+          <a:ln w="12700">
+            <a:solidFill>
+              <a:srgbClr val="2A2A2A"/>
+            </a:solidFill>
+            <a:prstDash val="solid"/>
+          </a:ln>
+        </p:spPr>
+      </p:sp>
+      <p:sp>
+        <p:nvSpPr>
+          <p:cNvPr id="12" name="Text 10"/>
+          <p:cNvSpPr/>
+          <p:nvPr/>
+        </p:nvSpPr>
+        <p:spPr>
+          <a:xfrm>
+            <a:off x="6492240" y="1371600"/>
+            <a:ext cx="4846320" cy="365760"/>
+          </a:xfrm>
+          <a:prstGeom prst="rect">
+            <a:avLst/>
+          </a:prstGeom>
+          <a:noFill/>
+          <a:ln/>
+        </p:spPr>
+        <p:txBody>
+          <a:bodyPr wrap="square" rtlCol="0" anchor="ctr"/>
+          <a:lstStyle/>
+          <a:p>
+            <a:pPr indent="0" marL="0">
+              <a:buNone/>
+            </a:pPr>
+            <a:r>
+              <a:rPr lang="en-US" sz="1500" b="1" dirty="0">
+                <a:solidFill>
+                  <a:srgbClr val="00E5FF"/>
+                </a:solidFill>
+                <a:latin typeface="Arial" pitchFamily="34" charset="0"/>
+                <a:ea typeface="Arial" pitchFamily="34" charset="-122"/>
+                <a:cs typeface="Arial" pitchFamily="34" charset="-120"/>
+              </a:rPr>
+              <a:t>🧪 Live Event Test Protocol</a:t>
+            </a:r>
+            <a:endParaRPr lang="en-US" sz="1500" dirty="0"/>
+          </a:p>
+        </p:txBody>
+      </p:sp>
+      <p:sp>
+        <p:nvSpPr>
+          <p:cNvPr id="13" name="Text 11"/>
+          <p:cNvSpPr/>
+          <p:nvPr/>
+        </p:nvSpPr>
+        <p:spPr>
+          <a:xfrm>
+            <a:off x="6492240" y="1828800"/>
+            <a:ext cx="4846320" cy="4023360"/>
+          </a:xfrm>
+          <a:prstGeom prst="rect">
+            <a:avLst/>
+          </a:prstGeom>
+          <a:noFill/>
+          <a:ln/>
+        </p:spPr>
+        <p:txBody>
+          <a:bodyPr wrap="square" rtlCol="0" anchor="ctr"/>
+          <a:lstStyle/>
+          <a:p>
+            <a:pPr indent="0" marL="0">
+              <a:lnSpc>
+                <a:spcPts val="1600"/>
+              </a:lnSpc>
+              <a:buNone/>
+            </a:pPr>
+            <a:r>
+              <a:rPr lang="en-US" sz="1050" dirty="0">
+                <a:solidFill>
+                  <a:srgbClr val="FFFFFF"/>
+                </a:solidFill>
+                <a:latin typeface="Helvetica" pitchFamily="34" charset="0"/>
+                <a:ea typeface="Helvetica" pitchFamily="34" charset="-122"/>
+                <a:cs typeface="Helvetica" pitchFamily="34" charset="-120"/>
+              </a:rPr>
+              <a:t>1. Multiview Test:</a:t>
+            </a:r>
+            <a:endParaRPr lang="en-US" sz="1050" dirty="0"/>
+          </a:p>
+          <a:p>
+            <a:pPr indent="0" marL="0">
+              <a:lnSpc>
+                <a:spcPts val="1600"/>
+              </a:lnSpc>
+              <a:buNone/>
+            </a:pPr>
+            <a:r>
+              <a:rPr lang="en-US" sz="1050" dirty="0">
+                <a:solidFill>
+                  <a:srgbClr val="FFFFFF"/>
+                </a:solidFill>
+                <a:latin typeface="Helvetica" pitchFamily="34" charset="0"/>
+                <a:ea typeface="Helvetica" pitchFamily="34" charset="-122"/>
+                <a:cs typeface="Helvetica" pitchFamily="34" charset="-120"/>
+              </a:rPr>
+              <a:t>   Use `/multiview.html` to verify all 4 screens update simultaneously in real time.</a:t>
+            </a:r>
+            <a:endParaRPr lang="en-US" sz="1050" dirty="0"/>
+          </a:p>
+          <a:p>
+            <a:pPr indent="0" marL="0">
+              <a:lnSpc>
+                <a:spcPts val="1600"/>
+              </a:lnSpc>
+              <a:buNone/>
+            </a:pPr>
+            <a:endParaRPr lang="en-US" sz="1050" dirty="0"/>
+          </a:p>
+          <a:p>
+            <a:pPr indent="0" marL="0">
+              <a:lnSpc>
+                <a:spcPts val="1600"/>
+              </a:lnSpc>
+              <a:buNone/>
+            </a:pPr>
+            <a:r>
+              <a:rPr lang="en-US" sz="1050" dirty="0">
+                <a:solidFill>
+                  <a:srgbClr val="FFFFFF"/>
+                </a:solidFill>
+                <a:latin typeface="Helvetica" pitchFamily="34" charset="0"/>
+                <a:ea typeface="Helvetica" pitchFamily="34" charset="-122"/>
+                <a:cs typeface="Helvetica" pitchFamily="34" charset="-120"/>
+              </a:rPr>
+              <a:t>2. Audio Sync Check:</a:t>
+            </a:r>
+            <a:endParaRPr lang="en-US" sz="1050" dirty="0"/>
+          </a:p>
+          <a:p>
+            <a:pPr indent="0" marL="0">
+              <a:lnSpc>
+                <a:spcPts val="1600"/>
+              </a:lnSpc>
+              <a:buNone/>
+            </a:pPr>
+            <a:r>
+              <a:rPr lang="en-US" sz="1050" dirty="0">
+                <a:solidFill>
+                  <a:srgbClr val="FFFFFF"/>
+                </a:solidFill>
+                <a:latin typeface="Helvetica" pitchFamily="34" charset="0"/>
+                <a:ea typeface="Helvetica" pitchFamily="34" charset="-122"/>
+                <a:cs typeface="Helvetica" pitchFamily="34" charset="-120"/>
+              </a:rPr>
+              <a:t>   Confirm correct &amp; wrong haptic audio plays on tablet submit.</a:t>
+            </a:r>
+            <a:endParaRPr lang="en-US" sz="1050" dirty="0"/>
+          </a:p>
+          <a:p>
+            <a:pPr indent="0" marL="0">
+              <a:lnSpc>
+                <a:spcPts val="1600"/>
+              </a:lnSpc>
+              <a:buNone/>
+            </a:pPr>
+            <a:endParaRPr lang="en-US" sz="1050" dirty="0"/>
+          </a:p>
+          <a:p>
+            <a:pPr indent="0" marL="0">
+              <a:lnSpc>
+                <a:spcPts val="1600"/>
+              </a:lnSpc>
+              <a:buNone/>
+            </a:pPr>
+            <a:r>
+              <a:rPr lang="en-US" sz="1050" dirty="0">
+                <a:solidFill>
+                  <a:srgbClr val="FFFFFF"/>
+                </a:solidFill>
+                <a:latin typeface="Helvetica" pitchFamily="34" charset="0"/>
+                <a:ea typeface="Helvetica" pitchFamily="34" charset="-122"/>
+                <a:cs typeface="Helvetica" pitchFamily="34" charset="-120"/>
+              </a:rPr>
+              <a:t>3. Render Production Verification:</a:t>
+            </a:r>
+            <a:endParaRPr lang="en-US" sz="1050" dirty="0"/>
+          </a:p>
+          <a:p>
+            <a:pPr indent="0" marL="0">
+              <a:lnSpc>
+                <a:spcPts val="1600"/>
+              </a:lnSpc>
+              <a:buNone/>
+            </a:pPr>
+            <a:r>
+              <a:rPr lang="en-US" sz="1050" dirty="0">
+                <a:solidFill>
+                  <a:srgbClr val="FFFFFF"/>
+                </a:solidFill>
+                <a:latin typeface="Helvetica" pitchFamily="34" charset="0"/>
+                <a:ea typeface="Helvetica" pitchFamily="34" charset="-122"/>
+                <a:cs typeface="Helvetica" pitchFamily="34" charset="-120"/>
+              </a:rPr>
+              <a:t>   Verify URL `https://unxpadted.onrender.com` updates live upon CSV upload.</a:t>
+            </a:r>
+            <a:endParaRPr lang="en-US" sz="1050" dirty="0"/>
           </a:p>
         </p:txBody>
       </p:sp>
@@ -2452,7 +2667,7 @@
         <p:spPr>
           <a:xfrm>
             <a:off x="0" y="0"/>
-            <a:ext cx="9144000" cy="5143500"/>
+            <a:ext cx="12188952" cy="6858000"/>
           </a:xfrm>
           <a:prstGeom prst="rect">
             <a:avLst/>
@@ -2472,7 +2687,7 @@
         <p:spPr>
           <a:xfrm>
             <a:off x="0" y="0"/>
-            <a:ext cx="9144000" cy="73152"/>
+            <a:ext cx="12188952" cy="73152"/>
           </a:xfrm>
           <a:prstGeom prst="rect">
             <a:avLst/>
@@ -2491,8 +2706,8 @@
         </p:nvSpPr>
         <p:spPr>
           <a:xfrm>
-            <a:off x="731520" y="365760"/>
-            <a:ext cx="7315200" cy="274320"/>
+            <a:off x="548640" y="320040"/>
+            <a:ext cx="7315200" cy="228600"/>
           </a:xfrm>
           <a:prstGeom prst="rect">
             <a:avLst/>
@@ -2508,7 +2723,7 @@
               <a:buNone/>
             </a:pPr>
             <a:r>
-              <a:rPr lang="en-US" sz="1000" b="1" dirty="0">
+              <a:rPr lang="en-US" sz="900" b="1" dirty="0">
                 <a:solidFill>
                   <a:srgbClr val="39FF14"/>
                 </a:solidFill>
@@ -2518,7 +2733,7 @@
               </a:rPr>
               <a:t>PRODUCT STRATEGY</a:t>
             </a:r>
-            <a:endParaRPr lang="en-US" sz="1000" dirty="0"/>
+            <a:endParaRPr lang="en-US" sz="900" dirty="0"/>
           </a:p>
         </p:txBody>
       </p:sp>
@@ -2530,8 +2745,8 @@
         </p:nvSpPr>
         <p:spPr>
           <a:xfrm>
-            <a:off x="731520" y="640080"/>
-            <a:ext cx="10058400" cy="548640"/>
+            <a:off x="548640" y="548640"/>
+            <a:ext cx="11064240" cy="457200"/>
           </a:xfrm>
           <a:prstGeom prst="rect">
             <a:avLst/>
@@ -2547,7 +2762,7 @@
               <a:buNone/>
             </a:pPr>
             <a:r>
-              <a:rPr lang="en-US" sz="2400" b="1" dirty="0">
+              <a:rPr lang="en-US" sz="2200" b="1" dirty="0">
                 <a:solidFill>
                   <a:srgbClr val="FFFFFF"/>
                 </a:solidFill>
@@ -2557,20 +2772,40 @@
               </a:rPr>
               <a:t>Executive Overview &amp; Product Vision</a:t>
             </a:r>
-            <a:endParaRPr lang="en-US" sz="2400" dirty="0"/>
-          </a:p>
-        </p:txBody>
-      </p:sp>
-      <p:sp>
-        <p:nvSpPr>
-          <p:cNvPr id="6" name="Text 4"/>
-          <p:cNvSpPr/>
-          <p:nvPr/>
-        </p:nvSpPr>
-        <p:spPr>
-          <a:xfrm>
-            <a:off x="731520" y="6492240"/>
-            <a:ext cx="9144000" cy="274320"/>
+            <a:endParaRPr lang="en-US" sz="2200" dirty="0"/>
+          </a:p>
+        </p:txBody>
+      </p:sp>
+      <p:sp>
+        <p:nvSpPr>
+          <p:cNvPr id="6" name="Shape 4"/>
+          <p:cNvSpPr/>
+          <p:nvPr/>
+        </p:nvSpPr>
+        <p:spPr>
+          <a:xfrm>
+            <a:off x="548640" y="6217920"/>
+            <a:ext cx="11091672" cy="18288"/>
+          </a:xfrm>
+          <a:prstGeom prst="rect">
+            <a:avLst/>
+          </a:prstGeom>
+          <a:solidFill>
+            <a:srgbClr val="2A2A2A"/>
+          </a:solidFill>
+          <a:ln/>
+        </p:spPr>
+      </p:sp>
+      <p:sp>
+        <p:nvSpPr>
+          <p:cNvPr id="7" name="Text 5"/>
+          <p:cNvSpPr/>
+          <p:nvPr/>
+        </p:nvSpPr>
+        <p:spPr>
+          <a:xfrm>
+            <a:off x="548640" y="6309360"/>
+            <a:ext cx="11091672" cy="274320"/>
           </a:xfrm>
           <a:prstGeom prst="rect">
             <a:avLst/>
@@ -2594,7 +2829,7 @@
                 <a:ea typeface="Helvetica" pitchFamily="34" charset="-122"/>
                 <a:cs typeface="Helvetica" pitchFamily="34" charset="-120"/>
               </a:rPr>
-              <a:t>Infinix XPAD 30 Pro x Ruangguru  |  Clash of Unxpadted</a:t>
+              <a:t>Infinix XPAD 30 Pro × Ruangguru  |  Clash of Unxpadted Design System PRD</a:t>
             </a:r>
             <a:endParaRPr lang="en-US" sz="900" dirty="0"/>
           </a:p>
@@ -2602,24 +2837,24 @@
       </p:sp>
       <p:sp>
         <p:nvSpPr>
-          <p:cNvPr id="7" name="Shape 5"/>
-          <p:cNvSpPr/>
-          <p:nvPr/>
-        </p:nvSpPr>
-        <p:spPr>
-          <a:xfrm>
-            <a:off x="731520" y="1371600"/>
-            <a:ext cx="5120640" cy="4754880"/>
+          <p:cNvPr id="8" name="Shape 6"/>
+          <p:cNvSpPr/>
+          <p:nvPr/>
+        </p:nvSpPr>
+        <p:spPr>
+          <a:xfrm>
+            <a:off x="548640" y="1188720"/>
+            <a:ext cx="5394960" cy="4846320"/>
           </a:xfrm>
           <a:prstGeom prst="rect">
             <a:avLst/>
           </a:prstGeom>
           <a:solidFill>
-            <a:srgbClr val="1A1A1A"/>
+            <a:srgbClr val="181818"/>
           </a:solidFill>
           <a:ln w="12700">
             <a:solidFill>
-              <a:srgbClr val="282828"/>
+              <a:srgbClr val="2A2A2A"/>
             </a:solidFill>
             <a:prstDash val="solid"/>
           </a:ln>
@@ -2627,14 +2862,14 @@
       </p:sp>
       <p:sp>
         <p:nvSpPr>
-          <p:cNvPr id="8" name="Text 6"/>
-          <p:cNvSpPr/>
-          <p:nvPr/>
-        </p:nvSpPr>
-        <p:spPr>
-          <a:xfrm>
-            <a:off x="1005840" y="1645920"/>
-            <a:ext cx="4572000" cy="365760"/>
+          <p:cNvPr id="9" name="Text 7"/>
+          <p:cNvSpPr/>
+          <p:nvPr/>
+        </p:nvSpPr>
+        <p:spPr>
+          <a:xfrm>
+            <a:off x="822960" y="1371600"/>
+            <a:ext cx="4846320" cy="365760"/>
           </a:xfrm>
           <a:prstGeom prst="rect">
             <a:avLst/>
@@ -2650,7 +2885,7 @@
               <a:buNone/>
             </a:pPr>
             <a:r>
-              <a:rPr lang="en-US" sz="1600" b="1" dirty="0">
+              <a:rPr lang="en-US" sz="1500" b="1" dirty="0">
                 <a:solidFill>
                   <a:srgbClr val="39FF14"/>
                 </a:solidFill>
@@ -2660,20 +2895,20 @@
               </a:rPr>
               <a:t>🎮 Core Product Concept</a:t>
             </a:r>
-            <a:endParaRPr lang="en-US" sz="1600" dirty="0"/>
-          </a:p>
-        </p:txBody>
-      </p:sp>
-      <p:sp>
-        <p:nvSpPr>
-          <p:cNvPr id="9" name="Text 7"/>
-          <p:cNvSpPr/>
-          <p:nvPr/>
-        </p:nvSpPr>
-        <p:spPr>
-          <a:xfrm>
-            <a:off x="1005840" y="2194560"/>
-            <a:ext cx="4572000" cy="3657600"/>
+            <a:endParaRPr lang="en-US" sz="1500" dirty="0"/>
+          </a:p>
+        </p:txBody>
+      </p:sp>
+      <p:sp>
+        <p:nvSpPr>
+          <p:cNvPr id="10" name="Text 8"/>
+          <p:cNvSpPr/>
+          <p:nvPr/>
+        </p:nvSpPr>
+        <p:spPr>
+          <a:xfrm>
+            <a:off x="822960" y="1828800"/>
+            <a:ext cx="4846320" cy="4023360"/>
           </a:xfrm>
           <a:prstGeom prst="rect">
             <a:avLst/>
@@ -2687,105 +2922,212 @@
           <a:p>
             <a:pPr indent="0" marL="0">
               <a:lnSpc>
-                <a:spcPts val="2000"/>
-              </a:lnSpc>
-              <a:buNone/>
-            </a:pPr>
-            <a:r>
-              <a:rPr lang="en-US" sz="1200" dirty="0">
-                <a:solidFill>
-                  <a:srgbClr val="FFFFFF"/>
-                </a:solidFill>
-                <a:latin typeface="Helvetica" pitchFamily="34" charset="0"/>
-                <a:ea typeface="Helvetica" pitchFamily="34" charset="-122"/>
-                <a:cs typeface="Helvetica" pitchFamily="34" charset="-120"/>
-              </a:rPr>
-              <a:t>• Hybrid Tournament Platform: Combines Esports speed with Academic challenge (Ruangguru).</a:t>
-            </a:r>
-            <a:endParaRPr lang="en-US" sz="1200" dirty="0"/>
-          </a:p>
-          <a:p>
-            <a:pPr indent="0" marL="0">
-              <a:lnSpc>
-                <a:spcPts val="2000"/>
-              </a:lnSpc>
-              <a:buNone/>
-            </a:pPr>
-            <a:r>
-              <a:rPr lang="en-US" sz="1200" dirty="0">
-                <a:solidFill>
-                  <a:srgbClr val="FFFFFF"/>
-                </a:solidFill>
-                <a:latin typeface="Helvetica" pitchFamily="34" charset="0"/>
-                <a:ea typeface="Helvetica" pitchFamily="34" charset="-122"/>
-                <a:cs typeface="Helvetica" pitchFamily="34" charset="-120"/>
-              </a:rPr>
-              <a:t>• Multi-screen Real-time Sync: Node.js + Socket.IO server orchestrating Stage Display, Gamemaster Panel, and Player Tablets.</a:t>
-            </a:r>
-            <a:endParaRPr lang="en-US" sz="1200" dirty="0"/>
-          </a:p>
-          <a:p>
-            <a:pPr indent="0" marL="0">
-              <a:lnSpc>
-                <a:spcPts val="2000"/>
-              </a:lnSpc>
-              <a:buNone/>
-            </a:pPr>
-            <a:r>
-              <a:rPr lang="en-US" sz="1200" dirty="0">
-                <a:solidFill>
-                  <a:srgbClr val="FFFFFF"/>
-                </a:solidFill>
-                <a:latin typeface="Helvetica" pitchFamily="34" charset="0"/>
-                <a:ea typeface="Helvetica" pitchFamily="34" charset="-122"/>
-                <a:cs typeface="Helvetica" pitchFamily="34" charset="-120"/>
-              </a:rPr>
-              <a:t>• Zero-Latency Responsiveness: Built for instant touch response on XPAD 30 Pro tablets.</a:t>
-            </a:r>
-            <a:endParaRPr lang="en-US" sz="1200" dirty="0"/>
-          </a:p>
-          <a:p>
-            <a:pPr indent="0" marL="0">
-              <a:lnSpc>
-                <a:spcPts val="2000"/>
-              </a:lnSpc>
-              <a:buNone/>
-            </a:pPr>
-            <a:r>
-              <a:rPr lang="en-US" sz="1200" dirty="0">
-                <a:solidFill>
-                  <a:srgbClr val="FFFFFF"/>
-                </a:solidFill>
-                <a:latin typeface="Helvetica" pitchFamily="34" charset="0"/>
-                <a:ea typeface="Helvetica" pitchFamily="34" charset="-122"/>
-                <a:cs typeface="Helvetica" pitchFamily="34" charset="-120"/>
-              </a:rPr>
-              <a:t>• Dark-Mode Cyber Aesthetic: Styled for high contrast outdoor esports arenas.</a:t>
-            </a:r>
-            <a:endParaRPr lang="en-US" sz="1200" dirty="0"/>
-          </a:p>
-        </p:txBody>
-      </p:sp>
-      <p:sp>
-        <p:nvSpPr>
-          <p:cNvPr id="10" name="Shape 8"/>
-          <p:cNvSpPr/>
-          <p:nvPr/>
-        </p:nvSpPr>
-        <p:spPr>
-          <a:xfrm>
-            <a:off x="6126480" y="1371600"/>
-            <a:ext cx="5120640" cy="4754880"/>
+                <a:spcPts val="1600"/>
+              </a:lnSpc>
+              <a:buNone/>
+            </a:pPr>
+            <a:r>
+              <a:rPr lang="en-US" sz="1050" dirty="0">
+                <a:solidFill>
+                  <a:srgbClr val="FFFFFF"/>
+                </a:solidFill>
+                <a:latin typeface="Helvetica" pitchFamily="34" charset="0"/>
+                <a:ea typeface="Helvetica" pitchFamily="34" charset="-122"/>
+                <a:cs typeface="Helvetica" pitchFamily="34" charset="-120"/>
+              </a:rPr>
+              <a:t>• Hybrid Tournament Platform:</a:t>
+            </a:r>
+            <a:endParaRPr lang="en-US" sz="1050" dirty="0"/>
+          </a:p>
+          <a:p>
+            <a:pPr indent="0" marL="0">
+              <a:lnSpc>
+                <a:spcPts val="1600"/>
+              </a:lnSpc>
+              <a:buNone/>
+            </a:pPr>
+            <a:r>
+              <a:rPr lang="en-US" sz="1050" dirty="0">
+                <a:solidFill>
+                  <a:srgbClr val="FFFFFF"/>
+                </a:solidFill>
+                <a:latin typeface="Helvetica" pitchFamily="34" charset="0"/>
+                <a:ea typeface="Helvetica" pitchFamily="34" charset="-122"/>
+                <a:cs typeface="Helvetica" pitchFamily="34" charset="-120"/>
+              </a:rPr>
+              <a:t>  Combines Esports speed with Academic challenge (Ruangguru).</a:t>
+            </a:r>
+            <a:endParaRPr lang="en-US" sz="1050" dirty="0"/>
+          </a:p>
+          <a:p>
+            <a:pPr indent="0" marL="0">
+              <a:lnSpc>
+                <a:spcPts val="1600"/>
+              </a:lnSpc>
+              <a:buNone/>
+            </a:pPr>
+            <a:endParaRPr lang="en-US" sz="1050" dirty="0"/>
+          </a:p>
+          <a:p>
+            <a:pPr indent="0" marL="0">
+              <a:lnSpc>
+                <a:spcPts val="1600"/>
+              </a:lnSpc>
+              <a:buNone/>
+            </a:pPr>
+            <a:r>
+              <a:rPr lang="en-US" sz="1050" dirty="0">
+                <a:solidFill>
+                  <a:srgbClr val="FFFFFF"/>
+                </a:solidFill>
+                <a:latin typeface="Helvetica" pitchFamily="34" charset="0"/>
+                <a:ea typeface="Helvetica" pitchFamily="34" charset="-122"/>
+                <a:cs typeface="Helvetica" pitchFamily="34" charset="-120"/>
+              </a:rPr>
+              <a:t>• Multi-screen Real-time Sync:</a:t>
+            </a:r>
+            <a:endParaRPr lang="en-US" sz="1050" dirty="0"/>
+          </a:p>
+          <a:p>
+            <a:pPr indent="0" marL="0">
+              <a:lnSpc>
+                <a:spcPts val="1600"/>
+              </a:lnSpc>
+              <a:buNone/>
+            </a:pPr>
+            <a:r>
+              <a:rPr lang="en-US" sz="1050" dirty="0">
+                <a:solidFill>
+                  <a:srgbClr val="FFFFFF"/>
+                </a:solidFill>
+                <a:latin typeface="Helvetica" pitchFamily="34" charset="0"/>
+                <a:ea typeface="Helvetica" pitchFamily="34" charset="-122"/>
+                <a:cs typeface="Helvetica" pitchFamily="34" charset="-120"/>
+              </a:rPr>
+              <a:t>  Node.js + Socket.IO server orchestrating Stage Display, Gamemaster Panel, and Player Tablets.</a:t>
+            </a:r>
+            <a:endParaRPr lang="en-US" sz="1050" dirty="0"/>
+          </a:p>
+          <a:p>
+            <a:pPr indent="0" marL="0">
+              <a:lnSpc>
+                <a:spcPts val="1600"/>
+              </a:lnSpc>
+              <a:buNone/>
+            </a:pPr>
+            <a:endParaRPr lang="en-US" sz="1050" dirty="0"/>
+          </a:p>
+          <a:p>
+            <a:pPr indent="0" marL="0">
+              <a:lnSpc>
+                <a:spcPts val="1600"/>
+              </a:lnSpc>
+              <a:buNone/>
+            </a:pPr>
+            <a:r>
+              <a:rPr lang="en-US" sz="1050" dirty="0">
+                <a:solidFill>
+                  <a:srgbClr val="FFFFFF"/>
+                </a:solidFill>
+                <a:latin typeface="Helvetica" pitchFamily="34" charset="0"/>
+                <a:ea typeface="Helvetica" pitchFamily="34" charset="-122"/>
+                <a:cs typeface="Helvetica" pitchFamily="34" charset="-120"/>
+              </a:rPr>
+              <a:t>• Zero-Latency Touch UI:</a:t>
+            </a:r>
+            <a:endParaRPr lang="en-US" sz="1050" dirty="0"/>
+          </a:p>
+          <a:p>
+            <a:pPr indent="0" marL="0">
+              <a:lnSpc>
+                <a:spcPts val="1600"/>
+              </a:lnSpc>
+              <a:buNone/>
+            </a:pPr>
+            <a:r>
+              <a:rPr lang="en-US" sz="1050" dirty="0">
+                <a:solidFill>
+                  <a:srgbClr val="FFFFFF"/>
+                </a:solidFill>
+                <a:latin typeface="Helvetica" pitchFamily="34" charset="0"/>
+                <a:ea typeface="Helvetica" pitchFamily="34" charset="-122"/>
+                <a:cs typeface="Helvetica" pitchFamily="34" charset="-120"/>
+              </a:rPr>
+              <a:t>  Built for instant touch response on XPAD 30 Pro tablets.</a:t>
+            </a:r>
+            <a:endParaRPr lang="en-US" sz="1050" dirty="0"/>
+          </a:p>
+          <a:p>
+            <a:pPr indent="0" marL="0">
+              <a:lnSpc>
+                <a:spcPts val="1600"/>
+              </a:lnSpc>
+              <a:buNone/>
+            </a:pPr>
+            <a:endParaRPr lang="en-US" sz="1050" dirty="0"/>
+          </a:p>
+          <a:p>
+            <a:pPr indent="0" marL="0">
+              <a:lnSpc>
+                <a:spcPts val="1600"/>
+              </a:lnSpc>
+              <a:buNone/>
+            </a:pPr>
+            <a:r>
+              <a:rPr lang="en-US" sz="1050" dirty="0">
+                <a:solidFill>
+                  <a:srgbClr val="FFFFFF"/>
+                </a:solidFill>
+                <a:latin typeface="Helvetica" pitchFamily="34" charset="0"/>
+                <a:ea typeface="Helvetica" pitchFamily="34" charset="-122"/>
+                <a:cs typeface="Helvetica" pitchFamily="34" charset="-120"/>
+              </a:rPr>
+              <a:t>• High-Contrast Cyber Aesthetic:</a:t>
+            </a:r>
+            <a:endParaRPr lang="en-US" sz="1050" dirty="0"/>
+          </a:p>
+          <a:p>
+            <a:pPr indent="0" marL="0">
+              <a:lnSpc>
+                <a:spcPts val="1600"/>
+              </a:lnSpc>
+              <a:buNone/>
+            </a:pPr>
+            <a:r>
+              <a:rPr lang="en-US" sz="1050" dirty="0">
+                <a:solidFill>
+                  <a:srgbClr val="FFFFFF"/>
+                </a:solidFill>
+                <a:latin typeface="Helvetica" pitchFamily="34" charset="0"/>
+                <a:ea typeface="Helvetica" pitchFamily="34" charset="-122"/>
+                <a:cs typeface="Helvetica" pitchFamily="34" charset="-120"/>
+              </a:rPr>
+              <a:t>  Designed specifically for outdoor arena sunlight visibility.</a:t>
+            </a:r>
+            <a:endParaRPr lang="en-US" sz="1050" dirty="0"/>
+          </a:p>
+        </p:txBody>
+      </p:sp>
+      <p:sp>
+        <p:nvSpPr>
+          <p:cNvPr id="11" name="Shape 9"/>
+          <p:cNvSpPr/>
+          <p:nvPr/>
+        </p:nvSpPr>
+        <p:spPr>
+          <a:xfrm>
+            <a:off x="6217920" y="1188720"/>
+            <a:ext cx="5394960" cy="4846320"/>
           </a:xfrm>
           <a:prstGeom prst="rect">
             <a:avLst/>
           </a:prstGeom>
           <a:solidFill>
-            <a:srgbClr val="1A1A1A"/>
+            <a:srgbClr val="181818"/>
           </a:solidFill>
           <a:ln w="12700">
             <a:solidFill>
-              <a:srgbClr val="282828"/>
+              <a:srgbClr val="2A2A2A"/>
             </a:solidFill>
             <a:prstDash val="solid"/>
           </a:ln>
@@ -2793,14 +3135,14 @@
       </p:sp>
       <p:sp>
         <p:nvSpPr>
-          <p:cNvPr id="11" name="Text 9"/>
-          <p:cNvSpPr/>
-          <p:nvPr/>
-        </p:nvSpPr>
-        <p:spPr>
-          <a:xfrm>
-            <a:off x="6400800" y="1645920"/>
-            <a:ext cx="4572000" cy="365760"/>
+          <p:cNvPr id="12" name="Text 10"/>
+          <p:cNvSpPr/>
+          <p:nvPr/>
+        </p:nvSpPr>
+        <p:spPr>
+          <a:xfrm>
+            <a:off x="6492240" y="1371600"/>
+            <a:ext cx="4846320" cy="365760"/>
           </a:xfrm>
           <a:prstGeom prst="rect">
             <a:avLst/>
@@ -2816,7 +3158,7 @@
               <a:buNone/>
             </a:pPr>
             <a:r>
-              <a:rPr lang="en-US" sz="1600" b="1" dirty="0">
+              <a:rPr lang="en-US" sz="1500" b="1" dirty="0">
                 <a:solidFill>
                   <a:srgbClr val="00E5FF"/>
                 </a:solidFill>
@@ -2826,20 +3168,20 @@
               </a:rPr>
               <a:t>🎯 Dual Stakeholder Guidelines</a:t>
             </a:r>
-            <a:endParaRPr lang="en-US" sz="1600" dirty="0"/>
-          </a:p>
-        </p:txBody>
-      </p:sp>
-      <p:sp>
-        <p:nvSpPr>
-          <p:cNvPr id="12" name="Text 10"/>
-          <p:cNvSpPr/>
-          <p:nvPr/>
-        </p:nvSpPr>
-        <p:spPr>
-          <a:xfrm>
-            <a:off x="6400800" y="2194560"/>
-            <a:ext cx="4572000" cy="3657600"/>
+            <a:endParaRPr lang="en-US" sz="1500" dirty="0"/>
+          </a:p>
+        </p:txBody>
+      </p:sp>
+      <p:sp>
+        <p:nvSpPr>
+          <p:cNvPr id="13" name="Text 11"/>
+          <p:cNvSpPr/>
+          <p:nvPr/>
+        </p:nvSpPr>
+        <p:spPr>
+          <a:xfrm>
+            <a:off x="6492240" y="1828800"/>
+            <a:ext cx="4846320" cy="4023360"/>
           </a:xfrm>
           <a:prstGeom prst="rect">
             <a:avLst/>
@@ -2853,12 +3195,12 @@
           <a:p>
             <a:pPr indent="0" marL="0">
               <a:lnSpc>
-                <a:spcPts val="2000"/>
-              </a:lnSpc>
-              <a:buNone/>
-            </a:pPr>
-            <a:r>
-              <a:rPr lang="en-US" sz="1200" dirty="0">
+                <a:spcPts val="1600"/>
+              </a:lnSpc>
+              <a:buNone/>
+            </a:pPr>
+            <a:r>
+              <a:rPr lang="en-US" sz="1050" dirty="0">
                 <a:solidFill>
                   <a:srgbClr val="FFFFFF"/>
                 </a:solidFill>
@@ -2868,17 +3210,17 @@
               </a:rPr>
               <a:t>🎨 FOR GRAPHIC DESIGNERS:</a:t>
             </a:r>
-            <a:endParaRPr lang="en-US" sz="1200" dirty="0"/>
-          </a:p>
-          <a:p>
-            <a:pPr indent="0" marL="0">
-              <a:lnSpc>
-                <a:spcPts val="2000"/>
-              </a:lnSpc>
-              <a:buNone/>
-            </a:pPr>
-            <a:r>
-              <a:rPr lang="en-US" sz="1200" dirty="0">
+            <a:endParaRPr lang="en-US" sz="1050" dirty="0"/>
+          </a:p>
+          <a:p>
+            <a:pPr indent="0" marL="0">
+              <a:lnSpc>
+                <a:spcPts val="1600"/>
+              </a:lnSpc>
+              <a:buNone/>
+            </a:pPr>
+            <a:r>
+              <a:rPr lang="en-US" sz="1050" dirty="0">
                 <a:solidFill>
                   <a:srgbClr val="FFFFFF"/>
                 </a:solidFill>
@@ -2888,17 +3230,17 @@
               </a:rPr>
               <a:t>- Standardized SVG &amp; PNG asset specs.</a:t>
             </a:r>
-            <a:endParaRPr lang="en-US" sz="1200" dirty="0"/>
-          </a:p>
-          <a:p>
-            <a:pPr indent="0" marL="0">
-              <a:lnSpc>
-                <a:spcPts val="2000"/>
-              </a:lnSpc>
-              <a:buNone/>
-            </a:pPr>
-            <a:r>
-              <a:rPr lang="en-US" sz="1200" dirty="0">
+            <a:endParaRPr lang="en-US" sz="1050" dirty="0"/>
+          </a:p>
+          <a:p>
+            <a:pPr indent="0" marL="0">
+              <a:lnSpc>
+                <a:spcPts val="1600"/>
+              </a:lnSpc>
+              <a:buNone/>
+            </a:pPr>
+            <a:r>
+              <a:rPr lang="en-US" sz="1050" dirty="0">
                 <a:solidFill>
                   <a:srgbClr val="FFFFFF"/>
                 </a:solidFill>
@@ -2908,17 +3250,17 @@
               </a:rPr>
               <a:t>- Strict color tokens &amp; 2K display DPI scaling.</a:t>
             </a:r>
-            <a:endParaRPr lang="en-US" sz="1200" dirty="0"/>
-          </a:p>
-          <a:p>
-            <a:pPr indent="0" marL="0">
-              <a:lnSpc>
-                <a:spcPts val="2000"/>
-              </a:lnSpc>
-              <a:buNone/>
-            </a:pPr>
-            <a:r>
-              <a:rPr lang="en-US" sz="1200" dirty="0">
+            <a:endParaRPr lang="en-US" sz="1050" dirty="0"/>
+          </a:p>
+          <a:p>
+            <a:pPr indent="0" marL="0">
+              <a:lnSpc>
+                <a:spcPts val="1600"/>
+              </a:lnSpc>
+              <a:buNone/>
+            </a:pPr>
+            <a:r>
+              <a:rPr lang="en-US" sz="1050" dirty="0">
                 <a:solidFill>
                   <a:srgbClr val="FFFFFF"/>
                 </a:solidFill>
@@ -2928,26 +3270,26 @@
               </a:rPr>
               <a:t>- Touch feedback states (Idle, Hover, Active, Shockwave).</a:t>
             </a:r>
-            <a:endParaRPr lang="en-US" sz="1200" dirty="0"/>
-          </a:p>
-          <a:p>
-            <a:pPr indent="0" marL="0">
-              <a:lnSpc>
-                <a:spcPts val="2000"/>
-              </a:lnSpc>
-              <a:buNone/>
-            </a:pPr>
-            <a:endParaRPr lang="en-US" sz="1200" dirty="0"/>
-          </a:p>
-          <a:p>
-            <a:pPr indent="0" marL="0">
-              <a:lnSpc>
-                <a:spcPts val="2000"/>
-              </a:lnSpc>
-              <a:buNone/>
-            </a:pPr>
-            <a:r>
-              <a:rPr lang="en-US" sz="1200" dirty="0">
+            <a:endParaRPr lang="en-US" sz="1050" dirty="0"/>
+          </a:p>
+          <a:p>
+            <a:pPr indent="0" marL="0">
+              <a:lnSpc>
+                <a:spcPts val="1600"/>
+              </a:lnSpc>
+              <a:buNone/>
+            </a:pPr>
+            <a:endParaRPr lang="en-US" sz="1050" dirty="0"/>
+          </a:p>
+          <a:p>
+            <a:pPr indent="0" marL="0">
+              <a:lnSpc>
+                <a:spcPts val="1600"/>
+              </a:lnSpc>
+              <a:buNone/>
+            </a:pPr>
+            <a:r>
+              <a:rPr lang="en-US" sz="1050" dirty="0">
                 <a:solidFill>
                   <a:srgbClr val="FFFFFF"/>
                 </a:solidFill>
@@ -2957,17 +3299,17 @@
               </a:rPr>
               <a:t>📝 FOR GAME CONTENT WRITERS:</a:t>
             </a:r>
-            <a:endParaRPr lang="en-US" sz="1200" dirty="0"/>
-          </a:p>
-          <a:p>
-            <a:pPr indent="0" marL="0">
-              <a:lnSpc>
-                <a:spcPts val="2000"/>
-              </a:lnSpc>
-              <a:buNone/>
-            </a:pPr>
-            <a:r>
-              <a:rPr lang="en-US" sz="1200" dirty="0">
+            <a:endParaRPr lang="en-US" sz="1050" dirty="0"/>
+          </a:p>
+          <a:p>
+            <a:pPr indent="0" marL="0">
+              <a:lnSpc>
+                <a:spcPts val="1600"/>
+              </a:lnSpc>
+              <a:buNone/>
+            </a:pPr>
+            <a:r>
+              <a:rPr lang="en-US" sz="1050" dirty="0">
                 <a:solidFill>
                   <a:srgbClr val="FFFFFF"/>
                 </a:solidFill>
@@ -2977,17 +3319,17 @@
               </a:rPr>
               <a:t>- Universal CSV formatting rules &amp; syntax delimiters.</a:t>
             </a:r>
-            <a:endParaRPr lang="en-US" sz="1200" dirty="0"/>
-          </a:p>
-          <a:p>
-            <a:pPr indent="0" marL="0">
-              <a:lnSpc>
-                <a:spcPts val="2000"/>
-              </a:lnSpc>
-              <a:buNone/>
-            </a:pPr>
-            <a:r>
-              <a:rPr lang="en-US" sz="1200" dirty="0">
+            <a:endParaRPr lang="en-US" sz="1050" dirty="0"/>
+          </a:p>
+          <a:p>
+            <a:pPr indent="0" marL="0">
+              <a:lnSpc>
+                <a:spcPts val="1600"/>
+              </a:lnSpc>
+              <a:buNone/>
+            </a:pPr>
+            <a:r>
+              <a:rPr lang="en-US" sz="1050" dirty="0">
                 <a:solidFill>
                   <a:srgbClr val="FFFFFF"/>
                 </a:solidFill>
@@ -2997,17 +3339,17 @@
               </a:rPr>
               <a:t>- Precise character counts for 4 game stations.</a:t>
             </a:r>
-            <a:endParaRPr lang="en-US" sz="1200" dirty="0"/>
-          </a:p>
-          <a:p>
-            <a:pPr indent="0" marL="0">
-              <a:lnSpc>
-                <a:spcPts val="2000"/>
-              </a:lnSpc>
-              <a:buNone/>
-            </a:pPr>
-            <a:r>
-              <a:rPr lang="en-US" sz="1200" dirty="0">
+            <a:endParaRPr lang="en-US" sz="1050" dirty="0"/>
+          </a:p>
+          <a:p>
+            <a:pPr indent="0" marL="0">
+              <a:lnSpc>
+                <a:spcPts val="1600"/>
+              </a:lnSpc>
+              <a:buNone/>
+            </a:pPr>
+            <a:r>
+              <a:rPr lang="en-US" sz="1050" dirty="0">
                 <a:solidFill>
                   <a:srgbClr val="FFFFFF"/>
                 </a:solidFill>
@@ -3017,7 +3359,7 @@
               </a:rPr>
               <a:t>- Automated validation &amp; live GM import rules.</a:t>
             </a:r>
-            <a:endParaRPr lang="en-US" sz="1200" dirty="0"/>
+            <a:endParaRPr lang="en-US" sz="1050" dirty="0"/>
           </a:p>
         </p:txBody>
       </p:sp>
@@ -3055,7 +3397,7 @@
         <p:spPr>
           <a:xfrm>
             <a:off x="0" y="0"/>
-            <a:ext cx="9144000" cy="5143500"/>
+            <a:ext cx="12188952" cy="6858000"/>
           </a:xfrm>
           <a:prstGeom prst="rect">
             <a:avLst/>
@@ -3075,7 +3417,7 @@
         <p:spPr>
           <a:xfrm>
             <a:off x="0" y="0"/>
-            <a:ext cx="9144000" cy="73152"/>
+            <a:ext cx="12188952" cy="73152"/>
           </a:xfrm>
           <a:prstGeom prst="rect">
             <a:avLst/>
@@ -3094,8 +3436,8 @@
         </p:nvSpPr>
         <p:spPr>
           <a:xfrm>
-            <a:off x="731520" y="365760"/>
-            <a:ext cx="7315200" cy="274320"/>
+            <a:off x="548640" y="320040"/>
+            <a:ext cx="7315200" cy="228600"/>
           </a:xfrm>
           <a:prstGeom prst="rect">
             <a:avLst/>
@@ -3111,7 +3453,7 @@
               <a:buNone/>
             </a:pPr>
             <a:r>
-              <a:rPr lang="en-US" sz="1000" b="1" dirty="0">
+              <a:rPr lang="en-US" sz="900" b="1" dirty="0">
                 <a:solidFill>
                   <a:srgbClr val="39FF14"/>
                 </a:solidFill>
@@ -3121,7 +3463,7 @@
               </a:rPr>
               <a:t>VISUAL DESIGN SYSTEM</a:t>
             </a:r>
-            <a:endParaRPr lang="en-US" sz="1000" dirty="0"/>
+            <a:endParaRPr lang="en-US" sz="900" dirty="0"/>
           </a:p>
         </p:txBody>
       </p:sp>
@@ -3133,8 +3475,8 @@
         </p:nvSpPr>
         <p:spPr>
           <a:xfrm>
-            <a:off x="731520" y="640080"/>
-            <a:ext cx="10058400" cy="548640"/>
+            <a:off x="548640" y="548640"/>
+            <a:ext cx="11064240" cy="457200"/>
           </a:xfrm>
           <a:prstGeom prst="rect">
             <a:avLst/>
@@ -3150,7 +3492,7 @@
               <a:buNone/>
             </a:pPr>
             <a:r>
-              <a:rPr lang="en-US" sz="2400" b="1" dirty="0">
+              <a:rPr lang="en-US" sz="2200" b="1" dirty="0">
                 <a:solidFill>
                   <a:srgbClr val="FFFFFF"/>
                 </a:solidFill>
@@ -3160,20 +3502,40 @@
               </a:rPr>
               <a:t>Design System — Color Tokens &amp; Palette</a:t>
             </a:r>
-            <a:endParaRPr lang="en-US" sz="2400" dirty="0"/>
-          </a:p>
-        </p:txBody>
-      </p:sp>
-      <p:sp>
-        <p:nvSpPr>
-          <p:cNvPr id="6" name="Text 4"/>
-          <p:cNvSpPr/>
-          <p:nvPr/>
-        </p:nvSpPr>
-        <p:spPr>
-          <a:xfrm>
-            <a:off x="731520" y="6492240"/>
-            <a:ext cx="9144000" cy="274320"/>
+            <a:endParaRPr lang="en-US" sz="2200" dirty="0"/>
+          </a:p>
+        </p:txBody>
+      </p:sp>
+      <p:sp>
+        <p:nvSpPr>
+          <p:cNvPr id="6" name="Shape 4"/>
+          <p:cNvSpPr/>
+          <p:nvPr/>
+        </p:nvSpPr>
+        <p:spPr>
+          <a:xfrm>
+            <a:off x="548640" y="6217920"/>
+            <a:ext cx="11091672" cy="18288"/>
+          </a:xfrm>
+          <a:prstGeom prst="rect">
+            <a:avLst/>
+          </a:prstGeom>
+          <a:solidFill>
+            <a:srgbClr val="2A2A2A"/>
+          </a:solidFill>
+          <a:ln/>
+        </p:spPr>
+      </p:sp>
+      <p:sp>
+        <p:nvSpPr>
+          <p:cNvPr id="7" name="Text 5"/>
+          <p:cNvSpPr/>
+          <p:nvPr/>
+        </p:nvSpPr>
+        <p:spPr>
+          <a:xfrm>
+            <a:off x="548640" y="6309360"/>
+            <a:ext cx="11091672" cy="274320"/>
           </a:xfrm>
           <a:prstGeom prst="rect">
             <a:avLst/>
@@ -3197,7 +3559,7 @@
                 <a:ea typeface="Helvetica" pitchFamily="34" charset="-122"/>
                 <a:cs typeface="Helvetica" pitchFamily="34" charset="-120"/>
               </a:rPr>
-              <a:t>Infinix XPAD 30 Pro x Ruangguru  |  Clash of Unxpadted</a:t>
+              <a:t>Infinix XPAD 30 Pro × Ruangguru  |  Clash of Unxpadted Design System PRD</a:t>
             </a:r>
             <a:endParaRPr lang="en-US" sz="900" dirty="0"/>
           </a:p>
@@ -3205,14 +3567,14 @@
       </p:sp>
       <p:sp>
         <p:nvSpPr>
-          <p:cNvPr id="7" name="Shape 5"/>
-          <p:cNvSpPr/>
-          <p:nvPr/>
-        </p:nvSpPr>
-        <p:spPr>
-          <a:xfrm>
-            <a:off x="731520" y="1463040"/>
-            <a:ext cx="2468880" cy="1828800"/>
+          <p:cNvPr id="8" name="Shape 6"/>
+          <p:cNvSpPr/>
+          <p:nvPr/>
+        </p:nvSpPr>
+        <p:spPr>
+          <a:xfrm>
+            <a:off x="548640" y="1188720"/>
+            <a:ext cx="2560320" cy="1280160"/>
           </a:xfrm>
           <a:prstGeom prst="rect">
             <a:avLst/>
@@ -3225,24 +3587,24 @@
       </p:sp>
       <p:sp>
         <p:nvSpPr>
-          <p:cNvPr id="8" name="Shape 6"/>
-          <p:cNvSpPr/>
-          <p:nvPr/>
-        </p:nvSpPr>
-        <p:spPr>
-          <a:xfrm>
-            <a:off x="731520" y="3291840"/>
-            <a:ext cx="2468880" cy="2834640"/>
+          <p:cNvPr id="9" name="Shape 7"/>
+          <p:cNvSpPr/>
+          <p:nvPr/>
+        </p:nvSpPr>
+        <p:spPr>
+          <a:xfrm>
+            <a:off x="548640" y="2560320"/>
+            <a:ext cx="2560320" cy="3474720"/>
           </a:xfrm>
           <a:prstGeom prst="rect">
             <a:avLst/>
           </a:prstGeom>
           <a:solidFill>
-            <a:srgbClr val="1A1A1A"/>
+            <a:srgbClr val="181818"/>
           </a:solidFill>
           <a:ln w="12700">
             <a:solidFill>
-              <a:srgbClr val="282828"/>
+              <a:srgbClr val="2A2A2A"/>
             </a:solidFill>
             <a:prstDash val="solid"/>
           </a:ln>
@@ -3250,14 +3612,14 @@
       </p:sp>
       <p:sp>
         <p:nvSpPr>
-          <p:cNvPr id="9" name="Text 7"/>
-          <p:cNvSpPr/>
-          <p:nvPr/>
-        </p:nvSpPr>
-        <p:spPr>
-          <a:xfrm>
-            <a:off x="914400" y="3474720"/>
-            <a:ext cx="2103120" cy="274320"/>
+          <p:cNvPr id="10" name="Text 8"/>
+          <p:cNvSpPr/>
+          <p:nvPr/>
+        </p:nvSpPr>
+        <p:spPr>
+          <a:xfrm>
+            <a:off x="731520" y="2743200"/>
+            <a:ext cx="2194560" cy="274320"/>
           </a:xfrm>
           <a:prstGeom prst="rect">
             <a:avLst/>
@@ -3273,7 +3635,7 @@
               <a:buNone/>
             </a:pPr>
             <a:r>
-              <a:rPr lang="en-US" sz="1400" b="1" dirty="0">
+              <a:rPr lang="en-US" sz="1200" b="1" dirty="0">
                 <a:solidFill>
                   <a:srgbClr val="FFFFFF"/>
                 </a:solidFill>
@@ -3283,20 +3645,20 @@
               </a:rPr>
               <a:t>PRIMARY NEON</a:t>
             </a:r>
-            <a:endParaRPr lang="en-US" sz="1400" dirty="0"/>
-          </a:p>
-        </p:txBody>
-      </p:sp>
-      <p:sp>
-        <p:nvSpPr>
-          <p:cNvPr id="10" name="Text 8"/>
-          <p:cNvSpPr/>
-          <p:nvPr/>
-        </p:nvSpPr>
-        <p:spPr>
-          <a:xfrm>
-            <a:off x="914400" y="3840480"/>
-            <a:ext cx="2103120" cy="548640"/>
+            <a:endParaRPr lang="en-US" sz="1200" dirty="0"/>
+          </a:p>
+        </p:txBody>
+      </p:sp>
+      <p:sp>
+        <p:nvSpPr>
+          <p:cNvPr id="11" name="Text 9"/>
+          <p:cNvSpPr/>
+          <p:nvPr/>
+        </p:nvSpPr>
+        <p:spPr>
+          <a:xfrm>
+            <a:off x="731520" y="3108960"/>
+            <a:ext cx="2194560" cy="457200"/>
           </a:xfrm>
           <a:prstGeom prst="rect">
             <a:avLst/>
@@ -3312,7 +3674,7 @@
               <a:buNone/>
             </a:pPr>
             <a:r>
-              <a:rPr lang="en-US" sz="1100" b="1" dirty="0">
+              <a:rPr lang="en-US" sz="1000" b="1" dirty="0">
                 <a:solidFill>
                   <a:srgbClr val="39FF14"/>
                 </a:solidFill>
@@ -3322,14 +3684,14 @@
               </a:rPr>
               <a:t>Hex: #39FF14</a:t>
             </a:r>
-            <a:endParaRPr lang="en-US" sz="1100" dirty="0"/>
-          </a:p>
-          <a:p>
-            <a:pPr indent="0" marL="0">
-              <a:buNone/>
-            </a:pPr>
-            <a:r>
-              <a:rPr lang="en-US" sz="1100" b="1" dirty="0">
+            <a:endParaRPr lang="en-US" sz="1000" dirty="0"/>
+          </a:p>
+          <a:p>
+            <a:pPr indent="0" marL="0">
+              <a:buNone/>
+            </a:pPr>
+            <a:r>
+              <a:rPr lang="en-US" sz="1000" b="1" dirty="0">
                 <a:solidFill>
                   <a:srgbClr val="39FF14"/>
                 </a:solidFill>
@@ -3339,20 +3701,20 @@
               </a:rPr>
               <a:t>RGB(57, 255, 20)</a:t>
             </a:r>
-            <a:endParaRPr lang="en-US" sz="1100" dirty="0"/>
-          </a:p>
-        </p:txBody>
-      </p:sp>
-      <p:sp>
-        <p:nvSpPr>
-          <p:cNvPr id="11" name="Text 9"/>
-          <p:cNvSpPr/>
-          <p:nvPr/>
-        </p:nvSpPr>
-        <p:spPr>
-          <a:xfrm>
-            <a:off x="914400" y="4572000"/>
-            <a:ext cx="2103120" cy="1280160"/>
+            <a:endParaRPr lang="en-US" sz="1000" dirty="0"/>
+          </a:p>
+        </p:txBody>
+      </p:sp>
+      <p:sp>
+        <p:nvSpPr>
+          <p:cNvPr id="12" name="Text 10"/>
+          <p:cNvSpPr/>
+          <p:nvPr/>
+        </p:nvSpPr>
+        <p:spPr>
+          <a:xfrm>
+            <a:off x="731520" y="3749040"/>
+            <a:ext cx="2194560" cy="2011680"/>
           </a:xfrm>
           <a:prstGeom prst="rect">
             <a:avLst/>
@@ -3365,10 +3727,13 @@
           <a:lstStyle/>
           <a:p>
             <a:pPr indent="0" marL="0">
-              <a:buNone/>
-            </a:pPr>
-            <a:r>
-              <a:rPr lang="en-US" sz="1100" dirty="0">
+              <a:lnSpc>
+                <a:spcPts val="1400"/>
+              </a:lnSpc>
+              <a:buNone/>
+            </a:pPr>
+            <a:r>
+              <a:rPr lang="en-US" sz="950" dirty="0">
                 <a:solidFill>
                   <a:srgbClr val="A3A3A3"/>
                 </a:solidFill>
@@ -3378,14 +3743,17 @@
               </a:rPr>
               <a:t>Usage Rule:</a:t>
             </a:r>
-            <a:endParaRPr lang="en-US" sz="1100" dirty="0"/>
-          </a:p>
-          <a:p>
-            <a:pPr indent="0" marL="0">
-              <a:buNone/>
-            </a:pPr>
-            <a:r>
-              <a:rPr lang="en-US" sz="1100" dirty="0">
+            <a:endParaRPr lang="en-US" sz="950" dirty="0"/>
+          </a:p>
+          <a:p>
+            <a:pPr indent="0" marL="0">
+              <a:lnSpc>
+                <a:spcPts val="1400"/>
+              </a:lnSpc>
+              <a:buNone/>
+            </a:pPr>
+            <a:r>
+              <a:rPr lang="en-US" sz="950" dirty="0">
                 <a:solidFill>
                   <a:srgbClr val="A3A3A3"/>
                 </a:solidFill>
@@ -3395,20 +3763,20 @@
               </a:rPr>
               <a:t>Stage Score, Accents, Active Headers</a:t>
             </a:r>
-            <a:endParaRPr lang="en-US" sz="1100" dirty="0"/>
-          </a:p>
-        </p:txBody>
-      </p:sp>
-      <p:sp>
-        <p:nvSpPr>
-          <p:cNvPr id="12" name="Shape 10"/>
-          <p:cNvSpPr/>
-          <p:nvPr/>
-        </p:nvSpPr>
-        <p:spPr>
-          <a:xfrm>
-            <a:off x="3429000" y="1463040"/>
-            <a:ext cx="2468880" cy="1828800"/>
+            <a:endParaRPr lang="en-US" sz="950" dirty="0"/>
+          </a:p>
+        </p:txBody>
+      </p:sp>
+      <p:sp>
+        <p:nvSpPr>
+          <p:cNvPr id="13" name="Shape 11"/>
+          <p:cNvSpPr/>
+          <p:nvPr/>
+        </p:nvSpPr>
+        <p:spPr>
+          <a:xfrm>
+            <a:off x="3383280" y="1188720"/>
+            <a:ext cx="2560320" cy="1280160"/>
           </a:xfrm>
           <a:prstGeom prst="rect">
             <a:avLst/>
@@ -3421,24 +3789,24 @@
       </p:sp>
       <p:sp>
         <p:nvSpPr>
-          <p:cNvPr id="13" name="Shape 11"/>
-          <p:cNvSpPr/>
-          <p:nvPr/>
-        </p:nvSpPr>
-        <p:spPr>
-          <a:xfrm>
-            <a:off x="3429000" y="3291840"/>
-            <a:ext cx="2468880" cy="2834640"/>
+          <p:cNvPr id="14" name="Shape 12"/>
+          <p:cNvSpPr/>
+          <p:nvPr/>
+        </p:nvSpPr>
+        <p:spPr>
+          <a:xfrm>
+            <a:off x="3383280" y="2560320"/>
+            <a:ext cx="2560320" cy="3474720"/>
           </a:xfrm>
           <a:prstGeom prst="rect">
             <a:avLst/>
           </a:prstGeom>
           <a:solidFill>
-            <a:srgbClr val="1A1A1A"/>
+            <a:srgbClr val="181818"/>
           </a:solidFill>
           <a:ln w="12700">
             <a:solidFill>
-              <a:srgbClr val="282828"/>
+              <a:srgbClr val="2A2A2A"/>
             </a:solidFill>
             <a:prstDash val="solid"/>
           </a:ln>
@@ -3446,14 +3814,14 @@
       </p:sp>
       <p:sp>
         <p:nvSpPr>
-          <p:cNvPr id="14" name="Text 12"/>
-          <p:cNvSpPr/>
-          <p:nvPr/>
-        </p:nvSpPr>
-        <p:spPr>
-          <a:xfrm>
-            <a:off x="3611880" y="3474720"/>
-            <a:ext cx="2103120" cy="274320"/>
+          <p:cNvPr id="15" name="Text 13"/>
+          <p:cNvSpPr/>
+          <p:nvPr/>
+        </p:nvSpPr>
+        <p:spPr>
+          <a:xfrm>
+            <a:off x="3566160" y="2743200"/>
+            <a:ext cx="2194560" cy="274320"/>
           </a:xfrm>
           <a:prstGeom prst="rect">
             <a:avLst/>
@@ -3469,7 +3837,7 @@
               <a:buNone/>
             </a:pPr>
             <a:r>
-              <a:rPr lang="en-US" sz="1400" b="1" dirty="0">
+              <a:rPr lang="en-US" sz="1200" b="1" dirty="0">
                 <a:solidFill>
                   <a:srgbClr val="FFFFFF"/>
                 </a:solidFill>
@@ -3479,20 +3847,20 @@
               </a:rPr>
               <a:t>TEAM X CYAN</a:t>
             </a:r>
-            <a:endParaRPr lang="en-US" sz="1400" dirty="0"/>
-          </a:p>
-        </p:txBody>
-      </p:sp>
-      <p:sp>
-        <p:nvSpPr>
-          <p:cNvPr id="15" name="Text 13"/>
-          <p:cNvSpPr/>
-          <p:nvPr/>
-        </p:nvSpPr>
-        <p:spPr>
-          <a:xfrm>
-            <a:off x="3611880" y="3840480"/>
-            <a:ext cx="2103120" cy="548640"/>
+            <a:endParaRPr lang="en-US" sz="1200" dirty="0"/>
+          </a:p>
+        </p:txBody>
+      </p:sp>
+      <p:sp>
+        <p:nvSpPr>
+          <p:cNvPr id="16" name="Text 14"/>
+          <p:cNvSpPr/>
+          <p:nvPr/>
+        </p:nvSpPr>
+        <p:spPr>
+          <a:xfrm>
+            <a:off x="3566160" y="3108960"/>
+            <a:ext cx="2194560" cy="457200"/>
           </a:xfrm>
           <a:prstGeom prst="rect">
             <a:avLst/>
@@ -3508,7 +3876,7 @@
               <a:buNone/>
             </a:pPr>
             <a:r>
-              <a:rPr lang="en-US" sz="1100" b="1" dirty="0">
+              <a:rPr lang="en-US" sz="1000" b="1" dirty="0">
                 <a:solidFill>
                   <a:srgbClr val="39FF14"/>
                 </a:solidFill>
@@ -3518,14 +3886,14 @@
               </a:rPr>
               <a:t>Hex: #00E5FF</a:t>
             </a:r>
-            <a:endParaRPr lang="en-US" sz="1100" dirty="0"/>
-          </a:p>
-          <a:p>
-            <a:pPr indent="0" marL="0">
-              <a:buNone/>
-            </a:pPr>
-            <a:r>
-              <a:rPr lang="en-US" sz="1100" b="1" dirty="0">
+            <a:endParaRPr lang="en-US" sz="1000" dirty="0"/>
+          </a:p>
+          <a:p>
+            <a:pPr indent="0" marL="0">
+              <a:buNone/>
+            </a:pPr>
+            <a:r>
+              <a:rPr lang="en-US" sz="1000" b="1" dirty="0">
                 <a:solidFill>
                   <a:srgbClr val="39FF14"/>
                 </a:solidFill>
@@ -3535,20 +3903,20 @@
               </a:rPr>
               <a:t>RGB(0, 229, 255)</a:t>
             </a:r>
-            <a:endParaRPr lang="en-US" sz="1100" dirty="0"/>
-          </a:p>
-        </p:txBody>
-      </p:sp>
-      <p:sp>
-        <p:nvSpPr>
-          <p:cNvPr id="16" name="Text 14"/>
-          <p:cNvSpPr/>
-          <p:nvPr/>
-        </p:nvSpPr>
-        <p:spPr>
-          <a:xfrm>
-            <a:off x="3611880" y="4572000"/>
-            <a:ext cx="2103120" cy="1280160"/>
+            <a:endParaRPr lang="en-US" sz="1000" dirty="0"/>
+          </a:p>
+        </p:txBody>
+      </p:sp>
+      <p:sp>
+        <p:nvSpPr>
+          <p:cNvPr id="17" name="Text 15"/>
+          <p:cNvSpPr/>
+          <p:nvPr/>
+        </p:nvSpPr>
+        <p:spPr>
+          <a:xfrm>
+            <a:off x="3566160" y="3749040"/>
+            <a:ext cx="2194560" cy="2011680"/>
           </a:xfrm>
           <a:prstGeom prst="rect">
             <a:avLst/>
@@ -3561,10 +3929,13 @@
           <a:lstStyle/>
           <a:p>
             <a:pPr indent="0" marL="0">
-              <a:buNone/>
-            </a:pPr>
-            <a:r>
-              <a:rPr lang="en-US" sz="1100" dirty="0">
+              <a:lnSpc>
+                <a:spcPts val="1400"/>
+              </a:lnSpc>
+              <a:buNone/>
+            </a:pPr>
+            <a:r>
+              <a:rPr lang="en-US" sz="950" dirty="0">
                 <a:solidFill>
                   <a:srgbClr val="A3A3A3"/>
                 </a:solidFill>
@@ -3574,14 +3945,17 @@
               </a:rPr>
               <a:t>Usage Rule:</a:t>
             </a:r>
-            <a:endParaRPr lang="en-US" sz="1100" dirty="0"/>
-          </a:p>
-          <a:p>
-            <a:pPr indent="0" marL="0">
-              <a:buNone/>
-            </a:pPr>
-            <a:r>
-              <a:rPr lang="en-US" sz="1100" dirty="0">
+            <a:endParaRPr lang="en-US" sz="950" dirty="0"/>
+          </a:p>
+          <a:p>
+            <a:pPr indent="0" marL="0">
+              <a:lnSpc>
+                <a:spcPts val="1400"/>
+              </a:lnSpc>
+              <a:buNone/>
+            </a:pPr>
+            <a:r>
+              <a:rPr lang="en-US" sz="950" dirty="0">
                 <a:solidFill>
                   <a:srgbClr val="A3A3A3"/>
                 </a:solidFill>
@@ -3591,20 +3965,20 @@
               </a:rPr>
               <a:t>Team X Tablet, Blue Buzzer, Progress</a:t>
             </a:r>
-            <a:endParaRPr lang="en-US" sz="1100" dirty="0"/>
-          </a:p>
-        </p:txBody>
-      </p:sp>
-      <p:sp>
-        <p:nvSpPr>
-          <p:cNvPr id="17" name="Shape 15"/>
-          <p:cNvSpPr/>
-          <p:nvPr/>
-        </p:nvSpPr>
-        <p:spPr>
-          <a:xfrm>
-            <a:off x="6126480" y="1463040"/>
-            <a:ext cx="2468880" cy="1828800"/>
+            <a:endParaRPr lang="en-US" sz="950" dirty="0"/>
+          </a:p>
+        </p:txBody>
+      </p:sp>
+      <p:sp>
+        <p:nvSpPr>
+          <p:cNvPr id="18" name="Shape 16"/>
+          <p:cNvSpPr/>
+          <p:nvPr/>
+        </p:nvSpPr>
+        <p:spPr>
+          <a:xfrm>
+            <a:off x="6217920" y="1188720"/>
+            <a:ext cx="2560320" cy="1280160"/>
           </a:xfrm>
           <a:prstGeom prst="rect">
             <a:avLst/>
@@ -3617,24 +3991,24 @@
       </p:sp>
       <p:sp>
         <p:nvSpPr>
-          <p:cNvPr id="18" name="Shape 16"/>
-          <p:cNvSpPr/>
-          <p:nvPr/>
-        </p:nvSpPr>
-        <p:spPr>
-          <a:xfrm>
-            <a:off x="6126480" y="3291840"/>
-            <a:ext cx="2468880" cy="2834640"/>
+          <p:cNvPr id="19" name="Shape 17"/>
+          <p:cNvSpPr/>
+          <p:nvPr/>
+        </p:nvSpPr>
+        <p:spPr>
+          <a:xfrm>
+            <a:off x="6217920" y="2560320"/>
+            <a:ext cx="2560320" cy="3474720"/>
           </a:xfrm>
           <a:prstGeom prst="rect">
             <a:avLst/>
           </a:prstGeom>
           <a:solidFill>
-            <a:srgbClr val="1A1A1A"/>
+            <a:srgbClr val="181818"/>
           </a:solidFill>
           <a:ln w="12700">
             <a:solidFill>
-              <a:srgbClr val="282828"/>
+              <a:srgbClr val="2A2A2A"/>
             </a:solidFill>
             <a:prstDash val="solid"/>
           </a:ln>
@@ -3642,14 +4016,14 @@
       </p:sp>
       <p:sp>
         <p:nvSpPr>
-          <p:cNvPr id="19" name="Text 17"/>
-          <p:cNvSpPr/>
-          <p:nvPr/>
-        </p:nvSpPr>
-        <p:spPr>
-          <a:xfrm>
-            <a:off x="6309360" y="3474720"/>
-            <a:ext cx="2103120" cy="274320"/>
+          <p:cNvPr id="20" name="Text 18"/>
+          <p:cNvSpPr/>
+          <p:nvPr/>
+        </p:nvSpPr>
+        <p:spPr>
+          <a:xfrm>
+            <a:off x="6400800" y="2743200"/>
+            <a:ext cx="2194560" cy="274320"/>
           </a:xfrm>
           <a:prstGeom prst="rect">
             <a:avLst/>
@@ -3665,7 +4039,7 @@
               <a:buNone/>
             </a:pPr>
             <a:r>
-              <a:rPr lang="en-US" sz="1400" b="1" dirty="0">
+              <a:rPr lang="en-US" sz="1200" b="1" dirty="0">
                 <a:solidFill>
                   <a:srgbClr val="FFFFFF"/>
                 </a:solidFill>
@@ -3675,20 +4049,20 @@
               </a:rPr>
               <a:t>TEAM Y CRIMSON</a:t>
             </a:r>
-            <a:endParaRPr lang="en-US" sz="1400" dirty="0"/>
-          </a:p>
-        </p:txBody>
-      </p:sp>
-      <p:sp>
-        <p:nvSpPr>
-          <p:cNvPr id="20" name="Text 18"/>
-          <p:cNvSpPr/>
-          <p:nvPr/>
-        </p:nvSpPr>
-        <p:spPr>
-          <a:xfrm>
-            <a:off x="6309360" y="3840480"/>
-            <a:ext cx="2103120" cy="548640"/>
+            <a:endParaRPr lang="en-US" sz="1200" dirty="0"/>
+          </a:p>
+        </p:txBody>
+      </p:sp>
+      <p:sp>
+        <p:nvSpPr>
+          <p:cNvPr id="21" name="Text 19"/>
+          <p:cNvSpPr/>
+          <p:nvPr/>
+        </p:nvSpPr>
+        <p:spPr>
+          <a:xfrm>
+            <a:off x="6400800" y="3108960"/>
+            <a:ext cx="2194560" cy="457200"/>
           </a:xfrm>
           <a:prstGeom prst="rect">
             <a:avLst/>
@@ -3704,7 +4078,7 @@
               <a:buNone/>
             </a:pPr>
             <a:r>
-              <a:rPr lang="en-US" sz="1100" b="1" dirty="0">
+              <a:rPr lang="en-US" sz="1000" b="1" dirty="0">
                 <a:solidFill>
                   <a:srgbClr val="39FF14"/>
                 </a:solidFill>
@@ -3714,14 +4088,14 @@
               </a:rPr>
               <a:t>Hex: #FF3B30</a:t>
             </a:r>
-            <a:endParaRPr lang="en-US" sz="1100" dirty="0"/>
-          </a:p>
-          <a:p>
-            <a:pPr indent="0" marL="0">
-              <a:buNone/>
-            </a:pPr>
-            <a:r>
-              <a:rPr lang="en-US" sz="1100" b="1" dirty="0">
+            <a:endParaRPr lang="en-US" sz="1000" dirty="0"/>
+          </a:p>
+          <a:p>
+            <a:pPr indent="0" marL="0">
+              <a:buNone/>
+            </a:pPr>
+            <a:r>
+              <a:rPr lang="en-US" sz="1000" b="1" dirty="0">
                 <a:solidFill>
                   <a:srgbClr val="39FF14"/>
                 </a:solidFill>
@@ -3731,20 +4105,20 @@
               </a:rPr>
               <a:t>RGB(255, 59, 48)</a:t>
             </a:r>
-            <a:endParaRPr lang="en-US" sz="1100" dirty="0"/>
-          </a:p>
-        </p:txBody>
-      </p:sp>
-      <p:sp>
-        <p:nvSpPr>
-          <p:cNvPr id="21" name="Text 19"/>
-          <p:cNvSpPr/>
-          <p:nvPr/>
-        </p:nvSpPr>
-        <p:spPr>
-          <a:xfrm>
-            <a:off x="6309360" y="4572000"/>
-            <a:ext cx="2103120" cy="1280160"/>
+            <a:endParaRPr lang="en-US" sz="1000" dirty="0"/>
+          </a:p>
+        </p:txBody>
+      </p:sp>
+      <p:sp>
+        <p:nvSpPr>
+          <p:cNvPr id="22" name="Text 20"/>
+          <p:cNvSpPr/>
+          <p:nvPr/>
+        </p:nvSpPr>
+        <p:spPr>
+          <a:xfrm>
+            <a:off x="6400800" y="3749040"/>
+            <a:ext cx="2194560" cy="2011680"/>
           </a:xfrm>
           <a:prstGeom prst="rect">
             <a:avLst/>
@@ -3757,10 +4131,13 @@
           <a:lstStyle/>
           <a:p>
             <a:pPr indent="0" marL="0">
-              <a:buNone/>
-            </a:pPr>
-            <a:r>
-              <a:rPr lang="en-US" sz="1100" dirty="0">
+              <a:lnSpc>
+                <a:spcPts val="1400"/>
+              </a:lnSpc>
+              <a:buNone/>
+            </a:pPr>
+            <a:r>
+              <a:rPr lang="en-US" sz="950" dirty="0">
                 <a:solidFill>
                   <a:srgbClr val="A3A3A3"/>
                 </a:solidFill>
@@ -3770,14 +4147,17 @@
               </a:rPr>
               <a:t>Usage Rule:</a:t>
             </a:r>
-            <a:endParaRPr lang="en-US" sz="1100" dirty="0"/>
-          </a:p>
-          <a:p>
-            <a:pPr indent="0" marL="0">
-              <a:buNone/>
-            </a:pPr>
-            <a:r>
-              <a:rPr lang="en-US" sz="1100" dirty="0">
+            <a:endParaRPr lang="en-US" sz="950" dirty="0"/>
+          </a:p>
+          <a:p>
+            <a:pPr indent="0" marL="0">
+              <a:lnSpc>
+                <a:spcPts val="1400"/>
+              </a:lnSpc>
+              <a:buNone/>
+            </a:pPr>
+            <a:r>
+              <a:rPr lang="en-US" sz="950" dirty="0">
                 <a:solidFill>
                   <a:srgbClr val="A3A3A3"/>
                 </a:solidFill>
@@ -3787,20 +4167,20 @@
               </a:rPr>
               <a:t>Team Y Tablet, Red Buzzer, Wrong Alert</a:t>
             </a:r>
-            <a:endParaRPr lang="en-US" sz="1100" dirty="0"/>
-          </a:p>
-        </p:txBody>
-      </p:sp>
-      <p:sp>
-        <p:nvSpPr>
-          <p:cNvPr id="22" name="Shape 20"/>
-          <p:cNvSpPr/>
-          <p:nvPr/>
-        </p:nvSpPr>
-        <p:spPr>
-          <a:xfrm>
-            <a:off x="8823960" y="1463040"/>
-            <a:ext cx="2468880" cy="1828800"/>
+            <a:endParaRPr lang="en-US" sz="950" dirty="0"/>
+          </a:p>
+        </p:txBody>
+      </p:sp>
+      <p:sp>
+        <p:nvSpPr>
+          <p:cNvPr id="23" name="Shape 21"/>
+          <p:cNvSpPr/>
+          <p:nvPr/>
+        </p:nvSpPr>
+        <p:spPr>
+          <a:xfrm>
+            <a:off x="9052560" y="1188720"/>
+            <a:ext cx="2560320" cy="1280160"/>
           </a:xfrm>
           <a:prstGeom prst="rect">
             <a:avLst/>
@@ -3813,24 +4193,24 @@
       </p:sp>
       <p:sp>
         <p:nvSpPr>
-          <p:cNvPr id="23" name="Shape 21"/>
-          <p:cNvSpPr/>
-          <p:nvPr/>
-        </p:nvSpPr>
-        <p:spPr>
-          <a:xfrm>
-            <a:off x="8823960" y="3291840"/>
-            <a:ext cx="2468880" cy="2834640"/>
+          <p:cNvPr id="24" name="Shape 22"/>
+          <p:cNvSpPr/>
+          <p:nvPr/>
+        </p:nvSpPr>
+        <p:spPr>
+          <a:xfrm>
+            <a:off x="9052560" y="2560320"/>
+            <a:ext cx="2560320" cy="3474720"/>
           </a:xfrm>
           <a:prstGeom prst="rect">
             <a:avLst/>
           </a:prstGeom>
           <a:solidFill>
-            <a:srgbClr val="1A1A1A"/>
+            <a:srgbClr val="181818"/>
           </a:solidFill>
           <a:ln w="12700">
             <a:solidFill>
-              <a:srgbClr val="282828"/>
+              <a:srgbClr val="2A2A2A"/>
             </a:solidFill>
             <a:prstDash val="solid"/>
           </a:ln>
@@ -3838,14 +4218,14 @@
       </p:sp>
       <p:sp>
         <p:nvSpPr>
-          <p:cNvPr id="24" name="Text 22"/>
-          <p:cNvSpPr/>
-          <p:nvPr/>
-        </p:nvSpPr>
-        <p:spPr>
-          <a:xfrm>
-            <a:off x="9006840" y="3474720"/>
-            <a:ext cx="2103120" cy="274320"/>
+          <p:cNvPr id="25" name="Text 23"/>
+          <p:cNvSpPr/>
+          <p:nvPr/>
+        </p:nvSpPr>
+        <p:spPr>
+          <a:xfrm>
+            <a:off x="9235440" y="2743200"/>
+            <a:ext cx="2194560" cy="274320"/>
           </a:xfrm>
           <a:prstGeom prst="rect">
             <a:avLst/>
@@ -3861,7 +4241,7 @@
               <a:buNone/>
             </a:pPr>
             <a:r>
-              <a:rPr lang="en-US" sz="1400" b="1" dirty="0">
+              <a:rPr lang="en-US" sz="1200" b="1" dirty="0">
                 <a:solidFill>
                   <a:srgbClr val="FFFFFF"/>
                 </a:solidFill>
@@ -3871,20 +4251,20 @@
               </a:rPr>
               <a:t>GM PURPLE</a:t>
             </a:r>
-            <a:endParaRPr lang="en-US" sz="1400" dirty="0"/>
-          </a:p>
-        </p:txBody>
-      </p:sp>
-      <p:sp>
-        <p:nvSpPr>
-          <p:cNvPr id="25" name="Text 23"/>
-          <p:cNvSpPr/>
-          <p:nvPr/>
-        </p:nvSpPr>
-        <p:spPr>
-          <a:xfrm>
-            <a:off x="9006840" y="3840480"/>
-            <a:ext cx="2103120" cy="548640"/>
+            <a:endParaRPr lang="en-US" sz="1200" dirty="0"/>
+          </a:p>
+        </p:txBody>
+      </p:sp>
+      <p:sp>
+        <p:nvSpPr>
+          <p:cNvPr id="26" name="Text 24"/>
+          <p:cNvSpPr/>
+          <p:nvPr/>
+        </p:nvSpPr>
+        <p:spPr>
+          <a:xfrm>
+            <a:off x="9235440" y="3108960"/>
+            <a:ext cx="2194560" cy="457200"/>
           </a:xfrm>
           <a:prstGeom prst="rect">
             <a:avLst/>
@@ -3900,7 +4280,7 @@
               <a:buNone/>
             </a:pPr>
             <a:r>
-              <a:rPr lang="en-US" sz="1100" b="1" dirty="0">
+              <a:rPr lang="en-US" sz="1000" b="1" dirty="0">
                 <a:solidFill>
                   <a:srgbClr val="39FF14"/>
                 </a:solidFill>
@@ -3910,14 +4290,14 @@
               </a:rPr>
               <a:t>Hex: #A855F7</a:t>
             </a:r>
-            <a:endParaRPr lang="en-US" sz="1100" dirty="0"/>
-          </a:p>
-          <a:p>
-            <a:pPr indent="0" marL="0">
-              <a:buNone/>
-            </a:pPr>
-            <a:r>
-              <a:rPr lang="en-US" sz="1100" b="1" dirty="0">
+            <a:endParaRPr lang="en-US" sz="1000" dirty="0"/>
+          </a:p>
+          <a:p>
+            <a:pPr indent="0" marL="0">
+              <a:buNone/>
+            </a:pPr>
+            <a:r>
+              <a:rPr lang="en-US" sz="1000" b="1" dirty="0">
                 <a:solidFill>
                   <a:srgbClr val="39FF14"/>
                 </a:solidFill>
@@ -3927,20 +4307,20 @@
               </a:rPr>
               <a:t>RGB(168, 85, 247)</a:t>
             </a:r>
-            <a:endParaRPr lang="en-US" sz="1100" dirty="0"/>
-          </a:p>
-        </p:txBody>
-      </p:sp>
-      <p:sp>
-        <p:nvSpPr>
-          <p:cNvPr id="26" name="Text 24"/>
-          <p:cNvSpPr/>
-          <p:nvPr/>
-        </p:nvSpPr>
-        <p:spPr>
-          <a:xfrm>
-            <a:off x="9006840" y="4572000"/>
-            <a:ext cx="2103120" cy="1280160"/>
+            <a:endParaRPr lang="en-US" sz="1000" dirty="0"/>
+          </a:p>
+        </p:txBody>
+      </p:sp>
+      <p:sp>
+        <p:nvSpPr>
+          <p:cNvPr id="27" name="Text 25"/>
+          <p:cNvSpPr/>
+          <p:nvPr/>
+        </p:nvSpPr>
+        <p:spPr>
+          <a:xfrm>
+            <a:off x="9235440" y="3749040"/>
+            <a:ext cx="2194560" cy="2011680"/>
           </a:xfrm>
           <a:prstGeom prst="rect">
             <a:avLst/>
@@ -3953,10 +4333,13 @@
           <a:lstStyle/>
           <a:p>
             <a:pPr indent="0" marL="0">
-              <a:buNone/>
-            </a:pPr>
-            <a:r>
-              <a:rPr lang="en-US" sz="1100" dirty="0">
+              <a:lnSpc>
+                <a:spcPts val="1400"/>
+              </a:lnSpc>
+              <a:buNone/>
+            </a:pPr>
+            <a:r>
+              <a:rPr lang="en-US" sz="950" dirty="0">
                 <a:solidFill>
                   <a:srgbClr val="A3A3A3"/>
                 </a:solidFill>
@@ -3966,14 +4349,17 @@
               </a:rPr>
               <a:t>Usage Rule:</a:t>
             </a:r>
-            <a:endParaRPr lang="en-US" sz="1100" dirty="0"/>
-          </a:p>
-          <a:p>
-            <a:pPr indent="0" marL="0">
-              <a:buNone/>
-            </a:pPr>
-            <a:r>
-              <a:rPr lang="en-US" sz="1100" dirty="0">
+            <a:endParaRPr lang="en-US" sz="950" dirty="0"/>
+          </a:p>
+          <a:p>
+            <a:pPr indent="0" marL="0">
+              <a:lnSpc>
+                <a:spcPts val="1400"/>
+              </a:lnSpc>
+              <a:buNone/>
+            </a:pPr>
+            <a:r>
+              <a:rPr lang="en-US" sz="950" dirty="0">
                 <a:solidFill>
                   <a:srgbClr val="A3A3A3"/>
                 </a:solidFill>
@@ -3983,7 +4369,7 @@
               </a:rPr>
               <a:t>Gamemaster Controls &amp; Master Admin</a:t>
             </a:r>
-            <a:endParaRPr lang="en-US" sz="1100" dirty="0"/>
+            <a:endParaRPr lang="en-US" sz="950" dirty="0"/>
           </a:p>
         </p:txBody>
       </p:sp>
@@ -4021,7 +4407,7 @@
         <p:spPr>
           <a:xfrm>
             <a:off x="0" y="0"/>
-            <a:ext cx="9144000" cy="5143500"/>
+            <a:ext cx="12188952" cy="6858000"/>
           </a:xfrm>
           <a:prstGeom prst="rect">
             <a:avLst/>
@@ -4041,7 +4427,7 @@
         <p:spPr>
           <a:xfrm>
             <a:off x="0" y="0"/>
-            <a:ext cx="9144000" cy="73152"/>
+            <a:ext cx="12188952" cy="73152"/>
           </a:xfrm>
           <a:prstGeom prst="rect">
             <a:avLst/>
@@ -4060,8 +4446,8 @@
         </p:nvSpPr>
         <p:spPr>
           <a:xfrm>
-            <a:off x="731520" y="365760"/>
-            <a:ext cx="7315200" cy="274320"/>
+            <a:off x="548640" y="320040"/>
+            <a:ext cx="7315200" cy="228600"/>
           </a:xfrm>
           <a:prstGeom prst="rect">
             <a:avLst/>
@@ -4077,7 +4463,7 @@
               <a:buNone/>
             </a:pPr>
             <a:r>
-              <a:rPr lang="en-US" sz="1000" b="1" dirty="0">
+              <a:rPr lang="en-US" sz="900" b="1" dirty="0">
                 <a:solidFill>
                   <a:srgbClr val="39FF14"/>
                 </a:solidFill>
@@ -4087,7 +4473,7 @@
               </a:rPr>
               <a:t>VISUAL DESIGN SYSTEM</a:t>
             </a:r>
-            <a:endParaRPr lang="en-US" sz="1000" dirty="0"/>
+            <a:endParaRPr lang="en-US" sz="900" dirty="0"/>
           </a:p>
         </p:txBody>
       </p:sp>
@@ -4099,8 +4485,8 @@
         </p:nvSpPr>
         <p:spPr>
           <a:xfrm>
-            <a:off x="731520" y="640080"/>
-            <a:ext cx="10058400" cy="548640"/>
+            <a:off x="548640" y="548640"/>
+            <a:ext cx="11064240" cy="457200"/>
           </a:xfrm>
           <a:prstGeom prst="rect">
             <a:avLst/>
@@ -4116,7 +4502,7 @@
               <a:buNone/>
             </a:pPr>
             <a:r>
-              <a:rPr lang="en-US" sz="2400" b="1" dirty="0">
+              <a:rPr lang="en-US" sz="2200" b="1" dirty="0">
                 <a:solidFill>
                   <a:srgbClr val="FFFFFF"/>
                 </a:solidFill>
@@ -4126,20 +4512,40 @@
               </a:rPr>
               <a:t>Typography &amp; Resolution Hierarchy</a:t>
             </a:r>
-            <a:endParaRPr lang="en-US" sz="2400" dirty="0"/>
-          </a:p>
-        </p:txBody>
-      </p:sp>
-      <p:sp>
-        <p:nvSpPr>
-          <p:cNvPr id="6" name="Text 4"/>
-          <p:cNvSpPr/>
-          <p:nvPr/>
-        </p:nvSpPr>
-        <p:spPr>
-          <a:xfrm>
-            <a:off x="731520" y="6492240"/>
-            <a:ext cx="9144000" cy="274320"/>
+            <a:endParaRPr lang="en-US" sz="2200" dirty="0"/>
+          </a:p>
+        </p:txBody>
+      </p:sp>
+      <p:sp>
+        <p:nvSpPr>
+          <p:cNvPr id="6" name="Shape 4"/>
+          <p:cNvSpPr/>
+          <p:nvPr/>
+        </p:nvSpPr>
+        <p:spPr>
+          <a:xfrm>
+            <a:off x="548640" y="6217920"/>
+            <a:ext cx="11091672" cy="18288"/>
+          </a:xfrm>
+          <a:prstGeom prst="rect">
+            <a:avLst/>
+          </a:prstGeom>
+          <a:solidFill>
+            <a:srgbClr val="2A2A2A"/>
+          </a:solidFill>
+          <a:ln/>
+        </p:spPr>
+      </p:sp>
+      <p:sp>
+        <p:nvSpPr>
+          <p:cNvPr id="7" name="Text 5"/>
+          <p:cNvSpPr/>
+          <p:nvPr/>
+        </p:nvSpPr>
+        <p:spPr>
+          <a:xfrm>
+            <a:off x="548640" y="6309360"/>
+            <a:ext cx="11091672" cy="274320"/>
           </a:xfrm>
           <a:prstGeom prst="rect">
             <a:avLst/>
@@ -4163,7 +4569,7 @@
                 <a:ea typeface="Helvetica" pitchFamily="34" charset="-122"/>
                 <a:cs typeface="Helvetica" pitchFamily="34" charset="-120"/>
               </a:rPr>
-              <a:t>Infinix XPAD 30 Pro x Ruangguru  |  Clash of Unxpadted</a:t>
+              <a:t>Infinix XPAD 30 Pro × Ruangguru  |  Clash of Unxpadted Design System PRD</a:t>
             </a:r>
             <a:endParaRPr lang="en-US" sz="900" dirty="0"/>
           </a:p>
@@ -4171,24 +4577,24 @@
       </p:sp>
       <p:sp>
         <p:nvSpPr>
-          <p:cNvPr id="7" name="Shape 5"/>
-          <p:cNvSpPr/>
-          <p:nvPr/>
-        </p:nvSpPr>
-        <p:spPr>
-          <a:xfrm>
-            <a:off x="731520" y="1371600"/>
-            <a:ext cx="5120640" cy="4754880"/>
+          <p:cNvPr id="8" name="Shape 6"/>
+          <p:cNvSpPr/>
+          <p:nvPr/>
+        </p:nvSpPr>
+        <p:spPr>
+          <a:xfrm>
+            <a:off x="548640" y="1188720"/>
+            <a:ext cx="5394960" cy="4846320"/>
           </a:xfrm>
           <a:prstGeom prst="rect">
             <a:avLst/>
           </a:prstGeom>
           <a:solidFill>
-            <a:srgbClr val="1A1A1A"/>
+            <a:srgbClr val="181818"/>
           </a:solidFill>
           <a:ln w="12700">
             <a:solidFill>
-              <a:srgbClr val="282828"/>
+              <a:srgbClr val="2A2A2A"/>
             </a:solidFill>
             <a:prstDash val="solid"/>
           </a:ln>
@@ -4196,14 +4602,14 @@
       </p:sp>
       <p:sp>
         <p:nvSpPr>
-          <p:cNvPr id="8" name="Text 6"/>
-          <p:cNvSpPr/>
-          <p:nvPr/>
-        </p:nvSpPr>
-        <p:spPr>
-          <a:xfrm>
-            <a:off x="1005840" y="1645920"/>
-            <a:ext cx="4572000" cy="365760"/>
+          <p:cNvPr id="9" name="Text 7"/>
+          <p:cNvSpPr/>
+          <p:nvPr/>
+        </p:nvSpPr>
+        <p:spPr>
+          <a:xfrm>
+            <a:off x="822960" y="1371600"/>
+            <a:ext cx="4846320" cy="365760"/>
           </a:xfrm>
           <a:prstGeom prst="rect">
             <a:avLst/>
@@ -4219,7 +4625,7 @@
               <a:buNone/>
             </a:pPr>
             <a:r>
-              <a:rPr lang="en-US" sz="1600" b="1" dirty="0">
+              <a:rPr lang="en-US" sz="1500" b="1" dirty="0">
                 <a:solidFill>
                   <a:srgbClr val="39FF14"/>
                 </a:solidFill>
@@ -4229,20 +4635,20 @@
               </a:rPr>
               <a:t>🔤 Typography Tokens</a:t>
             </a:r>
-            <a:endParaRPr lang="en-US" sz="1600" dirty="0"/>
-          </a:p>
-        </p:txBody>
-      </p:sp>
-      <p:sp>
-        <p:nvSpPr>
-          <p:cNvPr id="9" name="Text 7"/>
-          <p:cNvSpPr/>
-          <p:nvPr/>
-        </p:nvSpPr>
-        <p:spPr>
-          <a:xfrm>
-            <a:off x="1005840" y="2194560"/>
-            <a:ext cx="4572000" cy="274320"/>
+            <a:endParaRPr lang="en-US" sz="1500" dirty="0"/>
+          </a:p>
+        </p:txBody>
+      </p:sp>
+      <p:sp>
+        <p:nvSpPr>
+          <p:cNvPr id="10" name="Text 8"/>
+          <p:cNvSpPr/>
+          <p:nvPr/>
+        </p:nvSpPr>
+        <p:spPr>
+          <a:xfrm>
+            <a:off x="822960" y="1828800"/>
+            <a:ext cx="4846320" cy="228600"/>
           </a:xfrm>
           <a:prstGeom prst="rect">
             <a:avLst/>
@@ -4258,7 +4664,7 @@
               <a:buNone/>
             </a:pPr>
             <a:r>
-              <a:rPr lang="en-US" sz="1100" b="1" dirty="0">
+              <a:rPr lang="en-US" sz="950" b="1" dirty="0">
                 <a:solidFill>
                   <a:srgbClr val="A3A3A3"/>
                 </a:solidFill>
@@ -4268,20 +4674,20 @@
               </a:rPr>
               <a:t>DISPLAY / HEADLINE FONT:</a:t>
             </a:r>
-            <a:endParaRPr lang="en-US" sz="1100" dirty="0"/>
-          </a:p>
-        </p:txBody>
-      </p:sp>
-      <p:sp>
-        <p:nvSpPr>
-          <p:cNvPr id="10" name="Text 8"/>
-          <p:cNvSpPr/>
-          <p:nvPr/>
-        </p:nvSpPr>
-        <p:spPr>
-          <a:xfrm>
-            <a:off x="1005840" y="2468880"/>
-            <a:ext cx="4572000" cy="457200"/>
+            <a:endParaRPr lang="en-US" sz="950" dirty="0"/>
+          </a:p>
+        </p:txBody>
+      </p:sp>
+      <p:sp>
+        <p:nvSpPr>
+          <p:cNvPr id="11" name="Text 9"/>
+          <p:cNvSpPr/>
+          <p:nvPr/>
+        </p:nvSpPr>
+        <p:spPr>
+          <a:xfrm>
+            <a:off x="822960" y="2057400"/>
+            <a:ext cx="4846320" cy="365760"/>
           </a:xfrm>
           <a:prstGeom prst="rect">
             <a:avLst/>
@@ -4297,7 +4703,7 @@
               <a:buNone/>
             </a:pPr>
             <a:r>
-              <a:rPr lang="en-US" sz="1600" b="1" dirty="0">
+              <a:rPr lang="en-US" sz="1400" b="1" dirty="0">
                 <a:solidFill>
                   <a:srgbClr val="FFFFFF"/>
                 </a:solidFill>
@@ -4307,20 +4713,20 @@
               </a:rPr>
               <a:t>InfinixDisplay / Outfit / Space Grotesk</a:t>
             </a:r>
-            <a:endParaRPr lang="en-US" sz="1600" dirty="0"/>
-          </a:p>
-        </p:txBody>
-      </p:sp>
-      <p:sp>
-        <p:nvSpPr>
-          <p:cNvPr id="11" name="Text 9"/>
-          <p:cNvSpPr/>
-          <p:nvPr/>
-        </p:nvSpPr>
-        <p:spPr>
-          <a:xfrm>
-            <a:off x="1005840" y="3200400"/>
-            <a:ext cx="4572000" cy="274320"/>
+            <a:endParaRPr lang="en-US" sz="1400" dirty="0"/>
+          </a:p>
+        </p:txBody>
+      </p:sp>
+      <p:sp>
+        <p:nvSpPr>
+          <p:cNvPr id="12" name="Text 10"/>
+          <p:cNvSpPr/>
+          <p:nvPr/>
+        </p:nvSpPr>
+        <p:spPr>
+          <a:xfrm>
+            <a:off x="822960" y="2560320"/>
+            <a:ext cx="4846320" cy="228600"/>
           </a:xfrm>
           <a:prstGeom prst="rect">
             <a:avLst/>
@@ -4336,7 +4742,7 @@
               <a:buNone/>
             </a:pPr>
             <a:r>
-              <a:rPr lang="en-US" sz="1100" b="1" dirty="0">
+              <a:rPr lang="en-US" sz="950" b="1" dirty="0">
                 <a:solidFill>
                   <a:srgbClr val="A3A3A3"/>
                 </a:solidFill>
@@ -4346,20 +4752,20 @@
               </a:rPr>
               <a:t>BODY &amp; UI FONT:</a:t>
             </a:r>
-            <a:endParaRPr lang="en-US" sz="1100" dirty="0"/>
-          </a:p>
-        </p:txBody>
-      </p:sp>
-      <p:sp>
-        <p:nvSpPr>
-          <p:cNvPr id="12" name="Text 10"/>
-          <p:cNvSpPr/>
-          <p:nvPr/>
-        </p:nvSpPr>
-        <p:spPr>
-          <a:xfrm>
-            <a:off x="1005840" y="3474720"/>
-            <a:ext cx="4572000" cy="457200"/>
+            <a:endParaRPr lang="en-US" sz="950" dirty="0"/>
+          </a:p>
+        </p:txBody>
+      </p:sp>
+      <p:sp>
+        <p:nvSpPr>
+          <p:cNvPr id="13" name="Text 11"/>
+          <p:cNvSpPr/>
+          <p:nvPr/>
+        </p:nvSpPr>
+        <p:spPr>
+          <a:xfrm>
+            <a:off x="822960" y="2788920"/>
+            <a:ext cx="4846320" cy="365760"/>
           </a:xfrm>
           <a:prstGeom prst="rect">
             <a:avLst/>
@@ -4375,7 +4781,7 @@
               <a:buNone/>
             </a:pPr>
             <a:r>
-              <a:rPr lang="en-US" sz="1500" b="1" dirty="0">
+              <a:rPr lang="en-US" sz="1300" b="1" dirty="0">
                 <a:solidFill>
                   <a:srgbClr val="FFFFFF"/>
                 </a:solidFill>
@@ -4385,20 +4791,20 @@
               </a:rPr>
               <a:t>Aktiv Grotesk Ex / Inter</a:t>
             </a:r>
-            <a:endParaRPr lang="en-US" sz="1500" dirty="0"/>
-          </a:p>
-        </p:txBody>
-      </p:sp>
-      <p:sp>
-        <p:nvSpPr>
-          <p:cNvPr id="13" name="Text 11"/>
-          <p:cNvSpPr/>
-          <p:nvPr/>
-        </p:nvSpPr>
-        <p:spPr>
-          <a:xfrm>
-            <a:off x="1005840" y="4206240"/>
-            <a:ext cx="4572000" cy="1645920"/>
+            <a:endParaRPr lang="en-US" sz="1300" dirty="0"/>
+          </a:p>
+        </p:txBody>
+      </p:sp>
+      <p:sp>
+        <p:nvSpPr>
+          <p:cNvPr id="14" name="Text 12"/>
+          <p:cNvSpPr/>
+          <p:nvPr/>
+        </p:nvSpPr>
+        <p:spPr>
+          <a:xfrm>
+            <a:off x="822960" y="3383280"/>
+            <a:ext cx="4846320" cy="2468880"/>
           </a:xfrm>
           <a:prstGeom prst="rect">
             <a:avLst/>
@@ -4412,12 +4818,12 @@
           <a:p>
             <a:pPr indent="0" marL="0">
               <a:lnSpc>
-                <a:spcPts val="1800"/>
-              </a:lnSpc>
-              <a:buNone/>
-            </a:pPr>
-            <a:r>
-              <a:rPr lang="en-US" sz="1100" dirty="0">
+                <a:spcPts val="1600"/>
+              </a:lnSpc>
+              <a:buNone/>
+            </a:pPr>
+            <a:r>
+              <a:rPr lang="en-US" sz="1000" dirty="0">
                 <a:solidFill>
                   <a:srgbClr val="A3A3A3"/>
                 </a:solidFill>
@@ -4427,17 +4833,17 @@
               </a:rPr>
               <a:t>RULES FOR DESIGNERS:</a:t>
             </a:r>
-            <a:endParaRPr lang="en-US" sz="1100" dirty="0"/>
-          </a:p>
-          <a:p>
-            <a:pPr indent="0" marL="0">
-              <a:lnSpc>
-                <a:spcPts val="1800"/>
-              </a:lnSpc>
-              <a:buNone/>
-            </a:pPr>
-            <a:r>
-              <a:rPr lang="en-US" sz="1100" dirty="0">
+            <a:endParaRPr lang="en-US" sz="1000" dirty="0"/>
+          </a:p>
+          <a:p>
+            <a:pPr indent="0" marL="0">
+              <a:lnSpc>
+                <a:spcPts val="1600"/>
+              </a:lnSpc>
+              <a:buNone/>
+            </a:pPr>
+            <a:r>
+              <a:rPr lang="en-US" sz="1000" dirty="0">
                 <a:solidFill>
                   <a:srgbClr val="A3A3A3"/>
                 </a:solidFill>
@@ -4447,17 +4853,17 @@
               </a:rPr>
               <a:t>• Headings must be uppercase for Station Titles.</a:t>
             </a:r>
-            <a:endParaRPr lang="en-US" sz="1100" dirty="0"/>
-          </a:p>
-          <a:p>
-            <a:pPr indent="0" marL="0">
-              <a:lnSpc>
-                <a:spcPts val="1800"/>
-              </a:lnSpc>
-              <a:buNone/>
-            </a:pPr>
-            <a:r>
-              <a:rPr lang="en-US" sz="1100" dirty="0">
+            <a:endParaRPr lang="en-US" sz="1000" dirty="0"/>
+          </a:p>
+          <a:p>
+            <a:pPr indent="0" marL="0">
+              <a:lnSpc>
+                <a:spcPts val="1600"/>
+              </a:lnSpc>
+              <a:buNone/>
+            </a:pPr>
+            <a:r>
+              <a:rPr lang="en-US" sz="1000" dirty="0">
                 <a:solidFill>
                   <a:srgbClr val="A3A3A3"/>
                 </a:solidFill>
@@ -4467,30 +4873,30 @@
               </a:rPr>
               <a:t>• Numbers in Math/Score UI must use tabular monospaced digits to prevent width jumping.</a:t>
             </a:r>
-            <a:endParaRPr lang="en-US" sz="1100" dirty="0"/>
-          </a:p>
-        </p:txBody>
-      </p:sp>
-      <p:sp>
-        <p:nvSpPr>
-          <p:cNvPr id="14" name="Shape 12"/>
-          <p:cNvSpPr/>
-          <p:nvPr/>
-        </p:nvSpPr>
-        <p:spPr>
-          <a:xfrm>
-            <a:off x="6126480" y="1371600"/>
-            <a:ext cx="5120640" cy="4754880"/>
+            <a:endParaRPr lang="en-US" sz="1000" dirty="0"/>
+          </a:p>
+        </p:txBody>
+      </p:sp>
+      <p:sp>
+        <p:nvSpPr>
+          <p:cNvPr id="15" name="Shape 13"/>
+          <p:cNvSpPr/>
+          <p:nvPr/>
+        </p:nvSpPr>
+        <p:spPr>
+          <a:xfrm>
+            <a:off x="6217920" y="1188720"/>
+            <a:ext cx="5394960" cy="4846320"/>
           </a:xfrm>
           <a:prstGeom prst="rect">
             <a:avLst/>
           </a:prstGeom>
           <a:solidFill>
-            <a:srgbClr val="1A1A1A"/>
+            <a:srgbClr val="181818"/>
           </a:solidFill>
           <a:ln w="12700">
             <a:solidFill>
-              <a:srgbClr val="282828"/>
+              <a:srgbClr val="2A2A2A"/>
             </a:solidFill>
             <a:prstDash val="solid"/>
           </a:ln>
@@ -4498,14 +4904,14 @@
       </p:sp>
       <p:sp>
         <p:nvSpPr>
-          <p:cNvPr id="15" name="Text 13"/>
-          <p:cNvSpPr/>
-          <p:nvPr/>
-        </p:nvSpPr>
-        <p:spPr>
-          <a:xfrm>
-            <a:off x="6400800" y="1645920"/>
-            <a:ext cx="4572000" cy="365760"/>
+          <p:cNvPr id="16" name="Text 14"/>
+          <p:cNvSpPr/>
+          <p:nvPr/>
+        </p:nvSpPr>
+        <p:spPr>
+          <a:xfrm>
+            <a:off x="6492240" y="1371600"/>
+            <a:ext cx="4846320" cy="365760"/>
           </a:xfrm>
           <a:prstGeom prst="rect">
             <a:avLst/>
@@ -4521,7 +4927,7 @@
               <a:buNone/>
             </a:pPr>
             <a:r>
-              <a:rPr lang="en-US" sz="1600" b="1" dirty="0">
+              <a:rPr lang="en-US" sz="1500" b="1" dirty="0">
                 <a:solidFill>
                   <a:srgbClr val="00E5FF"/>
                 </a:solidFill>
@@ -4531,20 +4937,20 @@
               </a:rPr>
               <a:t>📐 Resolution &amp; Viewport Target</a:t>
             </a:r>
-            <a:endParaRPr lang="en-US" sz="1600" dirty="0"/>
-          </a:p>
-        </p:txBody>
-      </p:sp>
-      <p:sp>
-        <p:nvSpPr>
-          <p:cNvPr id="16" name="Text 14"/>
-          <p:cNvSpPr/>
-          <p:nvPr/>
-        </p:nvSpPr>
-        <p:spPr>
-          <a:xfrm>
-            <a:off x="6400800" y="2194560"/>
-            <a:ext cx="4572000" cy="3657600"/>
+            <a:endParaRPr lang="en-US" sz="1500" dirty="0"/>
+          </a:p>
+        </p:txBody>
+      </p:sp>
+      <p:sp>
+        <p:nvSpPr>
+          <p:cNvPr id="17" name="Text 15"/>
+          <p:cNvSpPr/>
+          <p:nvPr/>
+        </p:nvSpPr>
+        <p:spPr>
+          <a:xfrm>
+            <a:off x="6492240" y="1828800"/>
+            <a:ext cx="4846320" cy="4023360"/>
           </a:xfrm>
           <a:prstGeom prst="rect">
             <a:avLst/>
@@ -4558,12 +4964,12 @@
           <a:p>
             <a:pPr indent="0" marL="0">
               <a:lnSpc>
-                <a:spcPts val="2000"/>
-              </a:lnSpc>
-              <a:buNone/>
-            </a:pPr>
-            <a:r>
-              <a:rPr lang="en-US" sz="1200" dirty="0">
+                <a:spcPts val="1600"/>
+              </a:lnSpc>
+              <a:buNone/>
+            </a:pPr>
+            <a:r>
+              <a:rPr lang="en-US" sz="1050" dirty="0">
                 <a:solidFill>
                   <a:srgbClr val="FFFFFF"/>
                 </a:solidFill>
@@ -4573,17 +4979,17 @@
               </a:rPr>
               <a:t>📺 MAIN STAGE DISPLAY:</a:t>
             </a:r>
-            <a:endParaRPr lang="en-US" sz="1200" dirty="0"/>
-          </a:p>
-          <a:p>
-            <a:pPr indent="0" marL="0">
-              <a:lnSpc>
-                <a:spcPts val="2000"/>
-              </a:lnSpc>
-              <a:buNone/>
-            </a:pPr>
-            <a:r>
-              <a:rPr lang="en-US" sz="1200" dirty="0">
+            <a:endParaRPr lang="en-US" sz="1050" dirty="0"/>
+          </a:p>
+          <a:p>
+            <a:pPr indent="0" marL="0">
+              <a:lnSpc>
+                <a:spcPts val="1600"/>
+              </a:lnSpc>
+              <a:buNone/>
+            </a:pPr>
+            <a:r>
+              <a:rPr lang="en-US" sz="1050" dirty="0">
                 <a:solidFill>
                   <a:srgbClr val="FFFFFF"/>
                 </a:solidFill>
@@ -4593,17 +4999,17 @@
               </a:rPr>
               <a:t>• Resolution: 1920 x 1080 (16:9 Aspect Ratio)</a:t>
             </a:r>
-            <a:endParaRPr lang="en-US" sz="1200" dirty="0"/>
-          </a:p>
-          <a:p>
-            <a:pPr indent="0" marL="0">
-              <a:lnSpc>
-                <a:spcPts val="2000"/>
-              </a:lnSpc>
-              <a:buNone/>
-            </a:pPr>
-            <a:r>
-              <a:rPr lang="en-US" sz="1200" dirty="0">
+            <a:endParaRPr lang="en-US" sz="1050" dirty="0"/>
+          </a:p>
+          <a:p>
+            <a:pPr indent="0" marL="0">
+              <a:lnSpc>
+                <a:spcPts val="1600"/>
+              </a:lnSpc>
+              <a:buNone/>
+            </a:pPr>
+            <a:r>
+              <a:rPr lang="en-US" sz="1050" dirty="0">
                 <a:solidFill>
                   <a:srgbClr val="FFFFFF"/>
                 </a:solidFill>
@@ -4613,26 +5019,26 @@
               </a:rPr>
               <a:t>• Viewing Distance: High visibility from 15 meters.</a:t>
             </a:r>
-            <a:endParaRPr lang="en-US" sz="1200" dirty="0"/>
-          </a:p>
-          <a:p>
-            <a:pPr indent="0" marL="0">
-              <a:lnSpc>
-                <a:spcPts val="2000"/>
-              </a:lnSpc>
-              <a:buNone/>
-            </a:pPr>
-            <a:endParaRPr lang="en-US" sz="1200" dirty="0"/>
-          </a:p>
-          <a:p>
-            <a:pPr indent="0" marL="0">
-              <a:lnSpc>
-                <a:spcPts val="2000"/>
-              </a:lnSpc>
-              <a:buNone/>
-            </a:pPr>
-            <a:r>
-              <a:rPr lang="en-US" sz="1200" dirty="0">
+            <a:endParaRPr lang="en-US" sz="1050" dirty="0"/>
+          </a:p>
+          <a:p>
+            <a:pPr indent="0" marL="0">
+              <a:lnSpc>
+                <a:spcPts val="1600"/>
+              </a:lnSpc>
+              <a:buNone/>
+            </a:pPr>
+            <a:endParaRPr lang="en-US" sz="1050" dirty="0"/>
+          </a:p>
+          <a:p>
+            <a:pPr indent="0" marL="0">
+              <a:lnSpc>
+                <a:spcPts val="1600"/>
+              </a:lnSpc>
+              <a:buNone/>
+            </a:pPr>
+            <a:r>
+              <a:rPr lang="en-US" sz="1050" dirty="0">
                 <a:solidFill>
                   <a:srgbClr val="FFFFFF"/>
                 </a:solidFill>
@@ -4642,17 +5048,17 @@
               </a:rPr>
               <a:t>📱 PLAYER TABLET VIEW (XPAD 30 Pro):</a:t>
             </a:r>
-            <a:endParaRPr lang="en-US" sz="1200" dirty="0"/>
-          </a:p>
-          <a:p>
-            <a:pPr indent="0" marL="0">
-              <a:lnSpc>
-                <a:spcPts val="2000"/>
-              </a:lnSpc>
-              <a:buNone/>
-            </a:pPr>
-            <a:r>
-              <a:rPr lang="en-US" sz="1200" dirty="0">
+            <a:endParaRPr lang="en-US" sz="1050" dirty="0"/>
+          </a:p>
+          <a:p>
+            <a:pPr indent="0" marL="0">
+              <a:lnSpc>
+                <a:spcPts val="1600"/>
+              </a:lnSpc>
+              <a:buNone/>
+            </a:pPr>
+            <a:r>
+              <a:rPr lang="en-US" sz="1050" dirty="0">
                 <a:solidFill>
                   <a:srgbClr val="FFFFFF"/>
                 </a:solidFill>
@@ -4662,17 +5068,17 @@
               </a:rPr>
               <a:t>• Resolution: 2560 x 1600 (16:10 Aspect Ratio)</a:t>
             </a:r>
-            <a:endParaRPr lang="en-US" sz="1200" dirty="0"/>
-          </a:p>
-          <a:p>
-            <a:pPr indent="0" marL="0">
-              <a:lnSpc>
-                <a:spcPts val="2000"/>
-              </a:lnSpc>
-              <a:buNone/>
-            </a:pPr>
-            <a:r>
-              <a:rPr lang="en-US" sz="1200" dirty="0">
+            <a:endParaRPr lang="en-US" sz="1050" dirty="0"/>
+          </a:p>
+          <a:p>
+            <a:pPr indent="0" marL="0">
+              <a:lnSpc>
+                <a:spcPts val="1600"/>
+              </a:lnSpc>
+              <a:buNone/>
+            </a:pPr>
+            <a:r>
+              <a:rPr lang="en-US" sz="1050" dirty="0">
                 <a:solidFill>
                   <a:srgbClr val="FFFFFF"/>
                 </a:solidFill>
@@ -4682,17 +5088,17 @@
               </a:rPr>
               <a:t>• Orientation: Landscape default.</a:t>
             </a:r>
-            <a:endParaRPr lang="en-US" sz="1200" dirty="0"/>
-          </a:p>
-          <a:p>
-            <a:pPr indent="0" marL="0">
-              <a:lnSpc>
-                <a:spcPts val="2000"/>
-              </a:lnSpc>
-              <a:buNone/>
-            </a:pPr>
-            <a:r>
-              <a:rPr lang="en-US" sz="1200" dirty="0">
+            <a:endParaRPr lang="en-US" sz="1050" dirty="0"/>
+          </a:p>
+          <a:p>
+            <a:pPr indent="0" marL="0">
+              <a:lnSpc>
+                <a:spcPts val="1600"/>
+              </a:lnSpc>
+              <a:buNone/>
+            </a:pPr>
+            <a:r>
+              <a:rPr lang="en-US" sz="1050" dirty="0">
                 <a:solidFill>
                   <a:srgbClr val="FFFFFF"/>
                 </a:solidFill>
@@ -4702,7 +5108,7 @@
               </a:rPr>
               <a:t>• Touch Target Minimum: 48px x 48px for finger taps.</a:t>
             </a:r>
-            <a:endParaRPr lang="en-US" sz="1200" dirty="0"/>
+            <a:endParaRPr lang="en-US" sz="1050" dirty="0"/>
           </a:p>
         </p:txBody>
       </p:sp>
@@ -4740,7 +5146,7 @@
         <p:spPr>
           <a:xfrm>
             <a:off x="0" y="0"/>
-            <a:ext cx="9144000" cy="5143500"/>
+            <a:ext cx="12188952" cy="6858000"/>
           </a:xfrm>
           <a:prstGeom prst="rect">
             <a:avLst/>
@@ -4760,7 +5166,7 @@
         <p:spPr>
           <a:xfrm>
             <a:off x="0" y="0"/>
-            <a:ext cx="9144000" cy="73152"/>
+            <a:ext cx="12188952" cy="73152"/>
           </a:xfrm>
           <a:prstGeom prst="rect">
             <a:avLst/>
@@ -4779,8 +5185,8 @@
         </p:nvSpPr>
         <p:spPr>
           <a:xfrm>
-            <a:off x="731520" y="365760"/>
-            <a:ext cx="7315200" cy="274320"/>
+            <a:off x="548640" y="320040"/>
+            <a:ext cx="7315200" cy="228600"/>
           </a:xfrm>
           <a:prstGeom prst="rect">
             <a:avLst/>
@@ -4796,7 +5202,7 @@
               <a:buNone/>
             </a:pPr>
             <a:r>
-              <a:rPr lang="en-US" sz="1000" b="1" dirty="0">
+              <a:rPr lang="en-US" sz="900" b="1" dirty="0">
                 <a:solidFill>
                   <a:srgbClr val="39FF14"/>
                 </a:solidFill>
@@ -4806,7 +5212,7 @@
               </a:rPr>
               <a:t>FOR GRAPHIC DESIGNERS</a:t>
             </a:r>
-            <a:endParaRPr lang="en-US" sz="1000" dirty="0"/>
+            <a:endParaRPr lang="en-US" sz="900" dirty="0"/>
           </a:p>
         </p:txBody>
       </p:sp>
@@ -4818,8 +5224,8 @@
         </p:nvSpPr>
         <p:spPr>
           <a:xfrm>
-            <a:off x="731520" y="640080"/>
-            <a:ext cx="10058400" cy="548640"/>
+            <a:off x="548640" y="548640"/>
+            <a:ext cx="11064240" cy="457200"/>
           </a:xfrm>
           <a:prstGeom prst="rect">
             <a:avLst/>
@@ -4835,7 +5241,7 @@
               <a:buNone/>
             </a:pPr>
             <a:r>
-              <a:rPr lang="en-US" sz="2400" b="1" dirty="0">
+              <a:rPr lang="en-US" sz="2200" b="1" dirty="0">
                 <a:solidFill>
                   <a:srgbClr val="FFFFFF"/>
                 </a:solidFill>
@@ -4845,20 +5251,40 @@
               </a:rPr>
               <a:t>Graphic Specs — Numpad &amp; Controls</a:t>
             </a:r>
-            <a:endParaRPr lang="en-US" sz="2400" dirty="0"/>
-          </a:p>
-        </p:txBody>
-      </p:sp>
-      <p:sp>
-        <p:nvSpPr>
-          <p:cNvPr id="6" name="Text 4"/>
-          <p:cNvSpPr/>
-          <p:nvPr/>
-        </p:nvSpPr>
-        <p:spPr>
-          <a:xfrm>
-            <a:off x="731520" y="6492240"/>
-            <a:ext cx="9144000" cy="274320"/>
+            <a:endParaRPr lang="en-US" sz="2200" dirty="0"/>
+          </a:p>
+        </p:txBody>
+      </p:sp>
+      <p:sp>
+        <p:nvSpPr>
+          <p:cNvPr id="6" name="Shape 4"/>
+          <p:cNvSpPr/>
+          <p:nvPr/>
+        </p:nvSpPr>
+        <p:spPr>
+          <a:xfrm>
+            <a:off x="548640" y="6217920"/>
+            <a:ext cx="11091672" cy="18288"/>
+          </a:xfrm>
+          <a:prstGeom prst="rect">
+            <a:avLst/>
+          </a:prstGeom>
+          <a:solidFill>
+            <a:srgbClr val="2A2A2A"/>
+          </a:solidFill>
+          <a:ln/>
+        </p:spPr>
+      </p:sp>
+      <p:sp>
+        <p:nvSpPr>
+          <p:cNvPr id="7" name="Text 5"/>
+          <p:cNvSpPr/>
+          <p:nvPr/>
+        </p:nvSpPr>
+        <p:spPr>
+          <a:xfrm>
+            <a:off x="548640" y="6309360"/>
+            <a:ext cx="11091672" cy="274320"/>
           </a:xfrm>
           <a:prstGeom prst="rect">
             <a:avLst/>
@@ -4882,7 +5308,7 @@
                 <a:ea typeface="Helvetica" pitchFamily="34" charset="-122"/>
                 <a:cs typeface="Helvetica" pitchFamily="34" charset="-120"/>
               </a:rPr>
-              <a:t>Infinix XPAD 30 Pro x Ruangguru  |  Clash of Unxpadted</a:t>
+              <a:t>Infinix XPAD 30 Pro × Ruangguru  |  Clash of Unxpadted Design System PRD</a:t>
             </a:r>
             <a:endParaRPr lang="en-US" sz="900" dirty="0"/>
           </a:p>
@@ -4890,24 +5316,24 @@
       </p:sp>
       <p:sp>
         <p:nvSpPr>
-          <p:cNvPr id="7" name="Shape 5"/>
-          <p:cNvSpPr/>
-          <p:nvPr/>
-        </p:nvSpPr>
-        <p:spPr>
-          <a:xfrm>
-            <a:off x="731520" y="1371600"/>
-            <a:ext cx="10515600" cy="4754880"/>
+          <p:cNvPr id="8" name="Shape 6"/>
+          <p:cNvSpPr/>
+          <p:nvPr/>
+        </p:nvSpPr>
+        <p:spPr>
+          <a:xfrm>
+            <a:off x="548640" y="1188720"/>
+            <a:ext cx="5394960" cy="4846320"/>
           </a:xfrm>
           <a:prstGeom prst="rect">
             <a:avLst/>
           </a:prstGeom>
           <a:solidFill>
-            <a:srgbClr val="1A1A1A"/>
+            <a:srgbClr val="181818"/>
           </a:solidFill>
           <a:ln w="12700">
             <a:solidFill>
-              <a:srgbClr val="282828"/>
+              <a:srgbClr val="2A2A2A"/>
             </a:solidFill>
             <a:prstDash val="solid"/>
           </a:ln>
@@ -4915,14 +5341,14 @@
       </p:sp>
       <p:sp>
         <p:nvSpPr>
-          <p:cNvPr id="8" name="Text 6"/>
-          <p:cNvSpPr/>
-          <p:nvPr/>
-        </p:nvSpPr>
-        <p:spPr>
-          <a:xfrm>
-            <a:off x="1005840" y="1645920"/>
-            <a:ext cx="9144000" cy="365760"/>
+          <p:cNvPr id="9" name="Text 7"/>
+          <p:cNvSpPr/>
+          <p:nvPr/>
+        </p:nvSpPr>
+        <p:spPr>
+          <a:xfrm>
+            <a:off x="822960" y="1371600"/>
+            <a:ext cx="4846320" cy="365760"/>
           </a:xfrm>
           <a:prstGeom prst="rect">
             <a:avLst/>
@@ -4938,7 +5364,7 @@
               <a:buNone/>
             </a:pPr>
             <a:r>
-              <a:rPr lang="en-US" sz="1600" b="1" dirty="0">
+              <a:rPr lang="en-US" sz="1500" b="1" dirty="0">
                 <a:solidFill>
                   <a:srgbClr val="39FF14"/>
                 </a:solidFill>
@@ -4946,22 +5372,22 @@
                 <a:ea typeface="Arial" pitchFamily="34" charset="-122"/>
                 <a:cs typeface="Arial" pitchFamily="34" charset="-120"/>
               </a:rPr>
-              <a:t>⌨️ On-Screen Numpad Specifications (Station X1)</a:t>
-            </a:r>
-            <a:endParaRPr lang="en-US" sz="1600" dirty="0"/>
-          </a:p>
-        </p:txBody>
-      </p:sp>
-      <p:sp>
-        <p:nvSpPr>
-          <p:cNvPr id="9" name="Text 7"/>
-          <p:cNvSpPr/>
-          <p:nvPr/>
-        </p:nvSpPr>
-        <p:spPr>
-          <a:xfrm>
-            <a:off x="1005840" y="2103120"/>
-            <a:ext cx="9875520" cy="3840480"/>
+              <a:t>⌨️ Vector SVG &amp; Key Dimensions</a:t>
+            </a:r>
+            <a:endParaRPr lang="en-US" sz="1500" dirty="0"/>
+          </a:p>
+        </p:txBody>
+      </p:sp>
+      <p:sp>
+        <p:nvSpPr>
+          <p:cNvPr id="10" name="Text 8"/>
+          <p:cNvSpPr/>
+          <p:nvPr/>
+        </p:nvSpPr>
+        <p:spPr>
+          <a:xfrm>
+            <a:off x="822960" y="1828800"/>
+            <a:ext cx="4846320" cy="4023360"/>
           </a:xfrm>
           <a:prstGeom prst="rect">
             <a:avLst/>
@@ -4975,220 +5401,404 @@
           <a:p>
             <a:pPr indent="0" marL="0">
               <a:lnSpc>
-                <a:spcPts val="2000"/>
-              </a:lnSpc>
-              <a:buNone/>
-            </a:pPr>
-            <a:r>
-              <a:rPr lang="en-US" sz="1200" dirty="0">
-                <a:solidFill>
-                  <a:srgbClr val="FFFFFF"/>
-                </a:solidFill>
-                <a:latin typeface="Helvetica" pitchFamily="34" charset="0"/>
-                <a:ea typeface="Helvetica" pitchFamily="34" charset="-122"/>
-                <a:cs typeface="Helvetica" pitchFamily="34" charset="-120"/>
-              </a:rPr>
-              <a:t>1. Vector SVG Standard:</a:t>
-            </a:r>
-            <a:endParaRPr lang="en-US" sz="1200" dirty="0"/>
-          </a:p>
-          <a:p>
-            <a:pPr indent="0" marL="0">
-              <a:lnSpc>
-                <a:spcPts val="2000"/>
-              </a:lnSpc>
-              <a:buNone/>
-            </a:pPr>
-            <a:r>
-              <a:rPr lang="en-US" sz="1200" dirty="0">
-                <a:solidFill>
-                  <a:srgbClr val="FFFFFF"/>
-                </a:solidFill>
-                <a:latin typeface="Helvetica" pitchFamily="34" charset="0"/>
-                <a:ea typeface="Helvetica" pitchFamily="34" charset="-122"/>
-                <a:cs typeface="Helvetica" pitchFamily="34" charset="-120"/>
-              </a:rPr>
-              <a:t>   • Use stroke-width: 2.2px for icons.</a:t>
-            </a:r>
-            <a:endParaRPr lang="en-US" sz="1200" dirty="0"/>
-          </a:p>
-          <a:p>
-            <a:pPr indent="0" marL="0">
-              <a:lnSpc>
-                <a:spcPts val="2000"/>
-              </a:lnSpc>
-              <a:buNone/>
-            </a:pPr>
-            <a:r>
-              <a:rPr lang="en-US" sz="1200" dirty="0">
-                <a:solidFill>
-                  <a:srgbClr val="FFFFFF"/>
-                </a:solidFill>
-                <a:latin typeface="Helvetica" pitchFamily="34" charset="0"/>
-                <a:ea typeface="Helvetica" pitchFamily="34" charset="-122"/>
-                <a:cs typeface="Helvetica" pitchFamily="34" charset="-120"/>
-              </a:rPr>
-              <a:t>   • Icons: Clear (Trash/Cross), Backspace (Eraser/Left Arrow), Enter (Checkmark), Skip (Fast-Forward Chevron).</a:t>
-            </a:r>
-            <a:endParaRPr lang="en-US" sz="1200" dirty="0"/>
-          </a:p>
-          <a:p>
-            <a:pPr indent="0" marL="0">
-              <a:lnSpc>
-                <a:spcPts val="2000"/>
-              </a:lnSpc>
-              <a:buNone/>
-            </a:pPr>
-            <a:endParaRPr lang="en-US" sz="1200" dirty="0"/>
-          </a:p>
-          <a:p>
-            <a:pPr indent="0" marL="0">
-              <a:lnSpc>
-                <a:spcPts val="2000"/>
-              </a:lnSpc>
-              <a:buNone/>
-            </a:pPr>
-            <a:r>
-              <a:rPr lang="en-US" sz="1200" dirty="0">
-                <a:solidFill>
-                  <a:srgbClr val="FFFFFF"/>
-                </a:solidFill>
-                <a:latin typeface="Helvetica" pitchFamily="34" charset="0"/>
-                <a:ea typeface="Helvetica" pitchFamily="34" charset="-122"/>
-                <a:cs typeface="Helvetica" pitchFamily="34" charset="-120"/>
-              </a:rPr>
-              <a:t>2. Key Button Dimensions:</a:t>
-            </a:r>
-            <a:endParaRPr lang="en-US" sz="1200" dirty="0"/>
-          </a:p>
-          <a:p>
-            <a:pPr indent="0" marL="0">
-              <a:lnSpc>
-                <a:spcPts val="2000"/>
-              </a:lnSpc>
-              <a:buNone/>
-            </a:pPr>
-            <a:r>
-              <a:rPr lang="en-US" sz="1200" dirty="0">
-                <a:solidFill>
-                  <a:srgbClr val="FFFFFF"/>
-                </a:solidFill>
-                <a:latin typeface="Helvetica" pitchFamily="34" charset="0"/>
-                <a:ea typeface="Helvetica" pitchFamily="34" charset="-122"/>
-                <a:cs typeface="Helvetica" pitchFamily="34" charset="-120"/>
-              </a:rPr>
-              <a:t>   • Base Button: Height 56px, Grid Gap 10px.</a:t>
-            </a:r>
-            <a:endParaRPr lang="en-US" sz="1200" dirty="0"/>
-          </a:p>
-          <a:p>
-            <a:pPr indent="0" marL="0">
-              <a:lnSpc>
-                <a:spcPts val="2000"/>
-              </a:lnSpc>
-              <a:buNone/>
-            </a:pPr>
-            <a:r>
-              <a:rPr lang="en-US" sz="1200" dirty="0">
-                <a:solidFill>
-                  <a:srgbClr val="FFFFFF"/>
-                </a:solidFill>
-                <a:latin typeface="Helvetica" pitchFamily="34" charset="0"/>
-                <a:ea typeface="Helvetica" pitchFamily="34" charset="-122"/>
-                <a:cs typeface="Helvetica" pitchFamily="34" charset="-120"/>
-              </a:rPr>
-              <a:t>   • Corner Radius: 8px bevel / rounded corners.</a:t>
-            </a:r>
-            <a:endParaRPr lang="en-US" sz="1200" dirty="0"/>
-          </a:p>
-          <a:p>
-            <a:pPr indent="0" marL="0">
-              <a:lnSpc>
-                <a:spcPts val="2000"/>
-              </a:lnSpc>
-              <a:buNone/>
-            </a:pPr>
-            <a:endParaRPr lang="en-US" sz="1200" dirty="0"/>
-          </a:p>
-          <a:p>
-            <a:pPr indent="0" marL="0">
-              <a:lnSpc>
-                <a:spcPts val="2000"/>
-              </a:lnSpc>
-              <a:buNone/>
-            </a:pPr>
-            <a:r>
-              <a:rPr lang="en-US" sz="1200" dirty="0">
-                <a:solidFill>
-                  <a:srgbClr val="FFFFFF"/>
-                </a:solidFill>
-                <a:latin typeface="Helvetica" pitchFamily="34" charset="0"/>
-                <a:ea typeface="Helvetica" pitchFamily="34" charset="-122"/>
-                <a:cs typeface="Helvetica" pitchFamily="34" charset="-120"/>
-              </a:rPr>
-              <a:t>3. Touch Interactive States:</a:t>
-            </a:r>
-            <a:endParaRPr lang="en-US" sz="1200" dirty="0"/>
-          </a:p>
-          <a:p>
-            <a:pPr indent="0" marL="0">
-              <a:lnSpc>
-                <a:spcPts val="2000"/>
-              </a:lnSpc>
-              <a:buNone/>
-            </a:pPr>
-            <a:r>
-              <a:rPr lang="en-US" sz="1200" dirty="0">
-                <a:solidFill>
-                  <a:srgbClr val="FFFFFF"/>
-                </a:solidFill>
-                <a:latin typeface="Helvetica" pitchFamily="34" charset="0"/>
-                <a:ea typeface="Helvetica" pitchFamily="34" charset="-122"/>
-                <a:cs typeface="Helvetica" pitchFamily="34" charset="-120"/>
-              </a:rPr>
-              <a:t>   • Idle State: Fill #141414, Border #262626, Shadow 0 4px 12px rgba(0,0,0,0.5).</a:t>
-            </a:r>
-            <a:endParaRPr lang="en-US" sz="1200" dirty="0"/>
-          </a:p>
-          <a:p>
-            <a:pPr indent="0" marL="0">
-              <a:lnSpc>
-                <a:spcPts val="2000"/>
-              </a:lnSpc>
-              <a:buNone/>
-            </a:pPr>
-            <a:r>
-              <a:rPr lang="en-US" sz="1200" dirty="0">
-                <a:solidFill>
-                  <a:srgbClr val="FFFFFF"/>
-                </a:solidFill>
-                <a:latin typeface="Helvetica" pitchFamily="34" charset="0"/>
-                <a:ea typeface="Helvetica" pitchFamily="34" charset="-122"/>
-                <a:cs typeface="Helvetica" pitchFamily="34" charset="-120"/>
-              </a:rPr>
-              <a:t>   • Active/Pressed State: transform: scale(0.96), Border #39FF14, Box-Shadow 0 0 15px rgba(57,255,20,0.4).</a:t>
-            </a:r>
-            <a:endParaRPr lang="en-US" sz="1200" dirty="0"/>
-          </a:p>
-          <a:p>
-            <a:pPr indent="0" marL="0">
-              <a:lnSpc>
-                <a:spcPts val="2000"/>
-              </a:lnSpc>
-              <a:buNone/>
-            </a:pPr>
-            <a:r>
-              <a:rPr lang="en-US" sz="1200" dirty="0">
-                <a:solidFill>
-                  <a:srgbClr val="FFFFFF"/>
-                </a:solidFill>
-                <a:latin typeface="Helvetica" pitchFamily="34" charset="0"/>
-                <a:ea typeface="Helvetica" pitchFamily="34" charset="-122"/>
-                <a:cs typeface="Helvetica" pitchFamily="34" charset="-120"/>
-              </a:rPr>
-              <a:t>   • Skip Button: High contrast warning yellow border (#FFCC00) with solid black text.</a:t>
-            </a:r>
-            <a:endParaRPr lang="en-US" sz="1200" dirty="0"/>
+                <a:spcPts val="1600"/>
+              </a:lnSpc>
+              <a:buNone/>
+            </a:pPr>
+            <a:r>
+              <a:rPr lang="en-US" sz="1050" dirty="0">
+                <a:solidFill>
+                  <a:srgbClr val="FFFFFF"/>
+                </a:solidFill>
+                <a:latin typeface="Helvetica" pitchFamily="34" charset="0"/>
+                <a:ea typeface="Helvetica" pitchFamily="34" charset="-122"/>
+                <a:cs typeface="Helvetica" pitchFamily="34" charset="-120"/>
+              </a:rPr>
+              <a:t>• Vector SVG Standard:</a:t>
+            </a:r>
+            <a:endParaRPr lang="en-US" sz="1050" dirty="0"/>
+          </a:p>
+          <a:p>
+            <a:pPr indent="0" marL="0">
+              <a:lnSpc>
+                <a:spcPts val="1600"/>
+              </a:lnSpc>
+              <a:buNone/>
+            </a:pPr>
+            <a:r>
+              <a:rPr lang="en-US" sz="1050" dirty="0">
+                <a:solidFill>
+                  <a:srgbClr val="FFFFFF"/>
+                </a:solidFill>
+                <a:latin typeface="Helvetica" pitchFamily="34" charset="0"/>
+                <a:ea typeface="Helvetica" pitchFamily="34" charset="-122"/>
+                <a:cs typeface="Helvetica" pitchFamily="34" charset="-120"/>
+              </a:rPr>
+              <a:t>  Use stroke-width: 2.2px for icons.</a:t>
+            </a:r>
+            <a:endParaRPr lang="en-US" sz="1050" dirty="0"/>
+          </a:p>
+          <a:p>
+            <a:pPr indent="0" marL="0">
+              <a:lnSpc>
+                <a:spcPts val="1600"/>
+              </a:lnSpc>
+              <a:buNone/>
+            </a:pPr>
+            <a:r>
+              <a:rPr lang="en-US" sz="1050" dirty="0">
+                <a:solidFill>
+                  <a:srgbClr val="FFFFFF"/>
+                </a:solidFill>
+                <a:latin typeface="Helvetica" pitchFamily="34" charset="0"/>
+                <a:ea typeface="Helvetica" pitchFamily="34" charset="-122"/>
+                <a:cs typeface="Helvetica" pitchFamily="34" charset="-120"/>
+              </a:rPr>
+              <a:t>  Icons: Clear (Trash), Backspace (Eraser), Enter (Checkmark), Skip (Fast-Forward Chevron).</a:t>
+            </a:r>
+            <a:endParaRPr lang="en-US" sz="1050" dirty="0"/>
+          </a:p>
+          <a:p>
+            <a:pPr indent="0" marL="0">
+              <a:lnSpc>
+                <a:spcPts val="1600"/>
+              </a:lnSpc>
+              <a:buNone/>
+            </a:pPr>
+            <a:endParaRPr lang="en-US" sz="1050" dirty="0"/>
+          </a:p>
+          <a:p>
+            <a:pPr indent="0" marL="0">
+              <a:lnSpc>
+                <a:spcPts val="1600"/>
+              </a:lnSpc>
+              <a:buNone/>
+            </a:pPr>
+            <a:r>
+              <a:rPr lang="en-US" sz="1050" dirty="0">
+                <a:solidFill>
+                  <a:srgbClr val="FFFFFF"/>
+                </a:solidFill>
+                <a:latin typeface="Helvetica" pitchFamily="34" charset="0"/>
+                <a:ea typeface="Helvetica" pitchFamily="34" charset="-122"/>
+                <a:cs typeface="Helvetica" pitchFamily="34" charset="-120"/>
+              </a:rPr>
+              <a:t>• Key Button Dimensions:</a:t>
+            </a:r>
+            <a:endParaRPr lang="en-US" sz="1050" dirty="0"/>
+          </a:p>
+          <a:p>
+            <a:pPr indent="0" marL="0">
+              <a:lnSpc>
+                <a:spcPts val="1600"/>
+              </a:lnSpc>
+              <a:buNone/>
+            </a:pPr>
+            <a:r>
+              <a:rPr lang="en-US" sz="1050" dirty="0">
+                <a:solidFill>
+                  <a:srgbClr val="FFFFFF"/>
+                </a:solidFill>
+                <a:latin typeface="Helvetica" pitchFamily="34" charset="0"/>
+                <a:ea typeface="Helvetica" pitchFamily="34" charset="-122"/>
+                <a:cs typeface="Helvetica" pitchFamily="34" charset="-120"/>
+              </a:rPr>
+              <a:t>  Base Button Height 56px, Grid Gap 10px.</a:t>
+            </a:r>
+            <a:endParaRPr lang="en-US" sz="1050" dirty="0"/>
+          </a:p>
+          <a:p>
+            <a:pPr indent="0" marL="0">
+              <a:lnSpc>
+                <a:spcPts val="1600"/>
+              </a:lnSpc>
+              <a:buNone/>
+            </a:pPr>
+            <a:r>
+              <a:rPr lang="en-US" sz="1050" dirty="0">
+                <a:solidFill>
+                  <a:srgbClr val="FFFFFF"/>
+                </a:solidFill>
+                <a:latin typeface="Helvetica" pitchFamily="34" charset="0"/>
+                <a:ea typeface="Helvetica" pitchFamily="34" charset="-122"/>
+                <a:cs typeface="Helvetica" pitchFamily="34" charset="-120"/>
+              </a:rPr>
+              <a:t>  Corner Radius: 8px bevel / rounded corners.</a:t>
+            </a:r>
+            <a:endParaRPr lang="en-US" sz="1050" dirty="0"/>
+          </a:p>
+          <a:p>
+            <a:pPr indent="0" marL="0">
+              <a:lnSpc>
+                <a:spcPts val="1600"/>
+              </a:lnSpc>
+              <a:buNone/>
+            </a:pPr>
+            <a:endParaRPr lang="en-US" sz="1050" dirty="0"/>
+          </a:p>
+          <a:p>
+            <a:pPr indent="0" marL="0">
+              <a:lnSpc>
+                <a:spcPts val="1600"/>
+              </a:lnSpc>
+              <a:buNone/>
+            </a:pPr>
+            <a:r>
+              <a:rPr lang="en-US" sz="1050" dirty="0">
+                <a:solidFill>
+                  <a:srgbClr val="FFFFFF"/>
+                </a:solidFill>
+                <a:latin typeface="Helvetica" pitchFamily="34" charset="0"/>
+                <a:ea typeface="Helvetica" pitchFamily="34" charset="-122"/>
+                <a:cs typeface="Helvetica" pitchFamily="34" charset="-120"/>
+              </a:rPr>
+              <a:t>• Icon Format:</a:t>
+            </a:r>
+            <a:endParaRPr lang="en-US" sz="1050" dirty="0"/>
+          </a:p>
+          <a:p>
+            <a:pPr indent="0" marL="0">
+              <a:lnSpc>
+                <a:spcPts val="1600"/>
+              </a:lnSpc>
+              <a:buNone/>
+            </a:pPr>
+            <a:r>
+              <a:rPr lang="en-US" sz="1050" dirty="0">
+                <a:solidFill>
+                  <a:srgbClr val="FFFFFF"/>
+                </a:solidFill>
+                <a:latin typeface="Helvetica" pitchFamily="34" charset="0"/>
+                <a:ea typeface="Helvetica" pitchFamily="34" charset="-122"/>
+                <a:cs typeface="Helvetica" pitchFamily="34" charset="-120"/>
+              </a:rPr>
+              <a:t>  Inline SVG for zero load time and clean resolution scaling.</a:t>
+            </a:r>
+            <a:endParaRPr lang="en-US" sz="1050" dirty="0"/>
+          </a:p>
+        </p:txBody>
+      </p:sp>
+      <p:sp>
+        <p:nvSpPr>
+          <p:cNvPr id="11" name="Shape 9"/>
+          <p:cNvSpPr/>
+          <p:nvPr/>
+        </p:nvSpPr>
+        <p:spPr>
+          <a:xfrm>
+            <a:off x="6217920" y="1188720"/>
+            <a:ext cx="5394960" cy="4846320"/>
+          </a:xfrm>
+          <a:prstGeom prst="rect">
+            <a:avLst/>
+          </a:prstGeom>
+          <a:solidFill>
+            <a:srgbClr val="181818"/>
+          </a:solidFill>
+          <a:ln w="12700">
+            <a:solidFill>
+              <a:srgbClr val="2A2A2A"/>
+            </a:solidFill>
+            <a:prstDash val="solid"/>
+          </a:ln>
+        </p:spPr>
+      </p:sp>
+      <p:sp>
+        <p:nvSpPr>
+          <p:cNvPr id="12" name="Text 10"/>
+          <p:cNvSpPr/>
+          <p:nvPr/>
+        </p:nvSpPr>
+        <p:spPr>
+          <a:xfrm>
+            <a:off x="6492240" y="1371600"/>
+            <a:ext cx="4846320" cy="365760"/>
+          </a:xfrm>
+          <a:prstGeom prst="rect">
+            <a:avLst/>
+          </a:prstGeom>
+          <a:noFill/>
+          <a:ln/>
+        </p:spPr>
+        <p:txBody>
+          <a:bodyPr wrap="square" rtlCol="0" anchor="ctr"/>
+          <a:lstStyle/>
+          <a:p>
+            <a:pPr indent="0" marL="0">
+              <a:buNone/>
+            </a:pPr>
+            <a:r>
+              <a:rPr lang="en-US" sz="1500" b="1" dirty="0">
+                <a:solidFill>
+                  <a:srgbClr val="00E5FF"/>
+                </a:solidFill>
+                <a:latin typeface="Arial" pitchFamily="34" charset="0"/>
+                <a:ea typeface="Arial" pitchFamily="34" charset="-122"/>
+                <a:cs typeface="Arial" pitchFamily="34" charset="-120"/>
+              </a:rPr>
+              <a:t>✨ Touch Interactive States &amp; Glow</a:t>
+            </a:r>
+            <a:endParaRPr lang="en-US" sz="1500" dirty="0"/>
+          </a:p>
+        </p:txBody>
+      </p:sp>
+      <p:sp>
+        <p:nvSpPr>
+          <p:cNvPr id="13" name="Text 11"/>
+          <p:cNvSpPr/>
+          <p:nvPr/>
+        </p:nvSpPr>
+        <p:spPr>
+          <a:xfrm>
+            <a:off x="6492240" y="1828800"/>
+            <a:ext cx="4846320" cy="4023360"/>
+          </a:xfrm>
+          <a:prstGeom prst="rect">
+            <a:avLst/>
+          </a:prstGeom>
+          <a:noFill/>
+          <a:ln/>
+        </p:spPr>
+        <p:txBody>
+          <a:bodyPr wrap="square" rtlCol="0" anchor="ctr"/>
+          <a:lstStyle/>
+          <a:p>
+            <a:pPr indent="0" marL="0">
+              <a:lnSpc>
+                <a:spcPts val="1600"/>
+              </a:lnSpc>
+              <a:buNone/>
+            </a:pPr>
+            <a:r>
+              <a:rPr lang="en-US" sz="1050" dirty="0">
+                <a:solidFill>
+                  <a:srgbClr val="FFFFFF"/>
+                </a:solidFill>
+                <a:latin typeface="Helvetica" pitchFamily="34" charset="0"/>
+                <a:ea typeface="Helvetica" pitchFamily="34" charset="-122"/>
+                <a:cs typeface="Helvetica" pitchFamily="34" charset="-120"/>
+              </a:rPr>
+              <a:t>• Idle State:</a:t>
+            </a:r>
+            <a:endParaRPr lang="en-US" sz="1050" dirty="0"/>
+          </a:p>
+          <a:p>
+            <a:pPr indent="0" marL="0">
+              <a:lnSpc>
+                <a:spcPts val="1600"/>
+              </a:lnSpc>
+              <a:buNone/>
+            </a:pPr>
+            <a:r>
+              <a:rPr lang="en-US" sz="1050" dirty="0">
+                <a:solidFill>
+                  <a:srgbClr val="FFFFFF"/>
+                </a:solidFill>
+                <a:latin typeface="Helvetica" pitchFamily="34" charset="0"/>
+                <a:ea typeface="Helvetica" pitchFamily="34" charset="-122"/>
+                <a:cs typeface="Helvetica" pitchFamily="34" charset="-120"/>
+              </a:rPr>
+              <a:t>  Fill #141414, Border #262626, Shadow 0 4px 12px rgba(0,0,0,0.5).</a:t>
+            </a:r>
+            <a:endParaRPr lang="en-US" sz="1050" dirty="0"/>
+          </a:p>
+          <a:p>
+            <a:pPr indent="0" marL="0">
+              <a:lnSpc>
+                <a:spcPts val="1600"/>
+              </a:lnSpc>
+              <a:buNone/>
+            </a:pPr>
+            <a:endParaRPr lang="en-US" sz="1050" dirty="0"/>
+          </a:p>
+          <a:p>
+            <a:pPr indent="0" marL="0">
+              <a:lnSpc>
+                <a:spcPts val="1600"/>
+              </a:lnSpc>
+              <a:buNone/>
+            </a:pPr>
+            <a:r>
+              <a:rPr lang="en-US" sz="1050" dirty="0">
+                <a:solidFill>
+                  <a:srgbClr val="FFFFFF"/>
+                </a:solidFill>
+                <a:latin typeface="Helvetica" pitchFamily="34" charset="0"/>
+                <a:ea typeface="Helvetica" pitchFamily="34" charset="-122"/>
+                <a:cs typeface="Helvetica" pitchFamily="34" charset="-120"/>
+              </a:rPr>
+              <a:t>• Active / Pressed State:</a:t>
+            </a:r>
+            <a:endParaRPr lang="en-US" sz="1050" dirty="0"/>
+          </a:p>
+          <a:p>
+            <a:pPr indent="0" marL="0">
+              <a:lnSpc>
+                <a:spcPts val="1600"/>
+              </a:lnSpc>
+              <a:buNone/>
+            </a:pPr>
+            <a:r>
+              <a:rPr lang="en-US" sz="1050" dirty="0">
+                <a:solidFill>
+                  <a:srgbClr val="FFFFFF"/>
+                </a:solidFill>
+                <a:latin typeface="Helvetica" pitchFamily="34" charset="0"/>
+                <a:ea typeface="Helvetica" pitchFamily="34" charset="-122"/>
+                <a:cs typeface="Helvetica" pitchFamily="34" charset="-120"/>
+              </a:rPr>
+              <a:t>  transform: scale(0.96), Border #39FF14, Box-Shadow 0 0 15px rgba(57,255,20,0.4).</a:t>
+            </a:r>
+            <a:endParaRPr lang="en-US" sz="1050" dirty="0"/>
+          </a:p>
+          <a:p>
+            <a:pPr indent="0" marL="0">
+              <a:lnSpc>
+                <a:spcPts val="1600"/>
+              </a:lnSpc>
+              <a:buNone/>
+            </a:pPr>
+            <a:endParaRPr lang="en-US" sz="1050" dirty="0"/>
+          </a:p>
+          <a:p>
+            <a:pPr indent="0" marL="0">
+              <a:lnSpc>
+                <a:spcPts val="1600"/>
+              </a:lnSpc>
+              <a:buNone/>
+            </a:pPr>
+            <a:r>
+              <a:rPr lang="en-US" sz="1050" dirty="0">
+                <a:solidFill>
+                  <a:srgbClr val="FFFFFF"/>
+                </a:solidFill>
+                <a:latin typeface="Helvetica" pitchFamily="34" charset="0"/>
+                <a:ea typeface="Helvetica" pitchFamily="34" charset="-122"/>
+                <a:cs typeface="Helvetica" pitchFamily="34" charset="-120"/>
+              </a:rPr>
+              <a:t>• Skip Button:</a:t>
+            </a:r>
+            <a:endParaRPr lang="en-US" sz="1050" dirty="0"/>
+          </a:p>
+          <a:p>
+            <a:pPr indent="0" marL="0">
+              <a:lnSpc>
+                <a:spcPts val="1600"/>
+              </a:lnSpc>
+              <a:buNone/>
+            </a:pPr>
+            <a:r>
+              <a:rPr lang="en-US" sz="1050" dirty="0">
+                <a:solidFill>
+                  <a:srgbClr val="FFFFFF"/>
+                </a:solidFill>
+                <a:latin typeface="Helvetica" pitchFamily="34" charset="0"/>
+                <a:ea typeface="Helvetica" pitchFamily="34" charset="-122"/>
+                <a:cs typeface="Helvetica" pitchFamily="34" charset="-120"/>
+              </a:rPr>
+              <a:t>  High contrast warning yellow border (#FFCC00) with solid black text.</a:t>
+            </a:r>
+            <a:endParaRPr lang="en-US" sz="1050" dirty="0"/>
           </a:p>
         </p:txBody>
       </p:sp>
@@ -5226,7 +5836,7 @@
         <p:spPr>
           <a:xfrm>
             <a:off x="0" y="0"/>
-            <a:ext cx="9144000" cy="5143500"/>
+            <a:ext cx="12188952" cy="6858000"/>
           </a:xfrm>
           <a:prstGeom prst="rect">
             <a:avLst/>
@@ -5246,7 +5856,7 @@
         <p:spPr>
           <a:xfrm>
             <a:off x="0" y="0"/>
-            <a:ext cx="9144000" cy="73152"/>
+            <a:ext cx="12188952" cy="73152"/>
           </a:xfrm>
           <a:prstGeom prst="rect">
             <a:avLst/>
@@ -5265,8 +5875,8 @@
         </p:nvSpPr>
         <p:spPr>
           <a:xfrm>
-            <a:off x="731520" y="365760"/>
-            <a:ext cx="7315200" cy="274320"/>
+            <a:off x="548640" y="320040"/>
+            <a:ext cx="7315200" cy="228600"/>
           </a:xfrm>
           <a:prstGeom prst="rect">
             <a:avLst/>
@@ -5282,7 +5892,7 @@
               <a:buNone/>
             </a:pPr>
             <a:r>
-              <a:rPr lang="en-US" sz="1000" b="1" dirty="0">
+              <a:rPr lang="en-US" sz="900" b="1" dirty="0">
                 <a:solidFill>
                   <a:srgbClr val="39FF14"/>
                 </a:solidFill>
@@ -5292,7 +5902,7 @@
               </a:rPr>
               <a:t>FOR GRAPHIC DESIGNERS</a:t>
             </a:r>
-            <a:endParaRPr lang="en-US" sz="1000" dirty="0"/>
+            <a:endParaRPr lang="en-US" sz="900" dirty="0"/>
           </a:p>
         </p:txBody>
       </p:sp>
@@ -5304,8 +5914,8 @@
         </p:nvSpPr>
         <p:spPr>
           <a:xfrm>
-            <a:off x="731520" y="640080"/>
-            <a:ext cx="10058400" cy="548640"/>
+            <a:off x="548640" y="548640"/>
+            <a:ext cx="11064240" cy="457200"/>
           </a:xfrm>
           <a:prstGeom prst="rect">
             <a:avLst/>
@@ -5321,7 +5931,7 @@
               <a:buNone/>
             </a:pPr>
             <a:r>
-              <a:rPr lang="en-US" sz="2400" b="1" dirty="0">
+              <a:rPr lang="en-US" sz="2200" b="1" dirty="0">
                 <a:solidFill>
                   <a:srgbClr val="FFFFFF"/>
                 </a:solidFill>
@@ -5331,20 +5941,40 @@
               </a:rPr>
               <a:t>Graphic Specs — Arcade Buzzer &amp; Choice Cards</a:t>
             </a:r>
-            <a:endParaRPr lang="en-US" sz="2400" dirty="0"/>
-          </a:p>
-        </p:txBody>
-      </p:sp>
-      <p:sp>
-        <p:nvSpPr>
-          <p:cNvPr id="6" name="Text 4"/>
-          <p:cNvSpPr/>
-          <p:nvPr/>
-        </p:nvSpPr>
-        <p:spPr>
-          <a:xfrm>
-            <a:off x="731520" y="6492240"/>
-            <a:ext cx="9144000" cy="274320"/>
+            <a:endParaRPr lang="en-US" sz="2200" dirty="0"/>
+          </a:p>
+        </p:txBody>
+      </p:sp>
+      <p:sp>
+        <p:nvSpPr>
+          <p:cNvPr id="6" name="Shape 4"/>
+          <p:cNvSpPr/>
+          <p:nvPr/>
+        </p:nvSpPr>
+        <p:spPr>
+          <a:xfrm>
+            <a:off x="548640" y="6217920"/>
+            <a:ext cx="11091672" cy="18288"/>
+          </a:xfrm>
+          <a:prstGeom prst="rect">
+            <a:avLst/>
+          </a:prstGeom>
+          <a:solidFill>
+            <a:srgbClr val="2A2A2A"/>
+          </a:solidFill>
+          <a:ln/>
+        </p:spPr>
+      </p:sp>
+      <p:sp>
+        <p:nvSpPr>
+          <p:cNvPr id="7" name="Text 5"/>
+          <p:cNvSpPr/>
+          <p:nvPr/>
+        </p:nvSpPr>
+        <p:spPr>
+          <a:xfrm>
+            <a:off x="548640" y="6309360"/>
+            <a:ext cx="11091672" cy="274320"/>
           </a:xfrm>
           <a:prstGeom prst="rect">
             <a:avLst/>
@@ -5368,7 +5998,7 @@
                 <a:ea typeface="Helvetica" pitchFamily="34" charset="-122"/>
                 <a:cs typeface="Helvetica" pitchFamily="34" charset="-120"/>
               </a:rPr>
-              <a:t>Infinix XPAD 30 Pro x Ruangguru  |  Clash of Unxpadted</a:t>
+              <a:t>Infinix XPAD 30 Pro × Ruangguru  |  Clash of Unxpadted Design System PRD</a:t>
             </a:r>
             <a:endParaRPr lang="en-US" sz="900" dirty="0"/>
           </a:p>
@@ -5376,24 +6006,24 @@
       </p:sp>
       <p:sp>
         <p:nvSpPr>
-          <p:cNvPr id="7" name="Shape 5"/>
-          <p:cNvSpPr/>
-          <p:nvPr/>
-        </p:nvSpPr>
-        <p:spPr>
-          <a:xfrm>
-            <a:off x="731520" y="1371600"/>
-            <a:ext cx="5120640" cy="4754880"/>
+          <p:cNvPr id="8" name="Shape 6"/>
+          <p:cNvSpPr/>
+          <p:nvPr/>
+        </p:nvSpPr>
+        <p:spPr>
+          <a:xfrm>
+            <a:off x="548640" y="1188720"/>
+            <a:ext cx="5394960" cy="4846320"/>
           </a:xfrm>
           <a:prstGeom prst="rect">
             <a:avLst/>
           </a:prstGeom>
           <a:solidFill>
-            <a:srgbClr val="1A1A1A"/>
+            <a:srgbClr val="181818"/>
           </a:solidFill>
           <a:ln w="12700">
             <a:solidFill>
-              <a:srgbClr val="282828"/>
+              <a:srgbClr val="2A2A2A"/>
             </a:solidFill>
             <a:prstDash val="solid"/>
           </a:ln>
@@ -5401,14 +6031,14 @@
       </p:sp>
       <p:sp>
         <p:nvSpPr>
-          <p:cNvPr id="8" name="Text 6"/>
-          <p:cNvSpPr/>
-          <p:nvPr/>
-        </p:nvSpPr>
-        <p:spPr>
-          <a:xfrm>
-            <a:off x="1005840" y="1645920"/>
-            <a:ext cx="4572000" cy="365760"/>
+          <p:cNvPr id="9" name="Text 7"/>
+          <p:cNvSpPr/>
+          <p:nvPr/>
+        </p:nvSpPr>
+        <p:spPr>
+          <a:xfrm>
+            <a:off x="822960" y="1371600"/>
+            <a:ext cx="4846320" cy="365760"/>
           </a:xfrm>
           <a:prstGeom prst="rect">
             <a:avLst/>
@@ -5424,7 +6054,7 @@
               <a:buNone/>
             </a:pPr>
             <a:r>
-              <a:rPr lang="en-US" sz="1600" b="1" dirty="0">
+              <a:rPr lang="en-US" sz="1500" b="1" dirty="0">
                 <a:solidFill>
                   <a:srgbClr val="00E5FF"/>
                 </a:solidFill>
@@ -5434,20 +6064,20 @@
               </a:rPr>
               <a:t>🔴 Esports Arcade Buzzer Spec</a:t>
             </a:r>
-            <a:endParaRPr lang="en-US" sz="1600" dirty="0"/>
-          </a:p>
-        </p:txBody>
-      </p:sp>
-      <p:sp>
-        <p:nvSpPr>
-          <p:cNvPr id="9" name="Text 7"/>
-          <p:cNvSpPr/>
-          <p:nvPr/>
-        </p:nvSpPr>
-        <p:spPr>
-          <a:xfrm>
-            <a:off x="1005840" y="2194560"/>
-            <a:ext cx="4572000" cy="3657600"/>
+            <a:endParaRPr lang="en-US" sz="1500" dirty="0"/>
+          </a:p>
+        </p:txBody>
+      </p:sp>
+      <p:sp>
+        <p:nvSpPr>
+          <p:cNvPr id="10" name="Text 8"/>
+          <p:cNvSpPr/>
+          <p:nvPr/>
+        </p:nvSpPr>
+        <p:spPr>
+          <a:xfrm>
+            <a:off x="822960" y="1828800"/>
+            <a:ext cx="4846320" cy="4023360"/>
           </a:xfrm>
           <a:prstGeom prst="rect">
             <a:avLst/>
@@ -5461,12 +6091,12 @@
           <a:p>
             <a:pPr indent="0" marL="0">
               <a:lnSpc>
-                <a:spcPts val="2000"/>
-              </a:lnSpc>
-              <a:buNone/>
-            </a:pPr>
-            <a:r>
-              <a:rPr lang="en-US" sz="1200" dirty="0">
+                <a:spcPts val="1600"/>
+              </a:lnSpc>
+              <a:buNone/>
+            </a:pPr>
+            <a:r>
+              <a:rPr lang="en-US" sz="1050" dirty="0">
                 <a:solidFill>
                   <a:srgbClr val="FFFFFF"/>
                 </a:solidFill>
@@ -5476,17 +6106,17 @@
               </a:rPr>
               <a:t>• Circular Shape: 220px x 220px diameter.</a:t>
             </a:r>
-            <a:endParaRPr lang="en-US" sz="1200" dirty="0"/>
-          </a:p>
-          <a:p>
-            <a:pPr indent="0" marL="0">
-              <a:lnSpc>
-                <a:spcPts val="2000"/>
-              </a:lnSpc>
-              <a:buNone/>
-            </a:pPr>
-            <a:r>
-              <a:rPr lang="en-US" sz="1200" dirty="0">
+            <a:endParaRPr lang="en-US" sz="1050" dirty="0"/>
+          </a:p>
+          <a:p>
+            <a:pPr indent="0" marL="0">
+              <a:lnSpc>
+                <a:spcPts val="1600"/>
+              </a:lnSpc>
+              <a:buNone/>
+            </a:pPr>
+            <a:r>
+              <a:rPr lang="en-US" sz="1050" dirty="0">
                 <a:solidFill>
                   <a:srgbClr val="FFFFFF"/>
                 </a:solidFill>
@@ -5496,17 +6126,17 @@
               </a:rPr>
               <a:t>• Radial Gradient Fill: Center #00E5FF to Edge #007AFF.</a:t>
             </a:r>
-            <a:endParaRPr lang="en-US" sz="1200" dirty="0"/>
-          </a:p>
-          <a:p>
-            <a:pPr indent="0" marL="0">
-              <a:lnSpc>
-                <a:spcPts val="2000"/>
-              </a:lnSpc>
-              <a:buNone/>
-            </a:pPr>
-            <a:r>
-              <a:rPr lang="en-US" sz="1200" dirty="0">
+            <a:endParaRPr lang="en-US" sz="1050" dirty="0"/>
+          </a:p>
+          <a:p>
+            <a:pPr indent="0" marL="0">
+              <a:lnSpc>
+                <a:spcPts val="1600"/>
+              </a:lnSpc>
+              <a:buNone/>
+            </a:pPr>
+            <a:r>
+              <a:rPr lang="en-US" sz="1050" dirty="0">
                 <a:solidFill>
                   <a:srgbClr val="FFFFFF"/>
                 </a:solidFill>
@@ -5516,17 +6146,17 @@
               </a:rPr>
               <a:t>• Outer Rim: 4px solid white metallic ring.</a:t>
             </a:r>
-            <a:endParaRPr lang="en-US" sz="1200" dirty="0"/>
-          </a:p>
-          <a:p>
-            <a:pPr indent="0" marL="0">
-              <a:lnSpc>
-                <a:spcPts val="2000"/>
-              </a:lnSpc>
-              <a:buNone/>
-            </a:pPr>
-            <a:r>
-              <a:rPr lang="en-US" sz="1200" dirty="0">
+            <a:endParaRPr lang="en-US" sz="1050" dirty="0"/>
+          </a:p>
+          <a:p>
+            <a:pPr indent="0" marL="0">
+              <a:lnSpc>
+                <a:spcPts val="1600"/>
+              </a:lnSpc>
+              <a:buNone/>
+            </a:pPr>
+            <a:r>
+              <a:rPr lang="en-US" sz="1050" dirty="0">
                 <a:solidFill>
                   <a:srgbClr val="FFFFFF"/>
                 </a:solidFill>
@@ -5536,17 +6166,17 @@
               </a:rPr>
               <a:t>• Pulsing Glow: CSS keyframe animation @keyframes ripplePulse (0 0 30px rgba(0,229,255,0.6)).</a:t>
             </a:r>
-            <a:endParaRPr lang="en-US" sz="1200" dirty="0"/>
-          </a:p>
-          <a:p>
-            <a:pPr indent="0" marL="0">
-              <a:lnSpc>
-                <a:spcPts val="2000"/>
-              </a:lnSpc>
-              <a:buNone/>
-            </a:pPr>
-            <a:r>
-              <a:rPr lang="en-US" sz="1200" dirty="0">
+            <a:endParaRPr lang="en-US" sz="1050" dirty="0"/>
+          </a:p>
+          <a:p>
+            <a:pPr indent="0" marL="0">
+              <a:lnSpc>
+                <a:spcPts val="1600"/>
+              </a:lnSpc>
+              <a:buNone/>
+            </a:pPr>
+            <a:r>
+              <a:rPr lang="en-US" sz="1050" dirty="0">
                 <a:solidFill>
                   <a:srgbClr val="FFFFFF"/>
                 </a:solidFill>
@@ -5556,30 +6186,30 @@
               </a:rPr>
               <a:t>• Depressed Feedback: Scale to 0.92 on touch with instant haptic audio sound.</a:t>
             </a:r>
-            <a:endParaRPr lang="en-US" sz="1200" dirty="0"/>
-          </a:p>
-        </p:txBody>
-      </p:sp>
-      <p:sp>
-        <p:nvSpPr>
-          <p:cNvPr id="10" name="Shape 8"/>
-          <p:cNvSpPr/>
-          <p:nvPr/>
-        </p:nvSpPr>
-        <p:spPr>
-          <a:xfrm>
-            <a:off x="6126480" y="1371600"/>
-            <a:ext cx="5120640" cy="4754880"/>
+            <a:endParaRPr lang="en-US" sz="1050" dirty="0"/>
+          </a:p>
+        </p:txBody>
+      </p:sp>
+      <p:sp>
+        <p:nvSpPr>
+          <p:cNvPr id="11" name="Shape 9"/>
+          <p:cNvSpPr/>
+          <p:nvPr/>
+        </p:nvSpPr>
+        <p:spPr>
+          <a:xfrm>
+            <a:off x="6217920" y="1188720"/>
+            <a:ext cx="5394960" cy="4846320"/>
           </a:xfrm>
           <a:prstGeom prst="rect">
             <a:avLst/>
           </a:prstGeom>
           <a:solidFill>
-            <a:srgbClr val="1A1A1A"/>
+            <a:srgbClr val="181818"/>
           </a:solidFill>
           <a:ln w="12700">
             <a:solidFill>
-              <a:srgbClr val="282828"/>
+              <a:srgbClr val="2A2A2A"/>
             </a:solidFill>
             <a:prstDash val="solid"/>
           </a:ln>
@@ -5587,14 +6217,14 @@
       </p:sp>
       <p:sp>
         <p:nvSpPr>
-          <p:cNvPr id="11" name="Text 9"/>
-          <p:cNvSpPr/>
-          <p:nvPr/>
-        </p:nvSpPr>
-        <p:spPr>
-          <a:xfrm>
-            <a:off x="6400800" y="1645920"/>
-            <a:ext cx="4572000" cy="365760"/>
+          <p:cNvPr id="12" name="Text 10"/>
+          <p:cNvSpPr/>
+          <p:nvPr/>
+        </p:nvSpPr>
+        <p:spPr>
+          <a:xfrm>
+            <a:off x="6492240" y="1371600"/>
+            <a:ext cx="4846320" cy="365760"/>
           </a:xfrm>
           <a:prstGeom prst="rect">
             <a:avLst/>
@@ -5610,7 +6240,7 @@
               <a:buNone/>
             </a:pPr>
             <a:r>
-              <a:rPr lang="en-US" sz="1600" b="1" dirty="0">
+              <a:rPr lang="en-US" sz="1500" b="1" dirty="0">
                 <a:solidFill>
                   <a:srgbClr val="39FF14"/>
                 </a:solidFill>
@@ -5620,20 +6250,20 @@
               </a:rPr>
               <a:t>🃏 Cybertech Choice Cards [A, B, C, D]</a:t>
             </a:r>
-            <a:endParaRPr lang="en-US" sz="1600" dirty="0"/>
-          </a:p>
-        </p:txBody>
-      </p:sp>
-      <p:sp>
-        <p:nvSpPr>
-          <p:cNvPr id="12" name="Text 10"/>
-          <p:cNvSpPr/>
-          <p:nvPr/>
-        </p:nvSpPr>
-        <p:spPr>
-          <a:xfrm>
-            <a:off x="6400800" y="2194560"/>
-            <a:ext cx="4572000" cy="3657600"/>
+            <a:endParaRPr lang="en-US" sz="1500" dirty="0"/>
+          </a:p>
+        </p:txBody>
+      </p:sp>
+      <p:sp>
+        <p:nvSpPr>
+          <p:cNvPr id="13" name="Text 11"/>
+          <p:cNvSpPr/>
+          <p:nvPr/>
+        </p:nvSpPr>
+        <p:spPr>
+          <a:xfrm>
+            <a:off x="6492240" y="1828800"/>
+            <a:ext cx="4846320" cy="4023360"/>
           </a:xfrm>
           <a:prstGeom prst="rect">
             <a:avLst/>
@@ -5647,12 +6277,12 @@
           <a:p>
             <a:pPr indent="0" marL="0">
               <a:lnSpc>
-                <a:spcPts val="2000"/>
-              </a:lnSpc>
-              <a:buNone/>
-            </a:pPr>
-            <a:r>
-              <a:rPr lang="en-US" sz="1200" dirty="0">
+                <a:spcPts val="1600"/>
+              </a:lnSpc>
+              <a:buNone/>
+            </a:pPr>
+            <a:r>
+              <a:rPr lang="en-US" sz="1050" dirty="0">
                 <a:solidFill>
                   <a:srgbClr val="FFFFFF"/>
                 </a:solidFill>
@@ -5662,17 +6292,17 @@
               </a:rPr>
               <a:t>• Card Container: Dark glass #141414, 1.5px border #262626.</a:t>
             </a:r>
-            <a:endParaRPr lang="en-US" sz="1200" dirty="0"/>
-          </a:p>
-          <a:p>
-            <a:pPr indent="0" marL="0">
-              <a:lnSpc>
-                <a:spcPts val="2000"/>
-              </a:lnSpc>
-              <a:buNone/>
-            </a:pPr>
-            <a:r>
-              <a:rPr lang="en-US" sz="1200" dirty="0">
+            <a:endParaRPr lang="en-US" sz="1050" dirty="0"/>
+          </a:p>
+          <a:p>
+            <a:pPr indent="0" marL="0">
+              <a:lnSpc>
+                <a:spcPts val="1600"/>
+              </a:lnSpc>
+              <a:buNone/>
+            </a:pPr>
+            <a:r>
+              <a:rPr lang="en-US" sz="1050" dirty="0">
                 <a:solidFill>
                   <a:srgbClr val="FFFFFF"/>
                 </a:solidFill>
@@ -5682,17 +6312,17 @@
               </a:rPr>
               <a:t>• Option Badges: Letter badges A, B, C, D in bold primary green background (#39FF14) with dark text.</a:t>
             </a:r>
-            <a:endParaRPr lang="en-US" sz="1200" dirty="0"/>
-          </a:p>
-          <a:p>
-            <a:pPr indent="0" marL="0">
-              <a:lnSpc>
-                <a:spcPts val="2000"/>
-              </a:lnSpc>
-              <a:buNone/>
-            </a:pPr>
-            <a:r>
-              <a:rPr lang="en-US" sz="1200" dirty="0">
+            <a:endParaRPr lang="en-US" sz="1050" dirty="0"/>
+          </a:p>
+          <a:p>
+            <a:pPr indent="0" marL="0">
+              <a:lnSpc>
+                <a:spcPts val="1600"/>
+              </a:lnSpc>
+              <a:buNone/>
+            </a:pPr>
+            <a:r>
+              <a:rPr lang="en-US" sz="1050" dirty="0">
                 <a:solidFill>
                   <a:srgbClr val="FFFFFF"/>
                 </a:solidFill>
@@ -5702,17 +6332,17 @@
               </a:rPr>
               <a:t>• Selected State: Solid neon green border + 20px box-shadow glow.</a:t>
             </a:r>
-            <a:endParaRPr lang="en-US" sz="1200" dirty="0"/>
-          </a:p>
-          <a:p>
-            <a:pPr indent="0" marL="0">
-              <a:lnSpc>
-                <a:spcPts val="2000"/>
-              </a:lnSpc>
-              <a:buNone/>
-            </a:pPr>
-            <a:r>
-              <a:rPr lang="en-US" sz="1200" dirty="0">
+            <a:endParaRPr lang="en-US" sz="1050" dirty="0"/>
+          </a:p>
+          <a:p>
+            <a:pPr indent="0" marL="0">
+              <a:lnSpc>
+                <a:spcPts val="1600"/>
+              </a:lnSpc>
+              <a:buNone/>
+            </a:pPr>
+            <a:r>
+              <a:rPr lang="en-US" sz="1050" dirty="0">
                 <a:solidFill>
                   <a:srgbClr val="FFFFFF"/>
                 </a:solidFill>
@@ -5722,7 +6352,7 @@
               </a:rPr>
               <a:t>• Disabled State: 40% opacity with lock icon when lockout is active.</a:t>
             </a:r>
-            <a:endParaRPr lang="en-US" sz="1200" dirty="0"/>
+            <a:endParaRPr lang="en-US" sz="1050" dirty="0"/>
           </a:p>
         </p:txBody>
       </p:sp>
@@ -5760,7 +6390,7 @@
         <p:spPr>
           <a:xfrm>
             <a:off x="0" y="0"/>
-            <a:ext cx="9144000" cy="5143500"/>
+            <a:ext cx="12188952" cy="6858000"/>
           </a:xfrm>
           <a:prstGeom prst="rect">
             <a:avLst/>
@@ -5780,7 +6410,7 @@
         <p:spPr>
           <a:xfrm>
             <a:off x="0" y="0"/>
-            <a:ext cx="9144000" cy="73152"/>
+            <a:ext cx="12188952" cy="73152"/>
           </a:xfrm>
           <a:prstGeom prst="rect">
             <a:avLst/>
@@ -5799,8 +6429,8 @@
         </p:nvSpPr>
         <p:spPr>
           <a:xfrm>
-            <a:off x="731520" y="365760"/>
-            <a:ext cx="7315200" cy="274320"/>
+            <a:off x="548640" y="320040"/>
+            <a:ext cx="7315200" cy="228600"/>
           </a:xfrm>
           <a:prstGeom prst="rect">
             <a:avLst/>
@@ -5816,7 +6446,7 @@
               <a:buNone/>
             </a:pPr>
             <a:r>
-              <a:rPr lang="en-US" sz="1000" b="1" dirty="0">
+              <a:rPr lang="en-US" sz="900" b="1" dirty="0">
                 <a:solidFill>
                   <a:srgbClr val="39FF14"/>
                 </a:solidFill>
@@ -5826,7 +6456,7 @@
               </a:rPr>
               <a:t>FOR GAME CONTENT WRITERS</a:t>
             </a:r>
-            <a:endParaRPr lang="en-US" sz="1000" dirty="0"/>
+            <a:endParaRPr lang="en-US" sz="900" dirty="0"/>
           </a:p>
         </p:txBody>
       </p:sp>
@@ -5838,8 +6468,8 @@
         </p:nvSpPr>
         <p:spPr>
           <a:xfrm>
-            <a:off x="731520" y="640080"/>
-            <a:ext cx="10058400" cy="548640"/>
+            <a:off x="548640" y="548640"/>
+            <a:ext cx="11064240" cy="457200"/>
           </a:xfrm>
           <a:prstGeom prst="rect">
             <a:avLst/>
@@ -5855,7 +6485,7 @@
               <a:buNone/>
             </a:pPr>
             <a:r>
-              <a:rPr lang="en-US" sz="2400" b="1" dirty="0">
+              <a:rPr lang="en-US" sz="2200" b="1" dirty="0">
                 <a:solidFill>
                   <a:srgbClr val="FFFFFF"/>
                 </a:solidFill>
@@ -5865,20 +6495,40 @@
               </a:rPr>
               <a:t>Content Architecture &amp; CSV Rules</a:t>
             </a:r>
-            <a:endParaRPr lang="en-US" sz="2400" dirty="0"/>
-          </a:p>
-        </p:txBody>
-      </p:sp>
-      <p:sp>
-        <p:nvSpPr>
-          <p:cNvPr id="6" name="Text 4"/>
-          <p:cNvSpPr/>
-          <p:nvPr/>
-        </p:nvSpPr>
-        <p:spPr>
-          <a:xfrm>
-            <a:off x="731520" y="6492240"/>
-            <a:ext cx="9144000" cy="274320"/>
+            <a:endParaRPr lang="en-US" sz="2200" dirty="0"/>
+          </a:p>
+        </p:txBody>
+      </p:sp>
+      <p:sp>
+        <p:nvSpPr>
+          <p:cNvPr id="6" name="Shape 4"/>
+          <p:cNvSpPr/>
+          <p:nvPr/>
+        </p:nvSpPr>
+        <p:spPr>
+          <a:xfrm>
+            <a:off x="548640" y="6217920"/>
+            <a:ext cx="11091672" cy="18288"/>
+          </a:xfrm>
+          <a:prstGeom prst="rect">
+            <a:avLst/>
+          </a:prstGeom>
+          <a:solidFill>
+            <a:srgbClr val="2A2A2A"/>
+          </a:solidFill>
+          <a:ln/>
+        </p:spPr>
+      </p:sp>
+      <p:sp>
+        <p:nvSpPr>
+          <p:cNvPr id="7" name="Text 5"/>
+          <p:cNvSpPr/>
+          <p:nvPr/>
+        </p:nvSpPr>
+        <p:spPr>
+          <a:xfrm>
+            <a:off x="548640" y="6309360"/>
+            <a:ext cx="11091672" cy="274320"/>
           </a:xfrm>
           <a:prstGeom prst="rect">
             <a:avLst/>
@@ -5902,7 +6552,7 @@
                 <a:ea typeface="Helvetica" pitchFamily="34" charset="-122"/>
                 <a:cs typeface="Helvetica" pitchFamily="34" charset="-120"/>
               </a:rPr>
-              <a:t>Infinix XPAD 30 Pro x Ruangguru  |  Clash of Unxpadted</a:t>
+              <a:t>Infinix XPAD 30 Pro × Ruangguru  |  Clash of Unxpadted Design System PRD</a:t>
             </a:r>
             <a:endParaRPr lang="en-US" sz="900" dirty="0"/>
           </a:p>
@@ -5910,24 +6560,24 @@
       </p:sp>
       <p:sp>
         <p:nvSpPr>
-          <p:cNvPr id="7" name="Shape 5"/>
-          <p:cNvSpPr/>
-          <p:nvPr/>
-        </p:nvSpPr>
-        <p:spPr>
-          <a:xfrm>
-            <a:off x="731520" y="1371600"/>
-            <a:ext cx="10515600" cy="4754880"/>
+          <p:cNvPr id="8" name="Shape 6"/>
+          <p:cNvSpPr/>
+          <p:nvPr/>
+        </p:nvSpPr>
+        <p:spPr>
+          <a:xfrm>
+            <a:off x="548640" y="1188720"/>
+            <a:ext cx="5394960" cy="4846320"/>
           </a:xfrm>
           <a:prstGeom prst="rect">
             <a:avLst/>
           </a:prstGeom>
           <a:solidFill>
-            <a:srgbClr val="1A1A1A"/>
+            <a:srgbClr val="181818"/>
           </a:solidFill>
           <a:ln w="12700">
             <a:solidFill>
-              <a:srgbClr val="282828"/>
+              <a:srgbClr val="2A2A2A"/>
             </a:solidFill>
             <a:prstDash val="solid"/>
           </a:ln>
@@ -5935,14 +6585,14 @@
       </p:sp>
       <p:sp>
         <p:nvSpPr>
-          <p:cNvPr id="8" name="Text 6"/>
-          <p:cNvSpPr/>
-          <p:nvPr/>
-        </p:nvSpPr>
-        <p:spPr>
-          <a:xfrm>
-            <a:off x="1005840" y="1645920"/>
-            <a:ext cx="9144000" cy="365760"/>
+          <p:cNvPr id="9" name="Text 7"/>
+          <p:cNvSpPr/>
+          <p:nvPr/>
+        </p:nvSpPr>
+        <p:spPr>
+          <a:xfrm>
+            <a:off x="822960" y="1371600"/>
+            <a:ext cx="4846320" cy="365760"/>
           </a:xfrm>
           <a:prstGeom prst="rect">
             <a:avLst/>
@@ -5958,7 +6608,7 @@
               <a:buNone/>
             </a:pPr>
             <a:r>
-              <a:rPr lang="en-US" sz="1600" b="1" dirty="0">
+              <a:rPr lang="en-US" sz="1500" b="1" dirty="0">
                 <a:solidFill>
                   <a:srgbClr val="39FF14"/>
                 </a:solidFill>
@@ -5966,22 +6616,22 @@
                 <a:ea typeface="Arial" pitchFamily="34" charset="-122"/>
                 <a:cs typeface="Arial" pitchFamily="34" charset="-120"/>
               </a:rPr>
-              <a:t>📄 Universal CSV File &amp; Encoding Standards</a:t>
-            </a:r>
-            <a:endParaRPr lang="en-US" sz="1600" dirty="0"/>
-          </a:p>
-        </p:txBody>
-      </p:sp>
-      <p:sp>
-        <p:nvSpPr>
-          <p:cNvPr id="9" name="Text 7"/>
-          <p:cNvSpPr/>
-          <p:nvPr/>
-        </p:nvSpPr>
-        <p:spPr>
-          <a:xfrm>
-            <a:off x="1005840" y="2103120"/>
-            <a:ext cx="9875520" cy="3840480"/>
+              <a:t>📄 CSV Encoding &amp; Escaping Rules</a:t>
+            </a:r>
+            <a:endParaRPr lang="en-US" sz="1500" dirty="0"/>
+          </a:p>
+        </p:txBody>
+      </p:sp>
+      <p:sp>
+        <p:nvSpPr>
+          <p:cNvPr id="10" name="Text 8"/>
+          <p:cNvSpPr/>
+          <p:nvPr/>
+        </p:nvSpPr>
+        <p:spPr>
+          <a:xfrm>
+            <a:off x="822960" y="1828800"/>
+            <a:ext cx="4846320" cy="4023360"/>
           </a:xfrm>
           <a:prstGeom prst="rect">
             <a:avLst/>
@@ -5995,209 +6645,335 @@
           <a:p>
             <a:pPr indent="0" marL="0">
               <a:lnSpc>
-                <a:spcPts val="2000"/>
-              </a:lnSpc>
-              <a:buNone/>
-            </a:pPr>
-            <a:r>
-              <a:rPr lang="en-US" sz="1200" dirty="0">
-                <a:solidFill>
-                  <a:srgbClr val="FFFFFF"/>
-                </a:solidFill>
-                <a:latin typeface="Helvetica" pitchFamily="34" charset="0"/>
-                <a:ea typeface="Helvetica" pitchFamily="34" charset="-122"/>
-                <a:cs typeface="Helvetica" pitchFamily="34" charset="-120"/>
-              </a:rPr>
-              <a:t>1. File Encoding:</a:t>
-            </a:r>
-            <a:endParaRPr lang="en-US" sz="1200" dirty="0"/>
-          </a:p>
-          <a:p>
-            <a:pPr indent="0" marL="0">
-              <a:lnSpc>
-                <a:spcPts val="2000"/>
-              </a:lnSpc>
-              <a:buNone/>
-            </a:pPr>
-            <a:r>
-              <a:rPr lang="en-US" sz="1200" dirty="0">
-                <a:solidFill>
-                  <a:srgbClr val="FFFFFF"/>
-                </a:solidFill>
-                <a:latin typeface="Helvetica" pitchFamily="34" charset="0"/>
-                <a:ea typeface="Helvetica" pitchFamily="34" charset="-122"/>
-                <a:cs typeface="Helvetica" pitchFamily="34" charset="-120"/>
-              </a:rPr>
-              <a:t>   • MUST be saved as UTF-8 (Without BOM).</a:t>
-            </a:r>
-            <a:endParaRPr lang="en-US" sz="1200" dirty="0"/>
-          </a:p>
-          <a:p>
-            <a:pPr indent="0" marL="0">
-              <a:lnSpc>
-                <a:spcPts val="2000"/>
-              </a:lnSpc>
-              <a:buNone/>
-            </a:pPr>
-            <a:endParaRPr lang="en-US" sz="1200" dirty="0"/>
-          </a:p>
-          <a:p>
-            <a:pPr indent="0" marL="0">
-              <a:lnSpc>
-                <a:spcPts val="2000"/>
-              </a:lnSpc>
-              <a:buNone/>
-            </a:pPr>
-            <a:r>
-              <a:rPr lang="en-US" sz="1200" dirty="0">
-                <a:solidFill>
-                  <a:srgbClr val="FFFFFF"/>
-                </a:solidFill>
-                <a:latin typeface="Helvetica" pitchFamily="34" charset="0"/>
-                <a:ea typeface="Helvetica" pitchFamily="34" charset="-122"/>
-                <a:cs typeface="Helvetica" pitchFamily="34" charset="-120"/>
-              </a:rPr>
-              <a:t>2. Escape Quotes &amp; Commas:</a:t>
-            </a:r>
-            <a:endParaRPr lang="en-US" sz="1200" dirty="0"/>
-          </a:p>
-          <a:p>
-            <a:pPr indent="0" marL="0">
-              <a:lnSpc>
-                <a:spcPts val="2000"/>
-              </a:lnSpc>
-              <a:buNone/>
-            </a:pPr>
-            <a:r>
-              <a:rPr lang="en-US" sz="1200" dirty="0">
-                <a:solidFill>
-                  <a:srgbClr val="FFFFFF"/>
-                </a:solidFill>
-                <a:latin typeface="Helvetica" pitchFamily="34" charset="0"/>
-                <a:ea typeface="Helvetica" pitchFamily="34" charset="-122"/>
-                <a:cs typeface="Helvetica" pitchFamily="34" charset="-120"/>
-              </a:rPr>
-              <a:t>   • Wrap text containing commas or special math symbols in double quotes: "47 + 58 = ?"</a:t>
-            </a:r>
-            <a:endParaRPr lang="en-US" sz="1200" dirty="0"/>
-          </a:p>
-          <a:p>
-            <a:pPr indent="0" marL="0">
-              <a:lnSpc>
-                <a:spcPts val="2000"/>
-              </a:lnSpc>
-              <a:buNone/>
-            </a:pPr>
-            <a:endParaRPr lang="en-US" sz="1200" dirty="0"/>
-          </a:p>
-          <a:p>
-            <a:pPr indent="0" marL="0">
-              <a:lnSpc>
-                <a:spcPts val="2000"/>
-              </a:lnSpc>
-              <a:buNone/>
-            </a:pPr>
-            <a:r>
-              <a:rPr lang="en-US" sz="1200" dirty="0">
-                <a:solidFill>
-                  <a:srgbClr val="FFFFFF"/>
-                </a:solidFill>
-                <a:latin typeface="Helvetica" pitchFamily="34" charset="0"/>
-                <a:ea typeface="Helvetica" pitchFamily="34" charset="-122"/>
-                <a:cs typeface="Helvetica" pitchFamily="34" charset="-120"/>
-              </a:rPr>
-              <a:t>3. Pipe Delimiter for Multiple Choice:</a:t>
-            </a:r>
-            <a:endParaRPr lang="en-US" sz="1200" dirty="0"/>
-          </a:p>
-          <a:p>
-            <a:pPr indent="0" marL="0">
-              <a:lnSpc>
-                <a:spcPts val="2000"/>
-              </a:lnSpc>
-              <a:buNone/>
-            </a:pPr>
-            <a:r>
-              <a:rPr lang="en-US" sz="1200" dirty="0">
-                <a:solidFill>
-                  <a:srgbClr val="FFFFFF"/>
-                </a:solidFill>
-                <a:latin typeface="Helvetica" pitchFamily="34" charset="0"/>
-                <a:ea typeface="Helvetica" pitchFamily="34" charset="-122"/>
-                <a:cs typeface="Helvetica" pitchFamily="34" charset="-120"/>
-              </a:rPr>
-              <a:t>   • Separate multiple choice options using vertical pipe symbol `|` without spaces around pipe:</a:t>
-            </a:r>
-            <a:endParaRPr lang="en-US" sz="1200" dirty="0"/>
-          </a:p>
-          <a:p>
-            <a:pPr indent="0" marL="0">
-              <a:lnSpc>
-                <a:spcPts val="2000"/>
-              </a:lnSpc>
-              <a:buNone/>
-            </a:pPr>
-            <a:r>
-              <a:rPr lang="en-US" sz="1200" dirty="0">
-                <a:solidFill>
-                  <a:srgbClr val="FFFFFF"/>
-                </a:solidFill>
-                <a:latin typeface="Helvetica" pitchFamily="34" charset="0"/>
-                <a:ea typeface="Helvetica" pitchFamily="34" charset="-122"/>
-                <a:cs typeface="Helvetica" pitchFamily="34" charset="-120"/>
-              </a:rPr>
-              <a:t>     A. 16 Agustus|B. 17 Agustus|C. 18 Agustus|D. 19 Agustus</a:t>
-            </a:r>
-            <a:endParaRPr lang="en-US" sz="1200" dirty="0"/>
-          </a:p>
-          <a:p>
-            <a:pPr indent="0" marL="0">
-              <a:lnSpc>
-                <a:spcPts val="2000"/>
-              </a:lnSpc>
-              <a:buNone/>
-            </a:pPr>
-            <a:endParaRPr lang="en-US" sz="1200" dirty="0"/>
-          </a:p>
-          <a:p>
-            <a:pPr indent="0" marL="0">
-              <a:lnSpc>
-                <a:spcPts val="2000"/>
-              </a:lnSpc>
-              <a:buNone/>
-            </a:pPr>
-            <a:r>
-              <a:rPr lang="en-US" sz="1200" dirty="0">
-                <a:solidFill>
-                  <a:srgbClr val="FFFFFF"/>
-                </a:solidFill>
-                <a:latin typeface="Helvetica" pitchFamily="34" charset="0"/>
-                <a:ea typeface="Helvetica" pitchFamily="34" charset="-122"/>
-                <a:cs typeface="Helvetica" pitchFamily="34" charset="-120"/>
-              </a:rPr>
-              <a:t>4. Automatic Live Import:</a:t>
-            </a:r>
-            <a:endParaRPr lang="en-US" sz="1200" dirty="0"/>
-          </a:p>
-          <a:p>
-            <a:pPr indent="0" marL="0">
-              <a:lnSpc>
-                <a:spcPts val="2000"/>
-              </a:lnSpc>
-              <a:buNone/>
-            </a:pPr>
-            <a:r>
-              <a:rPr lang="en-US" sz="1200" dirty="0">
-                <a:solidFill>
-                  <a:srgbClr val="FFFFFF"/>
-                </a:solidFill>
-                <a:latin typeface="Helvetica" pitchFamily="34" charset="0"/>
-                <a:ea typeface="Helvetica" pitchFamily="34" charset="-122"/>
-                <a:cs typeface="Helvetica" pitchFamily="34" charset="-120"/>
-              </a:rPr>
-              <a:t>   • Uploading a valid CSV automatically sets currentStation and stationVisibility ON across all tablet &amp; stage display screens live.</a:t>
-            </a:r>
-            <a:endParaRPr lang="en-US" sz="1200" dirty="0"/>
+                <a:spcPts val="1600"/>
+              </a:lnSpc>
+              <a:buNone/>
+            </a:pPr>
+            <a:r>
+              <a:rPr lang="en-US" sz="1050" dirty="0">
+                <a:solidFill>
+                  <a:srgbClr val="FFFFFF"/>
+                </a:solidFill>
+                <a:latin typeface="Helvetica" pitchFamily="34" charset="0"/>
+                <a:ea typeface="Helvetica" pitchFamily="34" charset="-122"/>
+                <a:cs typeface="Helvetica" pitchFamily="34" charset="-120"/>
+              </a:rPr>
+              <a:t>• File Encoding:</a:t>
+            </a:r>
+            <a:endParaRPr lang="en-US" sz="1050" dirty="0"/>
+          </a:p>
+          <a:p>
+            <a:pPr indent="0" marL="0">
+              <a:lnSpc>
+                <a:spcPts val="1600"/>
+              </a:lnSpc>
+              <a:buNone/>
+            </a:pPr>
+            <a:r>
+              <a:rPr lang="en-US" sz="1050" dirty="0">
+                <a:solidFill>
+                  <a:srgbClr val="FFFFFF"/>
+                </a:solidFill>
+                <a:latin typeface="Helvetica" pitchFamily="34" charset="0"/>
+                <a:ea typeface="Helvetica" pitchFamily="34" charset="-122"/>
+                <a:cs typeface="Helvetica" pitchFamily="34" charset="-120"/>
+              </a:rPr>
+              <a:t>  MUST be saved as UTF-8 (Without BOM).</a:t>
+            </a:r>
+            <a:endParaRPr lang="en-US" sz="1050" dirty="0"/>
+          </a:p>
+          <a:p>
+            <a:pPr indent="0" marL="0">
+              <a:lnSpc>
+                <a:spcPts val="1600"/>
+              </a:lnSpc>
+              <a:buNone/>
+            </a:pPr>
+            <a:endParaRPr lang="en-US" sz="1050" dirty="0"/>
+          </a:p>
+          <a:p>
+            <a:pPr indent="0" marL="0">
+              <a:lnSpc>
+                <a:spcPts val="1600"/>
+              </a:lnSpc>
+              <a:buNone/>
+            </a:pPr>
+            <a:r>
+              <a:rPr lang="en-US" sz="1050" dirty="0">
+                <a:solidFill>
+                  <a:srgbClr val="FFFFFF"/>
+                </a:solidFill>
+                <a:latin typeface="Helvetica" pitchFamily="34" charset="0"/>
+                <a:ea typeface="Helvetica" pitchFamily="34" charset="-122"/>
+                <a:cs typeface="Helvetica" pitchFamily="34" charset="-120"/>
+              </a:rPr>
+              <a:t>• Escape Quotes &amp; Commas:</a:t>
+            </a:r>
+            <a:endParaRPr lang="en-US" sz="1050" dirty="0"/>
+          </a:p>
+          <a:p>
+            <a:pPr indent="0" marL="0">
+              <a:lnSpc>
+                <a:spcPts val="1600"/>
+              </a:lnSpc>
+              <a:buNone/>
+            </a:pPr>
+            <a:r>
+              <a:rPr lang="en-US" sz="1050" dirty="0">
+                <a:solidFill>
+                  <a:srgbClr val="FFFFFF"/>
+                </a:solidFill>
+                <a:latin typeface="Helvetica" pitchFamily="34" charset="0"/>
+                <a:ea typeface="Helvetica" pitchFamily="34" charset="-122"/>
+                <a:cs typeface="Helvetica" pitchFamily="34" charset="-120"/>
+              </a:rPr>
+              <a:t>  Wrap text containing commas or special math symbols in double quotes: "47 + 58 = ?"</a:t>
+            </a:r>
+            <a:endParaRPr lang="en-US" sz="1050" dirty="0"/>
+          </a:p>
+          <a:p>
+            <a:pPr indent="0" marL="0">
+              <a:lnSpc>
+                <a:spcPts val="1600"/>
+              </a:lnSpc>
+              <a:buNone/>
+            </a:pPr>
+            <a:endParaRPr lang="en-US" sz="1050" dirty="0"/>
+          </a:p>
+          <a:p>
+            <a:pPr indent="0" marL="0">
+              <a:lnSpc>
+                <a:spcPts val="1600"/>
+              </a:lnSpc>
+              <a:buNone/>
+            </a:pPr>
+            <a:r>
+              <a:rPr lang="en-US" sz="1050" dirty="0">
+                <a:solidFill>
+                  <a:srgbClr val="FFFFFF"/>
+                </a:solidFill>
+                <a:latin typeface="Helvetica" pitchFamily="34" charset="0"/>
+                <a:ea typeface="Helvetica" pitchFamily="34" charset="-122"/>
+                <a:cs typeface="Helvetica" pitchFamily="34" charset="-120"/>
+              </a:rPr>
+              <a:t>• Case Sensitivity:</a:t>
+            </a:r>
+            <a:endParaRPr lang="en-US" sz="1050" dirty="0"/>
+          </a:p>
+          <a:p>
+            <a:pPr indent="0" marL="0">
+              <a:lnSpc>
+                <a:spcPts val="1600"/>
+              </a:lnSpc>
+              <a:buNone/>
+            </a:pPr>
+            <a:r>
+              <a:rPr lang="en-US" sz="1050" dirty="0">
+                <a:solidFill>
+                  <a:srgbClr val="FFFFFF"/>
+                </a:solidFill>
+                <a:latin typeface="Helvetica" pitchFamily="34" charset="0"/>
+                <a:ea typeface="Helvetica" pitchFamily="34" charset="-122"/>
+                <a:cs typeface="Helvetica" pitchFamily="34" charset="-120"/>
+              </a:rPr>
+              <a:t>  Station IDs (X1, X2, X3, X4) and correct answers (A, B, C, D) must be UPPERCASE.</a:t>
+            </a:r>
+            <a:endParaRPr lang="en-US" sz="1050" dirty="0"/>
+          </a:p>
+        </p:txBody>
+      </p:sp>
+      <p:sp>
+        <p:nvSpPr>
+          <p:cNvPr id="11" name="Shape 9"/>
+          <p:cNvSpPr/>
+          <p:nvPr/>
+        </p:nvSpPr>
+        <p:spPr>
+          <a:xfrm>
+            <a:off x="6217920" y="1188720"/>
+            <a:ext cx="5394960" cy="4846320"/>
+          </a:xfrm>
+          <a:prstGeom prst="rect">
+            <a:avLst/>
+          </a:prstGeom>
+          <a:solidFill>
+            <a:srgbClr val="181818"/>
+          </a:solidFill>
+          <a:ln w="12700">
+            <a:solidFill>
+              <a:srgbClr val="2A2A2A"/>
+            </a:solidFill>
+            <a:prstDash val="solid"/>
+          </a:ln>
+        </p:spPr>
+      </p:sp>
+      <p:sp>
+        <p:nvSpPr>
+          <p:cNvPr id="12" name="Text 10"/>
+          <p:cNvSpPr/>
+          <p:nvPr/>
+        </p:nvSpPr>
+        <p:spPr>
+          <a:xfrm>
+            <a:off x="6492240" y="1371600"/>
+            <a:ext cx="4846320" cy="365760"/>
+          </a:xfrm>
+          <a:prstGeom prst="rect">
+            <a:avLst/>
+          </a:prstGeom>
+          <a:noFill/>
+          <a:ln/>
+        </p:spPr>
+        <p:txBody>
+          <a:bodyPr wrap="square" rtlCol="0" anchor="ctr"/>
+          <a:lstStyle/>
+          <a:p>
+            <a:pPr indent="0" marL="0">
+              <a:buNone/>
+            </a:pPr>
+            <a:r>
+              <a:rPr lang="en-US" sz="1500" b="1" dirty="0">
+                <a:solidFill>
+                  <a:srgbClr val="00E5FF"/>
+                </a:solidFill>
+                <a:latin typeface="Arial" pitchFamily="34" charset="0"/>
+                <a:ea typeface="Arial" pitchFamily="34" charset="-122"/>
+                <a:cs typeface="Arial" pitchFamily="34" charset="-120"/>
+              </a:rPr>
+              <a:t>🔗 Option Delimiters &amp; Auto-Sync</a:t>
+            </a:r>
+            <a:endParaRPr lang="en-US" sz="1500" dirty="0"/>
+          </a:p>
+        </p:txBody>
+      </p:sp>
+      <p:sp>
+        <p:nvSpPr>
+          <p:cNvPr id="13" name="Text 11"/>
+          <p:cNvSpPr/>
+          <p:nvPr/>
+        </p:nvSpPr>
+        <p:spPr>
+          <a:xfrm>
+            <a:off x="6492240" y="1828800"/>
+            <a:ext cx="4846320" cy="4023360"/>
+          </a:xfrm>
+          <a:prstGeom prst="rect">
+            <a:avLst/>
+          </a:prstGeom>
+          <a:noFill/>
+          <a:ln/>
+        </p:spPr>
+        <p:txBody>
+          <a:bodyPr wrap="square" rtlCol="0" anchor="ctr"/>
+          <a:lstStyle/>
+          <a:p>
+            <a:pPr indent="0" marL="0">
+              <a:lnSpc>
+                <a:spcPts val="1600"/>
+              </a:lnSpc>
+              <a:buNone/>
+            </a:pPr>
+            <a:r>
+              <a:rPr lang="en-US" sz="1050" dirty="0">
+                <a:solidFill>
+                  <a:srgbClr val="FFFFFF"/>
+                </a:solidFill>
+                <a:latin typeface="Helvetica" pitchFamily="34" charset="0"/>
+                <a:ea typeface="Helvetica" pitchFamily="34" charset="-122"/>
+                <a:cs typeface="Helvetica" pitchFamily="34" charset="-120"/>
+              </a:rPr>
+              <a:t>• Pipe Delimiter for Multiple Choice:</a:t>
+            </a:r>
+            <a:endParaRPr lang="en-US" sz="1050" dirty="0"/>
+          </a:p>
+          <a:p>
+            <a:pPr indent="0" marL="0">
+              <a:lnSpc>
+                <a:spcPts val="1600"/>
+              </a:lnSpc>
+              <a:buNone/>
+            </a:pPr>
+            <a:r>
+              <a:rPr lang="en-US" sz="1050" dirty="0">
+                <a:solidFill>
+                  <a:srgbClr val="FFFFFF"/>
+                </a:solidFill>
+                <a:latin typeface="Helvetica" pitchFamily="34" charset="0"/>
+                <a:ea typeface="Helvetica" pitchFamily="34" charset="-122"/>
+                <a:cs typeface="Helvetica" pitchFamily="34" charset="-120"/>
+              </a:rPr>
+              <a:t>  Separate options using vertical pipe `|` without spaces around pipe:</a:t>
+            </a:r>
+            <a:endParaRPr lang="en-US" sz="1050" dirty="0"/>
+          </a:p>
+          <a:p>
+            <a:pPr indent="0" marL="0">
+              <a:lnSpc>
+                <a:spcPts val="1600"/>
+              </a:lnSpc>
+              <a:buNone/>
+            </a:pPr>
+            <a:r>
+              <a:rPr lang="en-US" sz="1050" dirty="0">
+                <a:solidFill>
+                  <a:srgbClr val="FFFFFF"/>
+                </a:solidFill>
+                <a:latin typeface="Helvetica" pitchFamily="34" charset="0"/>
+                <a:ea typeface="Helvetica" pitchFamily="34" charset="-122"/>
+                <a:cs typeface="Helvetica" pitchFamily="34" charset="-120"/>
+              </a:rPr>
+              <a:t>  A. 16 Agustus|B. 17 Agustus|C. 18 Agustus|D. 19 Agustus</a:t>
+            </a:r>
+            <a:endParaRPr lang="en-US" sz="1050" dirty="0"/>
+          </a:p>
+          <a:p>
+            <a:pPr indent="0" marL="0">
+              <a:lnSpc>
+                <a:spcPts val="1600"/>
+              </a:lnSpc>
+              <a:buNone/>
+            </a:pPr>
+            <a:endParaRPr lang="en-US" sz="1050" dirty="0"/>
+          </a:p>
+          <a:p>
+            <a:pPr indent="0" marL="0">
+              <a:lnSpc>
+                <a:spcPts val="1600"/>
+              </a:lnSpc>
+              <a:buNone/>
+            </a:pPr>
+            <a:r>
+              <a:rPr lang="en-US" sz="1050" dirty="0">
+                <a:solidFill>
+                  <a:srgbClr val="FFFFFF"/>
+                </a:solidFill>
+                <a:latin typeface="Helvetica" pitchFamily="34" charset="0"/>
+                <a:ea typeface="Helvetica" pitchFamily="34" charset="-122"/>
+                <a:cs typeface="Helvetica" pitchFamily="34" charset="-120"/>
+              </a:rPr>
+              <a:t>• Automated Live Import:</a:t>
+            </a:r>
+            <a:endParaRPr lang="en-US" sz="1050" dirty="0"/>
+          </a:p>
+          <a:p>
+            <a:pPr indent="0" marL="0">
+              <a:lnSpc>
+                <a:spcPts val="1600"/>
+              </a:lnSpc>
+              <a:buNone/>
+            </a:pPr>
+            <a:r>
+              <a:rPr lang="en-US" sz="1050" dirty="0">
+                <a:solidFill>
+                  <a:srgbClr val="FFFFFF"/>
+                </a:solidFill>
+                <a:latin typeface="Helvetica" pitchFamily="34" charset="0"/>
+                <a:ea typeface="Helvetica" pitchFamily="34" charset="-122"/>
+                <a:cs typeface="Helvetica" pitchFamily="34" charset="-120"/>
+              </a:rPr>
+              <a:t>  Uploading CSV automatically sets currentStation and turns stationVisibility ON across all tablets and stage displays live.</a:t>
+            </a:r>
+            <a:endParaRPr lang="en-US" sz="1050" dirty="0"/>
           </a:p>
         </p:txBody>
       </p:sp>
@@ -6235,7 +7011,7 @@
         <p:spPr>
           <a:xfrm>
             <a:off x="0" y="0"/>
-            <a:ext cx="9144000" cy="5143500"/>
+            <a:ext cx="12188952" cy="6858000"/>
           </a:xfrm>
           <a:prstGeom prst="rect">
             <a:avLst/>
@@ -6255,7 +7031,7 @@
         <p:spPr>
           <a:xfrm>
             <a:off x="0" y="0"/>
-            <a:ext cx="9144000" cy="73152"/>
+            <a:ext cx="12188952" cy="73152"/>
           </a:xfrm>
           <a:prstGeom prst="rect">
             <a:avLst/>
@@ -6274,8 +7050,8 @@
         </p:nvSpPr>
         <p:spPr>
           <a:xfrm>
-            <a:off x="731520" y="365760"/>
-            <a:ext cx="7315200" cy="274320"/>
+            <a:off x="548640" y="320040"/>
+            <a:ext cx="7315200" cy="228600"/>
           </a:xfrm>
           <a:prstGeom prst="rect">
             <a:avLst/>
@@ -6291,7 +7067,7 @@
               <a:buNone/>
             </a:pPr>
             <a:r>
-              <a:rPr lang="en-US" sz="1000" b="1" dirty="0">
+              <a:rPr lang="en-US" sz="900" b="1" dirty="0">
                 <a:solidFill>
                   <a:srgbClr val="39FF14"/>
                 </a:solidFill>
@@ -6301,7 +7077,7 @@
               </a:rPr>
               <a:t>FOR GAME CONTENT WRITERS</a:t>
             </a:r>
-            <a:endParaRPr lang="en-US" sz="1000" dirty="0"/>
+            <a:endParaRPr lang="en-US" sz="900" dirty="0"/>
           </a:p>
         </p:txBody>
       </p:sp>
@@ -6313,8 +7089,8 @@
         </p:nvSpPr>
         <p:spPr>
           <a:xfrm>
-            <a:off x="731520" y="640080"/>
-            <a:ext cx="10058400" cy="548640"/>
+            <a:off x="548640" y="548640"/>
+            <a:ext cx="11064240" cy="457200"/>
           </a:xfrm>
           <a:prstGeom prst="rect">
             <a:avLst/>
@@ -6330,7 +7106,7 @@
               <a:buNone/>
             </a:pPr>
             <a:r>
-              <a:rPr lang="en-US" sz="2400" b="1" dirty="0">
+              <a:rPr lang="en-US" sz="2200" b="1" dirty="0">
                 <a:solidFill>
                   <a:srgbClr val="FFFFFF"/>
                 </a:solidFill>
@@ -6340,20 +7116,40 @@
               </a:rPr>
               <a:t>Station X1 &amp; X2 Content Requirements</a:t>
             </a:r>
-            <a:endParaRPr lang="en-US" sz="2400" dirty="0"/>
-          </a:p>
-        </p:txBody>
-      </p:sp>
-      <p:sp>
-        <p:nvSpPr>
-          <p:cNvPr id="6" name="Text 4"/>
-          <p:cNvSpPr/>
-          <p:nvPr/>
-        </p:nvSpPr>
-        <p:spPr>
-          <a:xfrm>
-            <a:off x="731520" y="6492240"/>
-            <a:ext cx="9144000" cy="274320"/>
+            <a:endParaRPr lang="en-US" sz="2200" dirty="0"/>
+          </a:p>
+        </p:txBody>
+      </p:sp>
+      <p:sp>
+        <p:nvSpPr>
+          <p:cNvPr id="6" name="Shape 4"/>
+          <p:cNvSpPr/>
+          <p:nvPr/>
+        </p:nvSpPr>
+        <p:spPr>
+          <a:xfrm>
+            <a:off x="548640" y="6217920"/>
+            <a:ext cx="11091672" cy="18288"/>
+          </a:xfrm>
+          <a:prstGeom prst="rect">
+            <a:avLst/>
+          </a:prstGeom>
+          <a:solidFill>
+            <a:srgbClr val="2A2A2A"/>
+          </a:solidFill>
+          <a:ln/>
+        </p:spPr>
+      </p:sp>
+      <p:sp>
+        <p:nvSpPr>
+          <p:cNvPr id="7" name="Text 5"/>
+          <p:cNvSpPr/>
+          <p:nvPr/>
+        </p:nvSpPr>
+        <p:spPr>
+          <a:xfrm>
+            <a:off x="548640" y="6309360"/>
+            <a:ext cx="11091672" cy="274320"/>
           </a:xfrm>
           <a:prstGeom prst="rect">
             <a:avLst/>
@@ -6377,7 +7173,7 @@
                 <a:ea typeface="Helvetica" pitchFamily="34" charset="-122"/>
                 <a:cs typeface="Helvetica" pitchFamily="34" charset="-120"/>
               </a:rPr>
-              <a:t>Infinix XPAD 30 Pro x Ruangguru  |  Clash of Unxpadted</a:t>
+              <a:t>Infinix XPAD 30 Pro × Ruangguru  |  Clash of Unxpadted Design System PRD</a:t>
             </a:r>
             <a:endParaRPr lang="en-US" sz="900" dirty="0"/>
           </a:p>
@@ -6385,24 +7181,24 @@
       </p:sp>
       <p:sp>
         <p:nvSpPr>
-          <p:cNvPr id="7" name="Shape 5"/>
-          <p:cNvSpPr/>
-          <p:nvPr/>
-        </p:nvSpPr>
-        <p:spPr>
-          <a:xfrm>
-            <a:off x="731520" y="1371600"/>
-            <a:ext cx="5120640" cy="4754880"/>
+          <p:cNvPr id="8" name="Shape 6"/>
+          <p:cNvSpPr/>
+          <p:nvPr/>
+        </p:nvSpPr>
+        <p:spPr>
+          <a:xfrm>
+            <a:off x="548640" y="1188720"/>
+            <a:ext cx="5394960" cy="4846320"/>
           </a:xfrm>
           <a:prstGeom prst="rect">
             <a:avLst/>
           </a:prstGeom>
           <a:solidFill>
-            <a:srgbClr val="1A1A1A"/>
+            <a:srgbClr val="181818"/>
           </a:solidFill>
           <a:ln w="12700">
             <a:solidFill>
-              <a:srgbClr val="282828"/>
+              <a:srgbClr val="2A2A2A"/>
             </a:solidFill>
             <a:prstDash val="solid"/>
           </a:ln>
@@ -6410,14 +7206,14 @@
       </p:sp>
       <p:sp>
         <p:nvSpPr>
-          <p:cNvPr id="8" name="Text 6"/>
-          <p:cNvSpPr/>
-          <p:nvPr/>
-        </p:nvSpPr>
-        <p:spPr>
-          <a:xfrm>
-            <a:off x="1005840" y="1645920"/>
-            <a:ext cx="4572000" cy="365760"/>
+          <p:cNvPr id="9" name="Text 7"/>
+          <p:cNvSpPr/>
+          <p:nvPr/>
+        </p:nvSpPr>
+        <p:spPr>
+          <a:xfrm>
+            <a:off x="822960" y="1371600"/>
+            <a:ext cx="4846320" cy="365760"/>
           </a:xfrm>
           <a:prstGeom prst="rect">
             <a:avLst/>
@@ -6433,7 +7229,7 @@
               <a:buNone/>
             </a:pPr>
             <a:r>
-              <a:rPr lang="en-US" sz="1600" b="1" dirty="0">
+              <a:rPr lang="en-US" sz="1500" b="1" dirty="0">
                 <a:solidFill>
                   <a:srgbClr val="39FF14"/>
                 </a:solidFill>
@@ -6443,20 +7239,20 @@
               </a:rPr>
               <a:t>⚡ Station X1: Math Speedrun</a:t>
             </a:r>
-            <a:endParaRPr lang="en-US" sz="1600" dirty="0"/>
-          </a:p>
-        </p:txBody>
-      </p:sp>
-      <p:sp>
-        <p:nvSpPr>
-          <p:cNvPr id="9" name="Text 7"/>
-          <p:cNvSpPr/>
-          <p:nvPr/>
-        </p:nvSpPr>
-        <p:spPr>
-          <a:xfrm>
-            <a:off x="1005840" y="2194560"/>
-            <a:ext cx="4572000" cy="3657600"/>
+            <a:endParaRPr lang="en-US" sz="1500" dirty="0"/>
+          </a:p>
+        </p:txBody>
+      </p:sp>
+      <p:sp>
+        <p:nvSpPr>
+          <p:cNvPr id="10" name="Text 8"/>
+          <p:cNvSpPr/>
+          <p:nvPr/>
+        </p:nvSpPr>
+        <p:spPr>
+          <a:xfrm>
+            <a:off x="822960" y="1828800"/>
+            <a:ext cx="4846320" cy="4023360"/>
           </a:xfrm>
           <a:prstGeom prst="rect">
             <a:avLst/>
@@ -6470,12 +7266,12 @@
           <a:p>
             <a:pPr indent="0" marL="0">
               <a:lnSpc>
-                <a:spcPts val="1800"/>
-              </a:lnSpc>
-              <a:buNone/>
-            </a:pPr>
-            <a:r>
-              <a:rPr lang="en-US" sz="1100" dirty="0">
+                <a:spcPts val="1400"/>
+              </a:lnSpc>
+              <a:buNone/>
+            </a:pPr>
+            <a:r>
+              <a:rPr lang="en-US" sz="1000" dirty="0">
                 <a:solidFill>
                   <a:srgbClr val="FFFFFF"/>
                 </a:solidFill>
@@ -6485,55 +7281,75 @@
               </a:rPr>
               <a:t>CSV Template: sample_x1_questions.csv</a:t>
             </a:r>
-            <a:endParaRPr lang="en-US" sz="1100" dirty="0"/>
-          </a:p>
-          <a:p>
-            <a:pPr indent="0" marL="0">
-              <a:lnSpc>
-                <a:spcPts val="1800"/>
-              </a:lnSpc>
-              <a:buNone/>
-            </a:pPr>
-            <a:endParaRPr lang="en-US" sz="1100" dirty="0"/>
-          </a:p>
-          <a:p>
-            <a:pPr indent="0" marL="0">
-              <a:lnSpc>
-                <a:spcPts val="1800"/>
-              </a:lnSpc>
-              <a:buNone/>
-            </a:pPr>
-            <a:r>
-              <a:rPr lang="en-US" sz="1100" dirty="0">
-                <a:solidFill>
-                  <a:srgbClr val="FFFFFF"/>
-                </a:solidFill>
-                <a:latin typeface="Helvetica" pitchFamily="34" charset="0"/>
-                <a:ea typeface="Helvetica" pitchFamily="34" charset="-122"/>
-                <a:cs typeface="Helvetica" pitchFamily="34" charset="-120"/>
-              </a:rPr>
-              <a:t>Headers: station_id, question_text, choices, correct_answer, points, time_limit_sec</a:t>
-            </a:r>
-            <a:endParaRPr lang="en-US" sz="1100" dirty="0"/>
-          </a:p>
-          <a:p>
-            <a:pPr indent="0" marL="0">
-              <a:lnSpc>
-                <a:spcPts val="1800"/>
-              </a:lnSpc>
-              <a:buNone/>
-            </a:pPr>
-            <a:endParaRPr lang="en-US" sz="1100" dirty="0"/>
-          </a:p>
-          <a:p>
-            <a:pPr indent="0" marL="0">
-              <a:lnSpc>
-                <a:spcPts val="1800"/>
-              </a:lnSpc>
-              <a:buNone/>
-            </a:pPr>
-            <a:r>
-              <a:rPr lang="en-US" sz="1100" dirty="0">
+            <a:endParaRPr lang="en-US" sz="1000" dirty="0"/>
+          </a:p>
+          <a:p>
+            <a:pPr indent="0" marL="0">
+              <a:lnSpc>
+                <a:spcPts val="1400"/>
+              </a:lnSpc>
+              <a:buNone/>
+            </a:pPr>
+            <a:endParaRPr lang="en-US" sz="1000" dirty="0"/>
+          </a:p>
+          <a:p>
+            <a:pPr indent="0" marL="0">
+              <a:lnSpc>
+                <a:spcPts val="1400"/>
+              </a:lnSpc>
+              <a:buNone/>
+            </a:pPr>
+            <a:r>
+              <a:rPr lang="en-US" sz="1000" dirty="0">
+                <a:solidFill>
+                  <a:srgbClr val="FFFFFF"/>
+                </a:solidFill>
+                <a:latin typeface="Helvetica" pitchFamily="34" charset="0"/>
+                <a:ea typeface="Helvetica" pitchFamily="34" charset="-122"/>
+                <a:cs typeface="Helvetica" pitchFamily="34" charset="-120"/>
+              </a:rPr>
+              <a:t>Headers:</a:t>
+            </a:r>
+            <a:endParaRPr lang="en-US" sz="1000" dirty="0"/>
+          </a:p>
+          <a:p>
+            <a:pPr indent="0" marL="0">
+              <a:lnSpc>
+                <a:spcPts val="1400"/>
+              </a:lnSpc>
+              <a:buNone/>
+            </a:pPr>
+            <a:r>
+              <a:rPr lang="en-US" sz="1000" dirty="0">
+                <a:solidFill>
+                  <a:srgbClr val="FFFFFF"/>
+                </a:solidFill>
+                <a:latin typeface="Helvetica" pitchFamily="34" charset="0"/>
+                <a:ea typeface="Helvetica" pitchFamily="34" charset="-122"/>
+                <a:cs typeface="Helvetica" pitchFamily="34" charset="-120"/>
+              </a:rPr>
+              <a:t>station_id, question_text, choices, correct_answer, points, time_limit_sec</a:t>
+            </a:r>
+            <a:endParaRPr lang="en-US" sz="1000" dirty="0"/>
+          </a:p>
+          <a:p>
+            <a:pPr indent="0" marL="0">
+              <a:lnSpc>
+                <a:spcPts val="1400"/>
+              </a:lnSpc>
+              <a:buNone/>
+            </a:pPr>
+            <a:endParaRPr lang="en-US" sz="1000" dirty="0"/>
+          </a:p>
+          <a:p>
+            <a:pPr indent="0" marL="0">
+              <a:lnSpc>
+                <a:spcPts val="1400"/>
+              </a:lnSpc>
+              <a:buNone/>
+            </a:pPr>
+            <a:r>
+              <a:rPr lang="en-US" sz="1000" dirty="0">
                 <a:solidFill>
                   <a:srgbClr val="FFFFFF"/>
                 </a:solidFill>
@@ -6543,17 +7359,17 @@
               </a:rPr>
               <a:t>Writing Guidelines:</a:t>
             </a:r>
-            <a:endParaRPr lang="en-US" sz="1100" dirty="0"/>
-          </a:p>
-          <a:p>
-            <a:pPr indent="0" marL="0">
-              <a:lnSpc>
-                <a:spcPts val="1800"/>
-              </a:lnSpc>
-              <a:buNone/>
-            </a:pPr>
-            <a:r>
-              <a:rPr lang="en-US" sz="1100" dirty="0">
+            <a:endParaRPr lang="en-US" sz="1000" dirty="0"/>
+          </a:p>
+          <a:p>
+            <a:pPr indent="0" marL="0">
+              <a:lnSpc>
+                <a:spcPts val="1400"/>
+              </a:lnSpc>
+              <a:buNone/>
+            </a:pPr>
+            <a:r>
+              <a:rPr lang="en-US" sz="1000" dirty="0">
                 <a:solidFill>
                   <a:srgbClr val="FFFFFF"/>
                 </a:solidFill>
@@ -6563,17 +7379,17 @@
               </a:rPr>
               <a:t>• Target Count: 20 to 30 math problems.</a:t>
             </a:r>
-            <a:endParaRPr lang="en-US" sz="1100" dirty="0"/>
-          </a:p>
-          <a:p>
-            <a:pPr indent="0" marL="0">
-              <a:lnSpc>
-                <a:spcPts val="1800"/>
-              </a:lnSpc>
-              <a:buNone/>
-            </a:pPr>
-            <a:r>
-              <a:rPr lang="en-US" sz="1100" dirty="0">
+            <a:endParaRPr lang="en-US" sz="1000" dirty="0"/>
+          </a:p>
+          <a:p>
+            <a:pPr indent="0" marL="0">
+              <a:lnSpc>
+                <a:spcPts val="1400"/>
+              </a:lnSpc>
+              <a:buNone/>
+            </a:pPr>
+            <a:r>
+              <a:rPr lang="en-US" sz="1000" dirty="0">
                 <a:solidFill>
                   <a:srgbClr val="FFFFFF"/>
                 </a:solidFill>
@@ -6583,17 +7399,17 @@
               </a:rPr>
               <a:t>• Question Format: Clear arithmetic expressions (e.g. 245 + 179 = ?).</a:t>
             </a:r>
-            <a:endParaRPr lang="en-US" sz="1100" dirty="0"/>
-          </a:p>
-          <a:p>
-            <a:pPr indent="0" marL="0">
-              <a:lnSpc>
-                <a:spcPts val="1800"/>
-              </a:lnSpc>
-              <a:buNone/>
-            </a:pPr>
-            <a:r>
-              <a:rPr lang="en-US" sz="1100" dirty="0">
+            <a:endParaRPr lang="en-US" sz="1000" dirty="0"/>
+          </a:p>
+          <a:p>
+            <a:pPr indent="0" marL="0">
+              <a:lnSpc>
+                <a:spcPts val="1400"/>
+              </a:lnSpc>
+              <a:buNone/>
+            </a:pPr>
+            <a:r>
+              <a:rPr lang="en-US" sz="1000" dirty="0">
                 <a:solidFill>
                   <a:srgbClr val="FFFFFF"/>
                 </a:solidFill>
@@ -6603,17 +7419,17 @@
               </a:rPr>
               <a:t>• Correct Answer: Exact integer or decimal string (e.g. 424).</a:t>
             </a:r>
-            <a:endParaRPr lang="en-US" sz="1100" dirty="0"/>
-          </a:p>
-          <a:p>
-            <a:pPr indent="0" marL="0">
-              <a:lnSpc>
-                <a:spcPts val="1800"/>
-              </a:lnSpc>
-              <a:buNone/>
-            </a:pPr>
-            <a:r>
-              <a:rPr lang="en-US" sz="1100" dirty="0">
+            <a:endParaRPr lang="en-US" sz="1000" dirty="0"/>
+          </a:p>
+          <a:p>
+            <a:pPr indent="0" marL="0">
+              <a:lnSpc>
+                <a:spcPts val="1400"/>
+              </a:lnSpc>
+              <a:buNone/>
+            </a:pPr>
+            <a:r>
+              <a:rPr lang="en-US" sz="1000" dirty="0">
                 <a:solidFill>
                   <a:srgbClr val="FFFFFF"/>
                 </a:solidFill>
@@ -6623,30 +7439,30 @@
               </a:rPr>
               <a:t>• Choices Column: Leave empty (numpad input used).</a:t>
             </a:r>
-            <a:endParaRPr lang="en-US" sz="1100" dirty="0"/>
-          </a:p>
-        </p:txBody>
-      </p:sp>
-      <p:sp>
-        <p:nvSpPr>
-          <p:cNvPr id="10" name="Shape 8"/>
-          <p:cNvSpPr/>
-          <p:nvPr/>
-        </p:nvSpPr>
-        <p:spPr>
-          <a:xfrm>
-            <a:off x="6126480" y="1371600"/>
-            <a:ext cx="5120640" cy="4754880"/>
+            <a:endParaRPr lang="en-US" sz="1000" dirty="0"/>
+          </a:p>
+        </p:txBody>
+      </p:sp>
+      <p:sp>
+        <p:nvSpPr>
+          <p:cNvPr id="11" name="Shape 9"/>
+          <p:cNvSpPr/>
+          <p:nvPr/>
+        </p:nvSpPr>
+        <p:spPr>
+          <a:xfrm>
+            <a:off x="6217920" y="1188720"/>
+            <a:ext cx="5394960" cy="4846320"/>
           </a:xfrm>
           <a:prstGeom prst="rect">
             <a:avLst/>
           </a:prstGeom>
           <a:solidFill>
-            <a:srgbClr val="1A1A1A"/>
+            <a:srgbClr val="181818"/>
           </a:solidFill>
           <a:ln w="12700">
             <a:solidFill>
-              <a:srgbClr val="282828"/>
+              <a:srgbClr val="2A2A2A"/>
             </a:solidFill>
             <a:prstDash val="solid"/>
           </a:ln>
@@ -6654,14 +7470,14 @@
       </p:sp>
       <p:sp>
         <p:nvSpPr>
-          <p:cNvPr id="11" name="Text 9"/>
-          <p:cNvSpPr/>
-          <p:nvPr/>
-        </p:nvSpPr>
-        <p:spPr>
-          <a:xfrm>
-            <a:off x="6400800" y="1645920"/>
-            <a:ext cx="4572000" cy="365760"/>
+          <p:cNvPr id="12" name="Text 10"/>
+          <p:cNvSpPr/>
+          <p:nvPr/>
+        </p:nvSpPr>
+        <p:spPr>
+          <a:xfrm>
+            <a:off x="6492240" y="1371600"/>
+            <a:ext cx="4846320" cy="365760"/>
           </a:xfrm>
           <a:prstGeom prst="rect">
             <a:avLst/>
@@ -6677,7 +7493,7 @@
               <a:buNone/>
             </a:pPr>
             <a:r>
-              <a:rPr lang="en-US" sz="1600" b="1" dirty="0">
+              <a:rPr lang="en-US" sz="1500" b="1" dirty="0">
                 <a:solidFill>
                   <a:srgbClr val="00E5FF"/>
                 </a:solidFill>
@@ -6687,20 +7503,20 @@
               </a:rPr>
               <a:t>🧠 Station X2: Cerdas Cermat</a:t>
             </a:r>
-            <a:endParaRPr lang="en-US" sz="1600" dirty="0"/>
-          </a:p>
-        </p:txBody>
-      </p:sp>
-      <p:sp>
-        <p:nvSpPr>
-          <p:cNvPr id="12" name="Text 10"/>
-          <p:cNvSpPr/>
-          <p:nvPr/>
-        </p:nvSpPr>
-        <p:spPr>
-          <a:xfrm>
-            <a:off x="6400800" y="2194560"/>
-            <a:ext cx="4572000" cy="3657600"/>
+            <a:endParaRPr lang="en-US" sz="1500" dirty="0"/>
+          </a:p>
+        </p:txBody>
+      </p:sp>
+      <p:sp>
+        <p:nvSpPr>
+          <p:cNvPr id="13" name="Text 11"/>
+          <p:cNvSpPr/>
+          <p:nvPr/>
+        </p:nvSpPr>
+        <p:spPr>
+          <a:xfrm>
+            <a:off x="6492240" y="1828800"/>
+            <a:ext cx="4846320" cy="4023360"/>
           </a:xfrm>
           <a:prstGeom prst="rect">
             <a:avLst/>
@@ -6714,12 +7530,12 @@
           <a:p>
             <a:pPr indent="0" marL="0">
               <a:lnSpc>
-                <a:spcPts val="1800"/>
-              </a:lnSpc>
-              <a:buNone/>
-            </a:pPr>
-            <a:r>
-              <a:rPr lang="en-US" sz="1100" dirty="0">
+                <a:spcPts val="1400"/>
+              </a:lnSpc>
+              <a:buNone/>
+            </a:pPr>
+            <a:r>
+              <a:rPr lang="en-US" sz="1000" dirty="0">
                 <a:solidFill>
                   <a:srgbClr val="FFFFFF"/>
                 </a:solidFill>
@@ -6729,55 +7545,75 @@
               </a:rPr>
               <a:t>CSV Template: sample_x2_questions.csv</a:t>
             </a:r>
-            <a:endParaRPr lang="en-US" sz="1100" dirty="0"/>
-          </a:p>
-          <a:p>
-            <a:pPr indent="0" marL="0">
-              <a:lnSpc>
-                <a:spcPts val="1800"/>
-              </a:lnSpc>
-              <a:buNone/>
-            </a:pPr>
-            <a:endParaRPr lang="en-US" sz="1100" dirty="0"/>
-          </a:p>
-          <a:p>
-            <a:pPr indent="0" marL="0">
-              <a:lnSpc>
-                <a:spcPts val="1800"/>
-              </a:lnSpc>
-              <a:buNone/>
-            </a:pPr>
-            <a:r>
-              <a:rPr lang="en-US" sz="1100" dirty="0">
-                <a:solidFill>
-                  <a:srgbClr val="FFFFFF"/>
-                </a:solidFill>
-                <a:latin typeface="Helvetica" pitchFamily="34" charset="0"/>
-                <a:ea typeface="Helvetica" pitchFamily="34" charset="-122"/>
-                <a:cs typeface="Helvetica" pitchFamily="34" charset="-120"/>
-              </a:rPr>
-              <a:t>Headers: station_id, question_text, choices, correct_answer, points, time_limit_sec</a:t>
-            </a:r>
-            <a:endParaRPr lang="en-US" sz="1100" dirty="0"/>
-          </a:p>
-          <a:p>
-            <a:pPr indent="0" marL="0">
-              <a:lnSpc>
-                <a:spcPts val="1800"/>
-              </a:lnSpc>
-              <a:buNone/>
-            </a:pPr>
-            <a:endParaRPr lang="en-US" sz="1100" dirty="0"/>
-          </a:p>
-          <a:p>
-            <a:pPr indent="0" marL="0">
-              <a:lnSpc>
-                <a:spcPts val="1800"/>
-              </a:lnSpc>
-              <a:buNone/>
-            </a:pPr>
-            <a:r>
-              <a:rPr lang="en-US" sz="1100" dirty="0">
+            <a:endParaRPr lang="en-US" sz="1000" dirty="0"/>
+          </a:p>
+          <a:p>
+            <a:pPr indent="0" marL="0">
+              <a:lnSpc>
+                <a:spcPts val="1400"/>
+              </a:lnSpc>
+              <a:buNone/>
+            </a:pPr>
+            <a:endParaRPr lang="en-US" sz="1000" dirty="0"/>
+          </a:p>
+          <a:p>
+            <a:pPr indent="0" marL="0">
+              <a:lnSpc>
+                <a:spcPts val="1400"/>
+              </a:lnSpc>
+              <a:buNone/>
+            </a:pPr>
+            <a:r>
+              <a:rPr lang="en-US" sz="1000" dirty="0">
+                <a:solidFill>
+                  <a:srgbClr val="FFFFFF"/>
+                </a:solidFill>
+                <a:latin typeface="Helvetica" pitchFamily="34" charset="0"/>
+                <a:ea typeface="Helvetica" pitchFamily="34" charset="-122"/>
+                <a:cs typeface="Helvetica" pitchFamily="34" charset="-120"/>
+              </a:rPr>
+              <a:t>Headers:</a:t>
+            </a:r>
+            <a:endParaRPr lang="en-US" sz="1000" dirty="0"/>
+          </a:p>
+          <a:p>
+            <a:pPr indent="0" marL="0">
+              <a:lnSpc>
+                <a:spcPts val="1400"/>
+              </a:lnSpc>
+              <a:buNone/>
+            </a:pPr>
+            <a:r>
+              <a:rPr lang="en-US" sz="1000" dirty="0">
+                <a:solidFill>
+                  <a:srgbClr val="FFFFFF"/>
+                </a:solidFill>
+                <a:latin typeface="Helvetica" pitchFamily="34" charset="0"/>
+                <a:ea typeface="Helvetica" pitchFamily="34" charset="-122"/>
+                <a:cs typeface="Helvetica" pitchFamily="34" charset="-120"/>
+              </a:rPr>
+              <a:t>station_id, question_text, choices, correct_answer, points, time_limit_sec</a:t>
+            </a:r>
+            <a:endParaRPr lang="en-US" sz="1000" dirty="0"/>
+          </a:p>
+          <a:p>
+            <a:pPr indent="0" marL="0">
+              <a:lnSpc>
+                <a:spcPts val="1400"/>
+              </a:lnSpc>
+              <a:buNone/>
+            </a:pPr>
+            <a:endParaRPr lang="en-US" sz="1000" dirty="0"/>
+          </a:p>
+          <a:p>
+            <a:pPr indent="0" marL="0">
+              <a:lnSpc>
+                <a:spcPts val="1400"/>
+              </a:lnSpc>
+              <a:buNone/>
+            </a:pPr>
+            <a:r>
+              <a:rPr lang="en-US" sz="1000" dirty="0">
                 <a:solidFill>
                   <a:srgbClr val="FFFFFF"/>
                 </a:solidFill>
@@ -6787,17 +7623,17 @@
               </a:rPr>
               <a:t>Writing Guidelines:</a:t>
             </a:r>
-            <a:endParaRPr lang="en-US" sz="1100" dirty="0"/>
-          </a:p>
-          <a:p>
-            <a:pPr indent="0" marL="0">
-              <a:lnSpc>
-                <a:spcPts val="1800"/>
-              </a:lnSpc>
-              <a:buNone/>
-            </a:pPr>
-            <a:r>
-              <a:rPr lang="en-US" sz="1100" dirty="0">
+            <a:endParaRPr lang="en-US" sz="1000" dirty="0"/>
+          </a:p>
+          <a:p>
+            <a:pPr indent="0" marL="0">
+              <a:lnSpc>
+                <a:spcPts val="1400"/>
+              </a:lnSpc>
+              <a:buNone/>
+            </a:pPr>
+            <a:r>
+              <a:rPr lang="en-US" sz="1000" dirty="0">
                 <a:solidFill>
                   <a:srgbClr val="FFFFFF"/>
                 </a:solidFill>
@@ -6807,17 +7643,17 @@
               </a:rPr>
               <a:t>• Target Count: 15 multiple choice questions.</a:t>
             </a:r>
-            <a:endParaRPr lang="en-US" sz="1100" dirty="0"/>
-          </a:p>
-          <a:p>
-            <a:pPr indent="0" marL="0">
-              <a:lnSpc>
-                <a:spcPts val="1800"/>
-              </a:lnSpc>
-              <a:buNone/>
-            </a:pPr>
-            <a:r>
-              <a:rPr lang="en-US" sz="1100" dirty="0">
+            <a:endParaRPr lang="en-US" sz="1000" dirty="0"/>
+          </a:p>
+          <a:p>
+            <a:pPr indent="0" marL="0">
+              <a:lnSpc>
+                <a:spcPts val="1400"/>
+              </a:lnSpc>
+              <a:buNone/>
+            </a:pPr>
+            <a:r>
+              <a:rPr lang="en-US" sz="1000" dirty="0">
                 <a:solidFill>
                   <a:srgbClr val="FFFFFF"/>
                 </a:solidFill>
@@ -6827,17 +7663,17 @@
               </a:rPr>
               <a:t>• Question Max Length: Max 120 characters.</a:t>
             </a:r>
-            <a:endParaRPr lang="en-US" sz="1100" dirty="0"/>
-          </a:p>
-          <a:p>
-            <a:pPr indent="0" marL="0">
-              <a:lnSpc>
-                <a:spcPts val="1800"/>
-              </a:lnSpc>
-              <a:buNone/>
-            </a:pPr>
-            <a:r>
-              <a:rPr lang="en-US" sz="1100" dirty="0">
+            <a:endParaRPr lang="en-US" sz="1000" dirty="0"/>
+          </a:p>
+          <a:p>
+            <a:pPr indent="0" marL="0">
+              <a:lnSpc>
+                <a:spcPts val="1400"/>
+              </a:lnSpc>
+              <a:buNone/>
+            </a:pPr>
+            <a:r>
+              <a:rPr lang="en-US" sz="1000" dirty="0">
                 <a:solidFill>
                   <a:srgbClr val="FFFFFF"/>
                 </a:solidFill>
@@ -6847,17 +7683,17 @@
               </a:rPr>
               <a:t>• Choices Format: Exactly 4 choices separated by `|` (e.g. A. Choice|B. Choice|C. Choice|D. Choice).</a:t>
             </a:r>
-            <a:endParaRPr lang="en-US" sz="1100" dirty="0"/>
-          </a:p>
-          <a:p>
-            <a:pPr indent="0" marL="0">
-              <a:lnSpc>
-                <a:spcPts val="1800"/>
-              </a:lnSpc>
-              <a:buNone/>
-            </a:pPr>
-            <a:r>
-              <a:rPr lang="en-US" sz="1100" dirty="0">
+            <a:endParaRPr lang="en-US" sz="1000" dirty="0"/>
+          </a:p>
+          <a:p>
+            <a:pPr indent="0" marL="0">
+              <a:lnSpc>
+                <a:spcPts val="1400"/>
+              </a:lnSpc>
+              <a:buNone/>
+            </a:pPr>
+            <a:r>
+              <a:rPr lang="en-US" sz="1000" dirty="0">
                 <a:solidFill>
                   <a:srgbClr val="FFFFFF"/>
                 </a:solidFill>
@@ -6867,7 +7703,7 @@
               </a:rPr>
               <a:t>• Correct Answer: Single uppercase letter A, B, C, or D.</a:t>
             </a:r>
-            <a:endParaRPr lang="en-US" sz="1100" dirty="0"/>
+            <a:endParaRPr lang="en-US" sz="1000" dirty="0"/>
           </a:p>
         </p:txBody>
       </p:sp>
@@ -6905,7 +7741,7 @@
         <p:spPr>
           <a:xfrm>
             <a:off x="0" y="0"/>
-            <a:ext cx="9144000" cy="5143500"/>
+            <a:ext cx="12188952" cy="6858000"/>
           </a:xfrm>
           <a:prstGeom prst="rect">
             <a:avLst/>
@@ -6925,7 +7761,7 @@
         <p:spPr>
           <a:xfrm>
             <a:off x="0" y="0"/>
-            <a:ext cx="9144000" cy="73152"/>
+            <a:ext cx="12188952" cy="73152"/>
           </a:xfrm>
           <a:prstGeom prst="rect">
             <a:avLst/>
@@ -6944,8 +7780,8 @@
         </p:nvSpPr>
         <p:spPr>
           <a:xfrm>
-            <a:off x="731520" y="365760"/>
-            <a:ext cx="7315200" cy="274320"/>
+            <a:off x="548640" y="320040"/>
+            <a:ext cx="7315200" cy="228600"/>
           </a:xfrm>
           <a:prstGeom prst="rect">
             <a:avLst/>
@@ -6961,7 +7797,7 @@
               <a:buNone/>
             </a:pPr>
             <a:r>
-              <a:rPr lang="en-US" sz="1000" b="1" dirty="0">
+              <a:rPr lang="en-US" sz="900" b="1" dirty="0">
                 <a:solidFill>
                   <a:srgbClr val="39FF14"/>
                 </a:solidFill>
@@ -6971,7 +7807,7 @@
               </a:rPr>
               <a:t>FOR GAME CONTENT WRITERS</a:t>
             </a:r>
-            <a:endParaRPr lang="en-US" sz="1000" dirty="0"/>
+            <a:endParaRPr lang="en-US" sz="900" dirty="0"/>
           </a:p>
         </p:txBody>
       </p:sp>
@@ -6983,8 +7819,8 @@
         </p:nvSpPr>
         <p:spPr>
           <a:xfrm>
-            <a:off x="731520" y="640080"/>
-            <a:ext cx="10058400" cy="548640"/>
+            <a:off x="548640" y="548640"/>
+            <a:ext cx="11064240" cy="457200"/>
           </a:xfrm>
           <a:prstGeom prst="rect">
             <a:avLst/>
@@ -7000,7 +7836,7 @@
               <a:buNone/>
             </a:pPr>
             <a:r>
-              <a:rPr lang="en-US" sz="2400" b="1" dirty="0">
+              <a:rPr lang="en-US" sz="2200" b="1" dirty="0">
                 <a:solidFill>
                   <a:srgbClr val="FFFFFF"/>
                 </a:solidFill>
@@ -7010,20 +7846,40 @@
               </a:rPr>
               <a:t>Station X3 &amp; X4 Content Requirements</a:t>
             </a:r>
-            <a:endParaRPr lang="en-US" sz="2400" dirty="0"/>
-          </a:p>
-        </p:txBody>
-      </p:sp>
-      <p:sp>
-        <p:nvSpPr>
-          <p:cNvPr id="6" name="Text 4"/>
-          <p:cNvSpPr/>
-          <p:nvPr/>
-        </p:nvSpPr>
-        <p:spPr>
-          <a:xfrm>
-            <a:off x="731520" y="6492240"/>
-            <a:ext cx="9144000" cy="274320"/>
+            <a:endParaRPr lang="en-US" sz="2200" dirty="0"/>
+          </a:p>
+        </p:txBody>
+      </p:sp>
+      <p:sp>
+        <p:nvSpPr>
+          <p:cNvPr id="6" name="Shape 4"/>
+          <p:cNvSpPr/>
+          <p:nvPr/>
+        </p:nvSpPr>
+        <p:spPr>
+          <a:xfrm>
+            <a:off x="548640" y="6217920"/>
+            <a:ext cx="11091672" cy="18288"/>
+          </a:xfrm>
+          <a:prstGeom prst="rect">
+            <a:avLst/>
+          </a:prstGeom>
+          <a:solidFill>
+            <a:srgbClr val="2A2A2A"/>
+          </a:solidFill>
+          <a:ln/>
+        </p:spPr>
+      </p:sp>
+      <p:sp>
+        <p:nvSpPr>
+          <p:cNvPr id="7" name="Text 5"/>
+          <p:cNvSpPr/>
+          <p:nvPr/>
+        </p:nvSpPr>
+        <p:spPr>
+          <a:xfrm>
+            <a:off x="548640" y="6309360"/>
+            <a:ext cx="11091672" cy="274320"/>
           </a:xfrm>
           <a:prstGeom prst="rect">
             <a:avLst/>
@@ -7047,7 +7903,7 @@
                 <a:ea typeface="Helvetica" pitchFamily="34" charset="-122"/>
                 <a:cs typeface="Helvetica" pitchFamily="34" charset="-120"/>
               </a:rPr>
-              <a:t>Infinix XPAD 30 Pro x Ruangguru  |  Clash of Unxpadted</a:t>
+              <a:t>Infinix XPAD 30 Pro × Ruangguru  |  Clash of Unxpadted Design System PRD</a:t>
             </a:r>
             <a:endParaRPr lang="en-US" sz="900" dirty="0"/>
           </a:p>
@@ -7055,24 +7911,24 @@
       </p:sp>
       <p:sp>
         <p:nvSpPr>
-          <p:cNvPr id="7" name="Shape 5"/>
-          <p:cNvSpPr/>
-          <p:nvPr/>
-        </p:nvSpPr>
-        <p:spPr>
-          <a:xfrm>
-            <a:off x="731520" y="1371600"/>
-            <a:ext cx="5120640" cy="4754880"/>
+          <p:cNvPr id="8" name="Shape 6"/>
+          <p:cNvSpPr/>
+          <p:nvPr/>
+        </p:nvSpPr>
+        <p:spPr>
+          <a:xfrm>
+            <a:off x="548640" y="1188720"/>
+            <a:ext cx="5394960" cy="4846320"/>
           </a:xfrm>
           <a:prstGeom prst="rect">
             <a:avLst/>
           </a:prstGeom>
           <a:solidFill>
-            <a:srgbClr val="1A1A1A"/>
+            <a:srgbClr val="181818"/>
           </a:solidFill>
           <a:ln w="12700">
             <a:solidFill>
-              <a:srgbClr val="282828"/>
+              <a:srgbClr val="2A2A2A"/>
             </a:solidFill>
             <a:prstDash val="solid"/>
           </a:ln>
@@ -7080,14 +7936,14 @@
       </p:sp>
       <p:sp>
         <p:nvSpPr>
-          <p:cNvPr id="8" name="Text 6"/>
-          <p:cNvSpPr/>
-          <p:nvPr/>
-        </p:nvSpPr>
-        <p:spPr>
-          <a:xfrm>
-            <a:off x="1005840" y="1645920"/>
-            <a:ext cx="4572000" cy="365760"/>
+          <p:cNvPr id="9" name="Text 7"/>
+          <p:cNvSpPr/>
+          <p:nvPr/>
+        </p:nvSpPr>
+        <p:spPr>
+          <a:xfrm>
+            <a:off x="822960" y="1371600"/>
+            <a:ext cx="4846320" cy="365760"/>
           </a:xfrm>
           <a:prstGeom prst="rect">
             <a:avLst/>
@@ -7103,7 +7959,7 @@
               <a:buNone/>
             </a:pPr>
             <a:r>
-              <a:rPr lang="en-US" sz="1600" b="1" dirty="0">
+              <a:rPr lang="en-US" sz="1500" b="1" dirty="0">
                 <a:solidFill>
                   <a:srgbClr val="A855F7"/>
                 </a:solidFill>
@@ -7113,20 +7969,20 @@
               </a:rPr>
               <a:t>🔍 Station X3: AI Unsolved Case</a:t>
             </a:r>
-            <a:endParaRPr lang="en-US" sz="1600" dirty="0"/>
-          </a:p>
-        </p:txBody>
-      </p:sp>
-      <p:sp>
-        <p:nvSpPr>
-          <p:cNvPr id="9" name="Text 7"/>
-          <p:cNvSpPr/>
-          <p:nvPr/>
-        </p:nvSpPr>
-        <p:spPr>
-          <a:xfrm>
-            <a:off x="1005840" y="2194560"/>
-            <a:ext cx="4572000" cy="3657600"/>
+            <a:endParaRPr lang="en-US" sz="1500" dirty="0"/>
+          </a:p>
+        </p:txBody>
+      </p:sp>
+      <p:sp>
+        <p:nvSpPr>
+          <p:cNvPr id="10" name="Text 8"/>
+          <p:cNvSpPr/>
+          <p:nvPr/>
+        </p:nvSpPr>
+        <p:spPr>
+          <a:xfrm>
+            <a:off x="822960" y="1828800"/>
+            <a:ext cx="4846320" cy="4023360"/>
           </a:xfrm>
           <a:prstGeom prst="rect">
             <a:avLst/>
@@ -7140,12 +7996,12 @@
           <a:p>
             <a:pPr indent="0" marL="0">
               <a:lnSpc>
-                <a:spcPts val="1800"/>
-              </a:lnSpc>
-              <a:buNone/>
-            </a:pPr>
-            <a:r>
-              <a:rPr lang="en-US" sz="1100" dirty="0">
+                <a:spcPts val="1400"/>
+              </a:lnSpc>
+              <a:buNone/>
+            </a:pPr>
+            <a:r>
+              <a:rPr lang="en-US" sz="1000" dirty="0">
                 <a:solidFill>
                   <a:srgbClr val="FFFFFF"/>
                 </a:solidFill>
@@ -7155,55 +8011,75 @@
               </a:rPr>
               <a:t>CSV Template: sample_x3_questions.csv</a:t>
             </a:r>
-            <a:endParaRPr lang="en-US" sz="1100" dirty="0"/>
-          </a:p>
-          <a:p>
-            <a:pPr indent="0" marL="0">
-              <a:lnSpc>
-                <a:spcPts val="1800"/>
-              </a:lnSpc>
-              <a:buNone/>
-            </a:pPr>
-            <a:endParaRPr lang="en-US" sz="1100" dirty="0"/>
-          </a:p>
-          <a:p>
-            <a:pPr indent="0" marL="0">
-              <a:lnSpc>
-                <a:spcPts val="1800"/>
-              </a:lnSpc>
-              <a:buNone/>
-            </a:pPr>
-            <a:r>
-              <a:rPr lang="en-US" sz="1100" dirty="0">
-                <a:solidFill>
-                  <a:srgbClr val="FFFFFF"/>
-                </a:solidFill>
-                <a:latin typeface="Helvetica" pitchFamily="34" charset="0"/>
-                <a:ea typeface="Helvetica" pitchFamily="34" charset="-122"/>
-                <a:cs typeface="Helvetica" pitchFamily="34" charset="-120"/>
-              </a:rPr>
-              <a:t>Headers: station_id, title, location, time, incident, expected_suspect, expected_reason</a:t>
-            </a:r>
-            <a:endParaRPr lang="en-US" sz="1100" dirty="0"/>
-          </a:p>
-          <a:p>
-            <a:pPr indent="0" marL="0">
-              <a:lnSpc>
-                <a:spcPts val="1800"/>
-              </a:lnSpc>
-              <a:buNone/>
-            </a:pPr>
-            <a:endParaRPr lang="en-US" sz="1100" dirty="0"/>
-          </a:p>
-          <a:p>
-            <a:pPr indent="0" marL="0">
-              <a:lnSpc>
-                <a:spcPts val="1800"/>
-              </a:lnSpc>
-              <a:buNone/>
-            </a:pPr>
-            <a:r>
-              <a:rPr lang="en-US" sz="1100" dirty="0">
+            <a:endParaRPr lang="en-US" sz="1000" dirty="0"/>
+          </a:p>
+          <a:p>
+            <a:pPr indent="0" marL="0">
+              <a:lnSpc>
+                <a:spcPts val="1400"/>
+              </a:lnSpc>
+              <a:buNone/>
+            </a:pPr>
+            <a:endParaRPr lang="en-US" sz="1000" dirty="0"/>
+          </a:p>
+          <a:p>
+            <a:pPr indent="0" marL="0">
+              <a:lnSpc>
+                <a:spcPts val="1400"/>
+              </a:lnSpc>
+              <a:buNone/>
+            </a:pPr>
+            <a:r>
+              <a:rPr lang="en-US" sz="1000" dirty="0">
+                <a:solidFill>
+                  <a:srgbClr val="FFFFFF"/>
+                </a:solidFill>
+                <a:latin typeface="Helvetica" pitchFamily="34" charset="0"/>
+                <a:ea typeface="Helvetica" pitchFamily="34" charset="-122"/>
+                <a:cs typeface="Helvetica" pitchFamily="34" charset="-120"/>
+              </a:rPr>
+              <a:t>Headers:</a:t>
+            </a:r>
+            <a:endParaRPr lang="en-US" sz="1000" dirty="0"/>
+          </a:p>
+          <a:p>
+            <a:pPr indent="0" marL="0">
+              <a:lnSpc>
+                <a:spcPts val="1400"/>
+              </a:lnSpc>
+              <a:buNone/>
+            </a:pPr>
+            <a:r>
+              <a:rPr lang="en-US" sz="1000" dirty="0">
+                <a:solidFill>
+                  <a:srgbClr val="FFFFFF"/>
+                </a:solidFill>
+                <a:latin typeface="Helvetica" pitchFamily="34" charset="0"/>
+                <a:ea typeface="Helvetica" pitchFamily="34" charset="-122"/>
+                <a:cs typeface="Helvetica" pitchFamily="34" charset="-120"/>
+              </a:rPr>
+              <a:t>station_id, title, location, time, incident, expected_suspect, expected_reason</a:t>
+            </a:r>
+            <a:endParaRPr lang="en-US" sz="1000" dirty="0"/>
+          </a:p>
+          <a:p>
+            <a:pPr indent="0" marL="0">
+              <a:lnSpc>
+                <a:spcPts val="1400"/>
+              </a:lnSpc>
+              <a:buNone/>
+            </a:pPr>
+            <a:endParaRPr lang="en-US" sz="1000" dirty="0"/>
+          </a:p>
+          <a:p>
+            <a:pPr indent="0" marL="0">
+              <a:lnSpc>
+                <a:spcPts val="1400"/>
+              </a:lnSpc>
+              <a:buNone/>
+            </a:pPr>
+            <a:r>
+              <a:rPr lang="en-US" sz="1000" dirty="0">
                 <a:solidFill>
                   <a:srgbClr val="FFFFFF"/>
                 </a:solidFill>
@@ -7213,17 +8089,17 @@
               </a:rPr>
               <a:t>Writing Guidelines:</a:t>
             </a:r>
-            <a:endParaRPr lang="en-US" sz="1100" dirty="0"/>
-          </a:p>
-          <a:p>
-            <a:pPr indent="0" marL="0">
-              <a:lnSpc>
-                <a:spcPts val="1800"/>
-              </a:lnSpc>
-              <a:buNone/>
-            </a:pPr>
-            <a:r>
-              <a:rPr lang="en-US" sz="1100" dirty="0">
+            <a:endParaRPr lang="en-US" sz="1000" dirty="0"/>
+          </a:p>
+          <a:p>
+            <a:pPr indent="0" marL="0">
+              <a:lnSpc>
+                <a:spcPts val="1400"/>
+              </a:lnSpc>
+              <a:buNone/>
+            </a:pPr>
+            <a:r>
+              <a:rPr lang="en-US" sz="1000" dirty="0">
                 <a:solidFill>
                   <a:srgbClr val="FFFFFF"/>
                 </a:solidFill>
@@ -7233,17 +8109,17 @@
               </a:rPr>
               <a:t>• Incident Narrative: Max 200 characters describing the mystery.</a:t>
             </a:r>
-            <a:endParaRPr lang="en-US" sz="1100" dirty="0"/>
-          </a:p>
-          <a:p>
-            <a:pPr indent="0" marL="0">
-              <a:lnSpc>
-                <a:spcPts val="1800"/>
-              </a:lnSpc>
-              <a:buNone/>
-            </a:pPr>
-            <a:r>
-              <a:rPr lang="en-US" sz="1100" dirty="0">
+            <a:endParaRPr lang="en-US" sz="1000" dirty="0"/>
+          </a:p>
+          <a:p>
+            <a:pPr indent="0" marL="0">
+              <a:lnSpc>
+                <a:spcPts val="1400"/>
+              </a:lnSpc>
+              <a:buNone/>
+            </a:pPr>
+            <a:r>
+              <a:rPr lang="en-US" sz="1000" dirty="0">
                 <a:solidFill>
                   <a:srgbClr val="FFFFFF"/>
                 </a:solidFill>
@@ -7253,17 +8129,17 @@
               </a:rPr>
               <a:t>• Expected Suspect: Suspect ID (e.g. dika, sita, boni).</a:t>
             </a:r>
-            <a:endParaRPr lang="en-US" sz="1100" dirty="0"/>
-          </a:p>
-          <a:p>
-            <a:pPr indent="0" marL="0">
-              <a:lnSpc>
-                <a:spcPts val="1800"/>
-              </a:lnSpc>
-              <a:buNone/>
-            </a:pPr>
-            <a:r>
-              <a:rPr lang="en-US" sz="1100" dirty="0">
+            <a:endParaRPr lang="en-US" sz="1000" dirty="0"/>
+          </a:p>
+          <a:p>
+            <a:pPr indent="0" marL="0">
+              <a:lnSpc>
+                <a:spcPts val="1400"/>
+              </a:lnSpc>
+              <a:buNone/>
+            </a:pPr>
+            <a:r>
+              <a:rPr lang="en-US" sz="1000" dirty="0">
                 <a:solidFill>
                   <a:srgbClr val="FFFFFF"/>
                 </a:solidFill>
@@ -7273,30 +8149,30 @@
               </a:rPr>
               <a:t>• Expected Reason: Key clue bullet points for GM manual grading.</a:t>
             </a:r>
-            <a:endParaRPr lang="en-US" sz="1100" dirty="0"/>
-          </a:p>
-        </p:txBody>
-      </p:sp>
-      <p:sp>
-        <p:nvSpPr>
-          <p:cNvPr id="10" name="Shape 8"/>
-          <p:cNvSpPr/>
-          <p:nvPr/>
-        </p:nvSpPr>
-        <p:spPr>
-          <a:xfrm>
-            <a:off x="6126480" y="1371600"/>
-            <a:ext cx="5120640" cy="4754880"/>
+            <a:endParaRPr lang="en-US" sz="1000" dirty="0"/>
+          </a:p>
+        </p:txBody>
+      </p:sp>
+      <p:sp>
+        <p:nvSpPr>
+          <p:cNvPr id="11" name="Shape 9"/>
+          <p:cNvSpPr/>
+          <p:nvPr/>
+        </p:nvSpPr>
+        <p:spPr>
+          <a:xfrm>
+            <a:off x="6217920" y="1188720"/>
+            <a:ext cx="5394960" cy="4846320"/>
           </a:xfrm>
           <a:prstGeom prst="rect">
             <a:avLst/>
           </a:prstGeom>
           <a:solidFill>
-            <a:srgbClr val="1A1A1A"/>
+            <a:srgbClr val="181818"/>
           </a:solidFill>
           <a:ln w="12700">
             <a:solidFill>
-              <a:srgbClr val="282828"/>
+              <a:srgbClr val="2A2A2A"/>
             </a:solidFill>
             <a:prstDash val="solid"/>
           </a:ln>
@@ -7304,14 +8180,14 @@
       </p:sp>
       <p:sp>
         <p:nvSpPr>
-          <p:cNvPr id="11" name="Text 9"/>
-          <p:cNvSpPr/>
-          <p:nvPr/>
-        </p:nvSpPr>
-        <p:spPr>
-          <a:xfrm>
-            <a:off x="6400800" y="1645920"/>
-            <a:ext cx="4572000" cy="365760"/>
+          <p:cNvPr id="12" name="Text 10"/>
+          <p:cNvSpPr/>
+          <p:nvPr/>
+        </p:nvSpPr>
+        <p:spPr>
+          <a:xfrm>
+            <a:off x="6492240" y="1371600"/>
+            <a:ext cx="4846320" cy="365760"/>
           </a:xfrm>
           <a:prstGeom prst="rect">
             <a:avLst/>
@@ -7327,7 +8203,7 @@
               <a:buNone/>
             </a:pPr>
             <a:r>
-              <a:rPr lang="en-US" sz="1600" b="1" dirty="0">
+              <a:rPr lang="en-US" sz="1500" b="1" dirty="0">
                 <a:solidFill>
                   <a:srgbClr val="FF3B30"/>
                 </a:solidFill>
@@ -7337,20 +8213,20 @@
               </a:rPr>
               <a:t>📸 Station X4: Flash Memory</a:t>
             </a:r>
-            <a:endParaRPr lang="en-US" sz="1600" dirty="0"/>
-          </a:p>
-        </p:txBody>
-      </p:sp>
-      <p:sp>
-        <p:nvSpPr>
-          <p:cNvPr id="12" name="Text 10"/>
-          <p:cNvSpPr/>
-          <p:nvPr/>
-        </p:nvSpPr>
-        <p:spPr>
-          <a:xfrm>
-            <a:off x="6400800" y="2194560"/>
-            <a:ext cx="4572000" cy="3657600"/>
+            <a:endParaRPr lang="en-US" sz="1500" dirty="0"/>
+          </a:p>
+        </p:txBody>
+      </p:sp>
+      <p:sp>
+        <p:nvSpPr>
+          <p:cNvPr id="13" name="Text 11"/>
+          <p:cNvSpPr/>
+          <p:nvPr/>
+        </p:nvSpPr>
+        <p:spPr>
+          <a:xfrm>
+            <a:off x="6492240" y="1828800"/>
+            <a:ext cx="4846320" cy="4023360"/>
           </a:xfrm>
           <a:prstGeom prst="rect">
             <a:avLst/>
@@ -7364,12 +8240,12 @@
           <a:p>
             <a:pPr indent="0" marL="0">
               <a:lnSpc>
-                <a:spcPts val="1800"/>
-              </a:lnSpc>
-              <a:buNone/>
-            </a:pPr>
-            <a:r>
-              <a:rPr lang="en-US" sz="1100" dirty="0">
+                <a:spcPts val="1400"/>
+              </a:lnSpc>
+              <a:buNone/>
+            </a:pPr>
+            <a:r>
+              <a:rPr lang="en-US" sz="1000" dirty="0">
                 <a:solidFill>
                   <a:srgbClr val="FFFFFF"/>
                 </a:solidFill>
@@ -7379,55 +8255,75 @@
               </a:rPr>
               <a:t>CSV Template: sample_x4_questions.csv</a:t>
             </a:r>
-            <a:endParaRPr lang="en-US" sz="1100" dirty="0"/>
-          </a:p>
-          <a:p>
-            <a:pPr indent="0" marL="0">
-              <a:lnSpc>
-                <a:spcPts val="1800"/>
-              </a:lnSpc>
-              <a:buNone/>
-            </a:pPr>
-            <a:endParaRPr lang="en-US" sz="1100" dirty="0"/>
-          </a:p>
-          <a:p>
-            <a:pPr indent="0" marL="0">
-              <a:lnSpc>
-                <a:spcPts val="1800"/>
-              </a:lnSpc>
-              <a:buNone/>
-            </a:pPr>
-            <a:r>
-              <a:rPr lang="en-US" sz="1100" dirty="0">
-                <a:solidFill>
-                  <a:srgbClr val="FFFFFF"/>
-                </a:solidFill>
-                <a:latin typeface="Helvetica" pitchFamily="34" charset="0"/>
-                <a:ea typeface="Helvetica" pitchFamily="34" charset="-122"/>
-                <a:cs typeface="Helvetica" pitchFamily="34" charset="-120"/>
-              </a:rPr>
-              <a:t>Headers: station_id, question_text, choices, correct_answer</a:t>
-            </a:r>
-            <a:endParaRPr lang="en-US" sz="1100" dirty="0"/>
-          </a:p>
-          <a:p>
-            <a:pPr indent="0" marL="0">
-              <a:lnSpc>
-                <a:spcPts val="1800"/>
-              </a:lnSpc>
-              <a:buNone/>
-            </a:pPr>
-            <a:endParaRPr lang="en-US" sz="1100" dirty="0"/>
-          </a:p>
-          <a:p>
-            <a:pPr indent="0" marL="0">
-              <a:lnSpc>
-                <a:spcPts val="1800"/>
-              </a:lnSpc>
-              <a:buNone/>
-            </a:pPr>
-            <a:r>
-              <a:rPr lang="en-US" sz="1100" dirty="0">
+            <a:endParaRPr lang="en-US" sz="1000" dirty="0"/>
+          </a:p>
+          <a:p>
+            <a:pPr indent="0" marL="0">
+              <a:lnSpc>
+                <a:spcPts val="1400"/>
+              </a:lnSpc>
+              <a:buNone/>
+            </a:pPr>
+            <a:endParaRPr lang="en-US" sz="1000" dirty="0"/>
+          </a:p>
+          <a:p>
+            <a:pPr indent="0" marL="0">
+              <a:lnSpc>
+                <a:spcPts val="1400"/>
+              </a:lnSpc>
+              <a:buNone/>
+            </a:pPr>
+            <a:r>
+              <a:rPr lang="en-US" sz="1000" dirty="0">
+                <a:solidFill>
+                  <a:srgbClr val="FFFFFF"/>
+                </a:solidFill>
+                <a:latin typeface="Helvetica" pitchFamily="34" charset="0"/>
+                <a:ea typeface="Helvetica" pitchFamily="34" charset="-122"/>
+                <a:cs typeface="Helvetica" pitchFamily="34" charset="-120"/>
+              </a:rPr>
+              <a:t>Headers:</a:t>
+            </a:r>
+            <a:endParaRPr lang="en-US" sz="1000" dirty="0"/>
+          </a:p>
+          <a:p>
+            <a:pPr indent="0" marL="0">
+              <a:lnSpc>
+                <a:spcPts val="1400"/>
+              </a:lnSpc>
+              <a:buNone/>
+            </a:pPr>
+            <a:r>
+              <a:rPr lang="en-US" sz="1000" dirty="0">
+                <a:solidFill>
+                  <a:srgbClr val="FFFFFF"/>
+                </a:solidFill>
+                <a:latin typeface="Helvetica" pitchFamily="34" charset="0"/>
+                <a:ea typeface="Helvetica" pitchFamily="34" charset="-122"/>
+                <a:cs typeface="Helvetica" pitchFamily="34" charset="-120"/>
+              </a:rPr>
+              <a:t>station_id, question_text, choices, correct_answer</a:t>
+            </a:r>
+            <a:endParaRPr lang="en-US" sz="1000" dirty="0"/>
+          </a:p>
+          <a:p>
+            <a:pPr indent="0" marL="0">
+              <a:lnSpc>
+                <a:spcPts val="1400"/>
+              </a:lnSpc>
+              <a:buNone/>
+            </a:pPr>
+            <a:endParaRPr lang="en-US" sz="1000" dirty="0"/>
+          </a:p>
+          <a:p>
+            <a:pPr indent="0" marL="0">
+              <a:lnSpc>
+                <a:spcPts val="1400"/>
+              </a:lnSpc>
+              <a:buNone/>
+            </a:pPr>
+            <a:r>
+              <a:rPr lang="en-US" sz="1000" dirty="0">
                 <a:solidFill>
                   <a:srgbClr val="FFFFFF"/>
                 </a:solidFill>
@@ -7437,17 +8333,17 @@
               </a:rPr>
               <a:t>Writing Guidelines:</a:t>
             </a:r>
-            <a:endParaRPr lang="en-US" sz="1100" dirty="0"/>
-          </a:p>
-          <a:p>
-            <a:pPr indent="0" marL="0">
-              <a:lnSpc>
-                <a:spcPts val="1800"/>
-              </a:lnSpc>
-              <a:buNone/>
-            </a:pPr>
-            <a:r>
-              <a:rPr lang="en-US" sz="1100" dirty="0">
+            <a:endParaRPr lang="en-US" sz="1000" dirty="0"/>
+          </a:p>
+          <a:p>
+            <a:pPr indent="0" marL="0">
+              <a:lnSpc>
+                <a:spcPts val="1400"/>
+              </a:lnSpc>
+              <a:buNone/>
+            </a:pPr>
+            <a:r>
+              <a:rPr lang="en-US" sz="1000" dirty="0">
                 <a:solidFill>
                   <a:srgbClr val="FFFFFF"/>
                 </a:solidFill>
@@ -7457,17 +8353,17 @@
               </a:rPr>
               <a:t>• Target Count: 9 recall questions corresponding to media shown.</a:t>
             </a:r>
-            <a:endParaRPr lang="en-US" sz="1100" dirty="0"/>
-          </a:p>
-          <a:p>
-            <a:pPr indent="0" marL="0">
-              <a:lnSpc>
-                <a:spcPts val="1800"/>
-              </a:lnSpc>
-              <a:buNone/>
-            </a:pPr>
-            <a:r>
-              <a:rPr lang="en-US" sz="1100" dirty="0">
+            <a:endParaRPr lang="en-US" sz="1000" dirty="0"/>
+          </a:p>
+          <a:p>
+            <a:pPr indent="0" marL="0">
+              <a:lnSpc>
+                <a:spcPts val="1400"/>
+              </a:lnSpc>
+              <a:buNone/>
+            </a:pPr>
+            <a:r>
+              <a:rPr lang="en-US" sz="1000" dirty="0">
                 <a:solidFill>
                   <a:srgbClr val="FFFFFF"/>
                 </a:solidFill>
@@ -7477,17 +8373,17 @@
               </a:rPr>
               <a:t>• Question Focus: Specific visual details (colors, counts, sequence).</a:t>
             </a:r>
-            <a:endParaRPr lang="en-US" sz="1100" dirty="0"/>
-          </a:p>
-          <a:p>
-            <a:pPr indent="0" marL="0">
-              <a:lnSpc>
-                <a:spcPts val="1800"/>
-              </a:lnSpc>
-              <a:buNone/>
-            </a:pPr>
-            <a:r>
-              <a:rPr lang="en-US" sz="1100" dirty="0">
+            <a:endParaRPr lang="en-US" sz="1000" dirty="0"/>
+          </a:p>
+          <a:p>
+            <a:pPr indent="0" marL="0">
+              <a:lnSpc>
+                <a:spcPts val="1400"/>
+              </a:lnSpc>
+              <a:buNone/>
+            </a:pPr>
+            <a:r>
+              <a:rPr lang="en-US" sz="1000" dirty="0">
                 <a:solidFill>
                   <a:srgbClr val="FFFFFF"/>
                 </a:solidFill>
@@ -7497,7 +8393,7 @@
               </a:rPr>
               <a:t>• Correct Answer: Single letter (A, B, C, D).</a:t>
             </a:r>
-            <a:endParaRPr lang="en-US" sz="1100" dirty="0"/>
+            <a:endParaRPr lang="en-US" sz="1000" dirty="0"/>
           </a:p>
         </p:txBody>
       </p:sp>
